--- a/Scolarship Symposium.pptx
+++ b/Scolarship Symposium.pptx
@@ -5,21 +5,22 @@
     <p:sldMasterId id="2147483672" r:id="rId1"/>
   </p:sldMasterIdLst>
   <p:notesMasterIdLst>
-    <p:notesMasterId r:id="rId14"/>
+    <p:notesMasterId r:id="rId15"/>
   </p:notesMasterIdLst>
   <p:sldIdLst>
     <p:sldId id="256" r:id="rId2"/>
-    <p:sldId id="257" r:id="rId3"/>
-    <p:sldId id="260" r:id="rId4"/>
-    <p:sldId id="266" r:id="rId5"/>
-    <p:sldId id="267" r:id="rId6"/>
-    <p:sldId id="258" r:id="rId7"/>
-    <p:sldId id="259" r:id="rId8"/>
+    <p:sldId id="270" r:id="rId3"/>
+    <p:sldId id="257" r:id="rId4"/>
+    <p:sldId id="260" r:id="rId5"/>
+    <p:sldId id="266" r:id="rId6"/>
+    <p:sldId id="267" r:id="rId7"/>
+    <p:sldId id="258" r:id="rId8"/>
     <p:sldId id="261" r:id="rId9"/>
     <p:sldId id="262" r:id="rId10"/>
     <p:sldId id="264" r:id="rId11"/>
-    <p:sldId id="265" r:id="rId12"/>
-    <p:sldId id="268" r:id="rId13"/>
+    <p:sldId id="269" r:id="rId12"/>
+    <p:sldId id="265" r:id="rId13"/>
+    <p:sldId id="268" r:id="rId14"/>
   </p:sldIdLst>
   <p:sldSz cx="12192000" cy="6858000"/>
   <p:notesSz cx="6858000" cy="9144000"/>
@@ -118,6 +119,11 @@
       </a:defRPr>
     </a:lvl9pPr>
   </p:defaultTextStyle>
+  <p:extLst>
+    <p:ext uri="{EFAFB233-063F-42B5-8137-9DF3F51BA10A}">
+      <p15:sldGuideLst xmlns:p15="http://schemas.microsoft.com/office/powerpoint/2012/main"/>
+    </p:ext>
+  </p:extLst>
 </p:presentation>
 </file>
 
@@ -514,22 +520,7 @@
           <a:bodyPr/>
           <a:lstStyle/>
           <a:p>
-            <a:r>
-              <a:rPr lang="en-US" dirty="0"/>
-              <a:t>Get </a:t>
-            </a:r>
-          </a:p>
-          <a:p>
-            <a:r>
-              <a:rPr lang="en-US" dirty="0"/>
-              <a:t>Retain</a:t>
-            </a:r>
-          </a:p>
-          <a:p>
-            <a:r>
-              <a:rPr lang="en-US" dirty="0"/>
-              <a:t>Maintain</a:t>
-            </a:r>
+            <a:endParaRPr lang="en-US" dirty="0"/>
           </a:p>
         </p:txBody>
       </p:sp>
@@ -550,7 +541,7 @@
           <a:p>
             <a:fld id="{39957B42-9C2E-4808-BE61-1A853C789FAB}" type="slidenum">
               <a:rPr lang="en-US" smtClean="0"/>
-              <a:t>3</a:t>
+              <a:t>1</a:t>
             </a:fld>
             <a:endParaRPr lang="en-US"/>
           </a:p>
@@ -559,7 +550,7 @@
     </p:spTree>
     <p:extLst>
       <p:ext uri="{BB962C8B-B14F-4D97-AF65-F5344CB8AC3E}">
-        <p14:creationId xmlns:p14="http://schemas.microsoft.com/office/powerpoint/2010/main" val="3605916915"/>
+        <p14:creationId xmlns:p14="http://schemas.microsoft.com/office/powerpoint/2010/main" val="3079251291"/>
       </p:ext>
     </p:extLst>
   </p:cSld>
@@ -615,6 +606,105 @@
           <a:p>
             <a:r>
               <a:rPr lang="en-US" dirty="0"/>
+              <a:t>Get </a:t>
+            </a:r>
+          </a:p>
+          <a:p>
+            <a:r>
+              <a:rPr lang="en-US" dirty="0"/>
+              <a:t>Retain</a:t>
+            </a:r>
+          </a:p>
+          <a:p>
+            <a:r>
+              <a:rPr lang="en-US" dirty="0"/>
+              <a:t>Maintain</a:t>
+            </a:r>
+          </a:p>
+        </p:txBody>
+      </p:sp>
+      <p:sp>
+        <p:nvSpPr>
+          <p:cNvPr id="4" name="Slide Number Placeholder 3"/>
+          <p:cNvSpPr>
+            <a:spLocks noGrp="1"/>
+          </p:cNvSpPr>
+          <p:nvPr>
+            <p:ph type="sldNum" sz="quarter" idx="5"/>
+          </p:nvPr>
+        </p:nvSpPr>
+        <p:spPr/>
+        <p:txBody>
+          <a:bodyPr/>
+          <a:lstStyle/>
+          <a:p>
+            <a:fld id="{39957B42-9C2E-4808-BE61-1A853C789FAB}" type="slidenum">
+              <a:rPr lang="en-US" smtClean="0"/>
+              <a:t>4</a:t>
+            </a:fld>
+            <a:endParaRPr lang="en-US"/>
+          </a:p>
+        </p:txBody>
+      </p:sp>
+    </p:spTree>
+    <p:extLst>
+      <p:ext uri="{BB962C8B-B14F-4D97-AF65-F5344CB8AC3E}">
+        <p14:creationId xmlns:p14="http://schemas.microsoft.com/office/powerpoint/2010/main" val="3605916915"/>
+      </p:ext>
+    </p:extLst>
+  </p:cSld>
+  <p:clrMapOvr>
+    <a:masterClrMapping/>
+  </p:clrMapOvr>
+</p:notes>
+</file>
+
+<file path=ppt/notesSlides/notesSlide3.xml><?xml version="1.0" encoding="utf-8"?>
+<p:notes xmlns:a="http://schemas.openxmlformats.org/drawingml/2006/main" xmlns:r="http://schemas.openxmlformats.org/officeDocument/2006/relationships" xmlns:p="http://schemas.openxmlformats.org/presentationml/2006/main">
+  <p:cSld>
+    <p:spTree>
+      <p:nvGrpSpPr>
+        <p:cNvPr id="1" name=""/>
+        <p:cNvGrpSpPr/>
+        <p:nvPr/>
+      </p:nvGrpSpPr>
+      <p:grpSpPr>
+        <a:xfrm>
+          <a:off x="0" y="0"/>
+          <a:ext cx="0" cy="0"/>
+          <a:chOff x="0" y="0"/>
+          <a:chExt cx="0" cy="0"/>
+        </a:xfrm>
+      </p:grpSpPr>
+      <p:sp>
+        <p:nvSpPr>
+          <p:cNvPr id="2" name="Slide Image Placeholder 1"/>
+          <p:cNvSpPr>
+            <a:spLocks noGrp="1" noRot="1" noChangeAspect="1"/>
+          </p:cNvSpPr>
+          <p:nvPr>
+            <p:ph type="sldImg"/>
+          </p:nvPr>
+        </p:nvSpPr>
+        <p:spPr/>
+      </p:sp>
+      <p:sp>
+        <p:nvSpPr>
+          <p:cNvPr id="3" name="Notes Placeholder 2"/>
+          <p:cNvSpPr>
+            <a:spLocks noGrp="1"/>
+          </p:cNvSpPr>
+          <p:nvPr>
+            <p:ph type="body" idx="1"/>
+          </p:nvPr>
+        </p:nvSpPr>
+        <p:spPr/>
+        <p:txBody>
+          <a:bodyPr/>
+          <a:lstStyle/>
+          <a:p>
+            <a:r>
+              <a:rPr lang="en-US" dirty="0"/>
               <a:t>Reel</a:t>
             </a:r>
           </a:p>
@@ -896,7 +986,7 @@
 </p:notes>
 </file>
 
-<file path=ppt/notesSlides/notesSlide3.xml><?xml version="1.0" encoding="utf-8"?>
+<file path=ppt/notesSlides/notesSlide4.xml><?xml version="1.0" encoding="utf-8"?>
 <p:notes xmlns:a="http://schemas.openxmlformats.org/drawingml/2006/main" xmlns:r="http://schemas.openxmlformats.org/officeDocument/2006/relationships" xmlns:p="http://schemas.openxmlformats.org/presentationml/2006/main">
   <p:cSld>
     <p:spTree>
@@ -1702,7 +1792,7 @@
           <a:p>
             <a:fld id="{54EE00D9-0E8B-4EEB-87D3-6B20B0F560C5}" type="datetimeFigureOut">
               <a:rPr lang="en-US" smtClean="0"/>
-              <a:t>3/19/2026</a:t>
+              <a:t>3/20/2026</a:t>
             </a:fld>
             <a:endParaRPr lang="en-US"/>
           </a:p>
@@ -1953,7 +2043,7 @@
           <a:p>
             <a:fld id="{54EE00D9-0E8B-4EEB-87D3-6B20B0F560C5}" type="datetimeFigureOut">
               <a:rPr lang="en-US" smtClean="0"/>
-              <a:t>3/19/2026</a:t>
+              <a:t>3/20/2026</a:t>
             </a:fld>
             <a:endParaRPr lang="en-US"/>
           </a:p>
@@ -2267,7 +2357,7 @@
           <a:p>
             <a:fld id="{54EE00D9-0E8B-4EEB-87D3-6B20B0F560C5}" type="datetimeFigureOut">
               <a:rPr lang="en-US" smtClean="0"/>
-              <a:t>3/19/2026</a:t>
+              <a:t>3/20/2026</a:t>
             </a:fld>
             <a:endParaRPr lang="en-US"/>
           </a:p>
@@ -2608,7 +2698,7 @@
           <a:p>
             <a:fld id="{54EE00D9-0E8B-4EEB-87D3-6B20B0F560C5}" type="datetimeFigureOut">
               <a:rPr lang="en-US" smtClean="0"/>
-              <a:t>3/19/2026</a:t>
+              <a:t>3/20/2026</a:t>
             </a:fld>
             <a:endParaRPr lang="en-US"/>
           </a:p>
@@ -2922,7 +3012,7 @@
           <a:p>
             <a:fld id="{54EE00D9-0E8B-4EEB-87D3-6B20B0F560C5}" type="datetimeFigureOut">
               <a:rPr lang="en-US" smtClean="0"/>
-              <a:t>3/19/2026</a:t>
+              <a:t>3/20/2026</a:t>
             </a:fld>
             <a:endParaRPr lang="en-US"/>
           </a:p>
@@ -3315,7 +3405,7 @@
           <a:p>
             <a:fld id="{54EE00D9-0E8B-4EEB-87D3-6B20B0F560C5}" type="datetimeFigureOut">
               <a:rPr lang="en-US" smtClean="0"/>
-              <a:t>3/19/2026</a:t>
+              <a:t>3/20/2026</a:t>
             </a:fld>
             <a:endParaRPr lang="en-US"/>
           </a:p>
@@ -3485,7 +3575,7 @@
           <a:p>
             <a:fld id="{54EE00D9-0E8B-4EEB-87D3-6B20B0F560C5}" type="datetimeFigureOut">
               <a:rPr lang="en-US" smtClean="0"/>
-              <a:t>3/19/2026</a:t>
+              <a:t>3/20/2026</a:t>
             </a:fld>
             <a:endParaRPr lang="en-US"/>
           </a:p>
@@ -3665,7 +3755,7 @@
           <a:p>
             <a:fld id="{54EE00D9-0E8B-4EEB-87D3-6B20B0F560C5}" type="datetimeFigureOut">
               <a:rPr lang="en-US" smtClean="0"/>
-              <a:t>3/19/2026</a:t>
+              <a:t>3/20/2026</a:t>
             </a:fld>
             <a:endParaRPr lang="en-US"/>
           </a:p>
@@ -3841,7 +3931,7 @@
           <a:p>
             <a:fld id="{54EE00D9-0E8B-4EEB-87D3-6B20B0F560C5}" type="datetimeFigureOut">
               <a:rPr lang="en-US" smtClean="0"/>
-              <a:t>3/19/2026</a:t>
+              <a:t>3/20/2026</a:t>
             </a:fld>
             <a:endParaRPr lang="en-US"/>
           </a:p>
@@ -4088,7 +4178,7 @@
           <a:p>
             <a:fld id="{54EE00D9-0E8B-4EEB-87D3-6B20B0F560C5}" type="datetimeFigureOut">
               <a:rPr lang="en-US" smtClean="0"/>
-              <a:t>3/19/2026</a:t>
+              <a:t>3/20/2026</a:t>
             </a:fld>
             <a:endParaRPr lang="en-US"/>
           </a:p>
@@ -4320,7 +4410,7 @@
           <a:p>
             <a:fld id="{54EE00D9-0E8B-4EEB-87D3-6B20B0F560C5}" type="datetimeFigureOut">
               <a:rPr lang="en-US" smtClean="0"/>
-              <a:t>3/19/2026</a:t>
+              <a:t>3/20/2026</a:t>
             </a:fld>
             <a:endParaRPr lang="en-US"/>
           </a:p>
@@ -4694,7 +4784,7 @@
           <a:p>
             <a:fld id="{54EE00D9-0E8B-4EEB-87D3-6B20B0F560C5}" type="datetimeFigureOut">
               <a:rPr lang="en-US" smtClean="0"/>
-              <a:t>3/19/2026</a:t>
+              <a:t>3/20/2026</a:t>
             </a:fld>
             <a:endParaRPr lang="en-US"/>
           </a:p>
@@ -4817,7 +4907,7 @@
           <a:p>
             <a:fld id="{54EE00D9-0E8B-4EEB-87D3-6B20B0F560C5}" type="datetimeFigureOut">
               <a:rPr lang="en-US" smtClean="0"/>
-              <a:t>3/19/2026</a:t>
+              <a:t>3/20/2026</a:t>
             </a:fld>
             <a:endParaRPr lang="en-US"/>
           </a:p>
@@ -4912,7 +5002,7 @@
           <a:p>
             <a:fld id="{54EE00D9-0E8B-4EEB-87D3-6B20B0F560C5}" type="datetimeFigureOut">
               <a:rPr lang="en-US" smtClean="0"/>
-              <a:t>3/19/2026</a:t>
+              <a:t>3/20/2026</a:t>
             </a:fld>
             <a:endParaRPr lang="en-US"/>
           </a:p>
@@ -5167,7 +5257,7 @@
           <a:p>
             <a:fld id="{54EE00D9-0E8B-4EEB-87D3-6B20B0F560C5}" type="datetimeFigureOut">
               <a:rPr lang="en-US" smtClean="0"/>
-              <a:t>3/19/2026</a:t>
+              <a:t>3/20/2026</a:t>
             </a:fld>
             <a:endParaRPr lang="en-US"/>
           </a:p>
@@ -5430,7 +5520,7 @@
           <a:p>
             <a:fld id="{54EE00D9-0E8B-4EEB-87D3-6B20B0F560C5}" type="datetimeFigureOut">
               <a:rPr lang="en-US" smtClean="0"/>
-              <a:t>3/19/2026</a:t>
+              <a:t>3/20/2026</a:t>
             </a:fld>
             <a:endParaRPr lang="en-US"/>
           </a:p>
@@ -6173,7 +6263,7 @@
           <a:p>
             <a:fld id="{54EE00D9-0E8B-4EEB-87D3-6B20B0F560C5}" type="datetimeFigureOut">
               <a:rPr lang="en-US" smtClean="0"/>
-              <a:t>3/19/2026</a:t>
+              <a:t>3/20/2026</a:t>
             </a:fld>
             <a:endParaRPr lang="en-US"/>
           </a:p>
@@ -6841,22 +6931,514 @@
             </a:r>
           </a:p>
           <a:p>
+            <a:pPr marL="0" indent="0">
+              <a:buNone/>
+            </a:pPr>
             <a:endParaRPr lang="en-US" dirty="0"/>
           </a:p>
-          <a:p>
-            <a:r>
-              <a:rPr lang="en-US" dirty="0"/>
-              <a:t>Characters = 301</a:t>
-            </a:r>
-          </a:p>
-          <a:p>
-            <a:r>
-              <a:rPr lang="en-US" dirty="0"/>
-              <a:t>Words = 43</a:t>
-            </a:r>
-          </a:p>
-        </p:txBody>
-      </p:sp>
+        </p:txBody>
+      </p:sp>
+      <p:graphicFrame>
+        <p:nvGraphicFramePr>
+          <p:cNvPr id="4" name="Table 3">
+            <a:extLst>
+              <a:ext uri="{FF2B5EF4-FFF2-40B4-BE49-F238E27FC236}">
+                <a16:creationId xmlns:a16="http://schemas.microsoft.com/office/drawing/2014/main" id="{E74F61F8-8836-4DFF-A90B-4343BB165FF6}"/>
+              </a:ext>
+            </a:extLst>
+          </p:cNvPr>
+          <p:cNvGraphicFramePr>
+            <a:graphicFrameLocks noGrp="1"/>
+          </p:cNvGraphicFramePr>
+          <p:nvPr>
+            <p:extLst>
+              <p:ext uri="{D42A27DB-BD31-4B8C-83A1-F6EECF244321}">
+                <p14:modId xmlns:p14="http://schemas.microsoft.com/office/powerpoint/2010/main" val="586515612"/>
+              </p:ext>
+            </p:extLst>
+          </p:nvPr>
+        </p:nvGraphicFramePr>
+        <p:xfrm>
+          <a:off x="1041400" y="3839499"/>
+          <a:ext cx="3159125" cy="2408901"/>
+        </p:xfrm>
+        <a:graphic>
+          <a:graphicData uri="http://schemas.openxmlformats.org/drawingml/2006/table">
+            <a:tbl>
+              <a:tblPr>
+                <a:tableStyleId>{5C22544A-7EE6-4342-B048-85BDC9FD1C3A}</a:tableStyleId>
+              </a:tblPr>
+              <a:tblGrid>
+                <a:gridCol w="858792">
+                  <a:extLst>
+                    <a:ext uri="{9D8B030D-6E8A-4147-A177-3AD203B41FA5}">
+                      <a16:colId xmlns:a16="http://schemas.microsoft.com/office/drawing/2014/main" val="1655049291"/>
+                    </a:ext>
+                  </a:extLst>
+                </a:gridCol>
+                <a:gridCol w="1088824">
+                  <a:extLst>
+                    <a:ext uri="{9D8B030D-6E8A-4147-A177-3AD203B41FA5}">
+                      <a16:colId xmlns:a16="http://schemas.microsoft.com/office/drawing/2014/main" val="1575252837"/>
+                    </a:ext>
+                  </a:extLst>
+                </a:gridCol>
+                <a:gridCol w="1211509">
+                  <a:extLst>
+                    <a:ext uri="{9D8B030D-6E8A-4147-A177-3AD203B41FA5}">
+                      <a16:colId xmlns:a16="http://schemas.microsoft.com/office/drawing/2014/main" val="1863034092"/>
+                    </a:ext>
+                  </a:extLst>
+                </a:gridCol>
+              </a:tblGrid>
+              <a:tr h="640251">
+                <a:tc>
+                  <a:txBody>
+                    <a:bodyPr/>
+                    <a:lstStyle/>
+                    <a:p>
+                      <a:pPr algn="ctr" fontAlgn="ctr"/>
+                      <a:endParaRPr lang="en-US" sz="1000" b="0" i="0" u="none" strike="noStrike">
+                        <a:solidFill>
+                          <a:srgbClr val="FF0000"/>
+                        </a:solidFill>
+                        <a:effectLst/>
+                        <a:latin typeface="Consolas" panose="020B0609020204030204" pitchFamily="49" charset="0"/>
+                      </a:endParaRPr>
+                    </a:p>
+                  </a:txBody>
+                  <a:tcPr marL="9525" marR="9525" marT="9525" marB="0" anchor="ctr"/>
+                </a:tc>
+                <a:tc>
+                  <a:txBody>
+                    <a:bodyPr/>
+                    <a:lstStyle/>
+                    <a:p>
+                      <a:pPr algn="ctr" fontAlgn="ctr"/>
+                      <a:r>
+                        <a:rPr lang="en-US" sz="1100" u="none" strike="noStrike">
+                          <a:effectLst/>
+                        </a:rPr>
+                        <a:t>sentiment</a:t>
+                      </a:r>
+                      <a:endParaRPr lang="en-US" sz="1100" b="0" i="0" u="none" strike="noStrike">
+                        <a:solidFill>
+                          <a:srgbClr val="FF0000"/>
+                        </a:solidFill>
+                        <a:effectLst/>
+                        <a:latin typeface="Calibri" panose="020F0502020204030204" pitchFamily="34" charset="0"/>
+                      </a:endParaRPr>
+                    </a:p>
+                  </a:txBody>
+                  <a:tcPr marL="9525" marR="9525" marT="9525" marB="0" anchor="ctr"/>
+                </a:tc>
+                <a:tc>
+                  <a:txBody>
+                    <a:bodyPr/>
+                    <a:lstStyle/>
+                    <a:p>
+                      <a:pPr algn="ctr" fontAlgn="ctr"/>
+                      <a:r>
+                        <a:rPr lang="en-US" sz="1100" u="none" strike="noStrike">
+                          <a:effectLst/>
+                        </a:rPr>
+                        <a:t>subjectivity</a:t>
+                      </a:r>
+                      <a:endParaRPr lang="en-US" sz="1100" b="0" i="0" u="none" strike="noStrike">
+                        <a:solidFill>
+                          <a:srgbClr val="FF0000"/>
+                        </a:solidFill>
+                        <a:effectLst/>
+                        <a:latin typeface="Calibri" panose="020F0502020204030204" pitchFamily="34" charset="0"/>
+                      </a:endParaRPr>
+                    </a:p>
+                  </a:txBody>
+                  <a:tcPr marL="9525" marR="9525" marT="9525" marB="0" anchor="ctr"/>
+                </a:tc>
+                <a:extLst>
+                  <a:ext uri="{0D108BD9-81ED-4DB2-BD59-A6C34878D82A}">
+                    <a16:rowId xmlns:a16="http://schemas.microsoft.com/office/drawing/2014/main" val="3936685550"/>
+                  </a:ext>
+                </a:extLst>
+              </a:tr>
+              <a:tr h="353730">
+                <a:tc>
+                  <a:txBody>
+                    <a:bodyPr/>
+                    <a:lstStyle/>
+                    <a:p>
+                      <a:pPr algn="ctr" fontAlgn="ctr"/>
+                      <a:r>
+                        <a:rPr lang="en-US" sz="1000" u="none" strike="noStrike">
+                          <a:effectLst/>
+                        </a:rPr>
+                        <a:t>cluster</a:t>
+                      </a:r>
+                      <a:endParaRPr lang="en-US" sz="1000" b="0" i="0" u="none" strike="noStrike">
+                        <a:solidFill>
+                          <a:srgbClr val="FF0000"/>
+                        </a:solidFill>
+                        <a:effectLst/>
+                        <a:latin typeface="Consolas" panose="020B0609020204030204" pitchFamily="49" charset="0"/>
+                      </a:endParaRPr>
+                    </a:p>
+                  </a:txBody>
+                  <a:tcPr marL="9525" marR="9525" marT="9525" marB="0" anchor="ctr"/>
+                </a:tc>
+                <a:tc>
+                  <a:txBody>
+                    <a:bodyPr/>
+                    <a:lstStyle/>
+                    <a:p>
+                      <a:pPr algn="ctr" fontAlgn="ctr"/>
+                      <a:endParaRPr lang="en-US" sz="1100" b="0" i="0" u="none" strike="noStrike">
+                        <a:solidFill>
+                          <a:srgbClr val="FF0000"/>
+                        </a:solidFill>
+                        <a:effectLst/>
+                        <a:latin typeface="Calibri" panose="020F0502020204030204" pitchFamily="34" charset="0"/>
+                      </a:endParaRPr>
+                    </a:p>
+                  </a:txBody>
+                  <a:tcPr marL="9525" marR="9525" marT="9525" marB="0" anchor="ctr"/>
+                </a:tc>
+                <a:tc>
+                  <a:txBody>
+                    <a:bodyPr/>
+                    <a:lstStyle/>
+                    <a:p>
+                      <a:pPr algn="ctr" fontAlgn="ctr"/>
+                      <a:endParaRPr lang="en-US" sz="1100" b="0" i="0" u="none" strike="noStrike">
+                        <a:solidFill>
+                          <a:srgbClr val="FF0000"/>
+                        </a:solidFill>
+                        <a:effectLst/>
+                        <a:latin typeface="Calibri" panose="020F0502020204030204" pitchFamily="34" charset="0"/>
+                      </a:endParaRPr>
+                    </a:p>
+                  </a:txBody>
+                  <a:tcPr marL="9525" marR="9525" marT="9525" marB="0" anchor="ctr"/>
+                </a:tc>
+                <a:extLst>
+                  <a:ext uri="{0D108BD9-81ED-4DB2-BD59-A6C34878D82A}">
+                    <a16:rowId xmlns:a16="http://schemas.microsoft.com/office/drawing/2014/main" val="193498854"/>
+                  </a:ext>
+                </a:extLst>
+              </a:tr>
+              <a:tr h="353730">
+                <a:tc>
+                  <a:txBody>
+                    <a:bodyPr/>
+                    <a:lstStyle/>
+                    <a:p>
+                      <a:pPr algn="ctr" fontAlgn="ctr"/>
+                      <a:r>
+                        <a:rPr lang="en-US" sz="1000" u="none" strike="noStrike" dirty="0">
+                          <a:solidFill>
+                            <a:srgbClr val="FF0000"/>
+                          </a:solidFill>
+                          <a:effectLst/>
+                        </a:rPr>
+                        <a:t>0</a:t>
+                      </a:r>
+                      <a:endParaRPr lang="en-US" sz="1000" b="0" i="0" u="none" strike="noStrike" dirty="0">
+                        <a:solidFill>
+                          <a:srgbClr val="FF0000"/>
+                        </a:solidFill>
+                        <a:effectLst/>
+                        <a:latin typeface="Consolas" panose="020B0609020204030204" pitchFamily="49" charset="0"/>
+                      </a:endParaRPr>
+                    </a:p>
+                  </a:txBody>
+                  <a:tcPr marL="9525" marR="9525" marT="9525" marB="0" anchor="ctr"/>
+                </a:tc>
+                <a:tc>
+                  <a:txBody>
+                    <a:bodyPr/>
+                    <a:lstStyle/>
+                    <a:p>
+                      <a:pPr algn="ctr" fontAlgn="ctr"/>
+                      <a:r>
+                        <a:rPr lang="en-US" sz="1100" u="none" strike="noStrike" dirty="0">
+                          <a:solidFill>
+                            <a:srgbClr val="FF0000"/>
+                          </a:solidFill>
+                          <a:effectLst/>
+                        </a:rPr>
+                        <a:t>0.222052</a:t>
+                      </a:r>
+                      <a:endParaRPr lang="en-US" sz="1100" b="0" i="0" u="none" strike="noStrike" dirty="0">
+                        <a:solidFill>
+                          <a:srgbClr val="FF0000"/>
+                        </a:solidFill>
+                        <a:effectLst/>
+                        <a:latin typeface="Calibri" panose="020F0502020204030204" pitchFamily="34" charset="0"/>
+                      </a:endParaRPr>
+                    </a:p>
+                  </a:txBody>
+                  <a:tcPr marL="9525" marR="9525" marT="9525" marB="0" anchor="ctr"/>
+                </a:tc>
+                <a:tc>
+                  <a:txBody>
+                    <a:bodyPr/>
+                    <a:lstStyle/>
+                    <a:p>
+                      <a:pPr algn="ctr" fontAlgn="ctr"/>
+                      <a:r>
+                        <a:rPr lang="en-US" sz="1100" u="none" strike="noStrike" dirty="0">
+                          <a:solidFill>
+                            <a:srgbClr val="FF0000"/>
+                          </a:solidFill>
+                          <a:effectLst/>
+                        </a:rPr>
+                        <a:t>0.326461</a:t>
+                      </a:r>
+                      <a:endParaRPr lang="en-US" sz="1100" b="0" i="0" u="none" strike="noStrike" dirty="0">
+                        <a:solidFill>
+                          <a:srgbClr val="FF0000"/>
+                        </a:solidFill>
+                        <a:effectLst/>
+                        <a:latin typeface="Calibri" panose="020F0502020204030204" pitchFamily="34" charset="0"/>
+                      </a:endParaRPr>
+                    </a:p>
+                  </a:txBody>
+                  <a:tcPr marL="9525" marR="9525" marT="9525" marB="0" anchor="ctr"/>
+                </a:tc>
+                <a:extLst>
+                  <a:ext uri="{0D108BD9-81ED-4DB2-BD59-A6C34878D82A}">
+                    <a16:rowId xmlns:a16="http://schemas.microsoft.com/office/drawing/2014/main" val="963202060"/>
+                  </a:ext>
+                </a:extLst>
+              </a:tr>
+              <a:tr h="353730">
+                <a:tc>
+                  <a:txBody>
+                    <a:bodyPr/>
+                    <a:lstStyle/>
+                    <a:p>
+                      <a:pPr algn="ctr" fontAlgn="ctr"/>
+                      <a:r>
+                        <a:rPr lang="en-US" sz="1000" u="none" strike="noStrike">
+                          <a:effectLst/>
+                        </a:rPr>
+                        <a:t>1</a:t>
+                      </a:r>
+                      <a:endParaRPr lang="en-US" sz="1000" b="0" i="0" u="none" strike="noStrike">
+                        <a:solidFill>
+                          <a:srgbClr val="FF0000"/>
+                        </a:solidFill>
+                        <a:effectLst/>
+                        <a:latin typeface="Consolas" panose="020B0609020204030204" pitchFamily="49" charset="0"/>
+                      </a:endParaRPr>
+                    </a:p>
+                  </a:txBody>
+                  <a:tcPr marL="9525" marR="9525" marT="9525" marB="0" anchor="ctr"/>
+                </a:tc>
+                <a:tc>
+                  <a:txBody>
+                    <a:bodyPr/>
+                    <a:lstStyle/>
+                    <a:p>
+                      <a:pPr algn="ctr" fontAlgn="ctr"/>
+                      <a:r>
+                        <a:rPr lang="en-US" sz="1100" u="none" strike="noStrike">
+                          <a:effectLst/>
+                        </a:rPr>
+                        <a:t>0.123042</a:t>
+                      </a:r>
+                      <a:endParaRPr lang="en-US" sz="1100" b="0" i="0" u="none" strike="noStrike">
+                        <a:solidFill>
+                          <a:srgbClr val="FF0000"/>
+                        </a:solidFill>
+                        <a:effectLst/>
+                        <a:latin typeface="Calibri" panose="020F0502020204030204" pitchFamily="34" charset="0"/>
+                      </a:endParaRPr>
+                    </a:p>
+                  </a:txBody>
+                  <a:tcPr marL="9525" marR="9525" marT="9525" marB="0" anchor="ctr"/>
+                </a:tc>
+                <a:tc>
+                  <a:txBody>
+                    <a:bodyPr/>
+                    <a:lstStyle/>
+                    <a:p>
+                      <a:pPr algn="ctr" fontAlgn="ctr"/>
+                      <a:r>
+                        <a:rPr lang="en-US" sz="1100" u="none" strike="noStrike">
+                          <a:effectLst/>
+                        </a:rPr>
+                        <a:t>0.296481</a:t>
+                      </a:r>
+                      <a:endParaRPr lang="en-US" sz="1100" b="0" i="0" u="none" strike="noStrike">
+                        <a:solidFill>
+                          <a:srgbClr val="FF0000"/>
+                        </a:solidFill>
+                        <a:effectLst/>
+                        <a:latin typeface="Calibri" panose="020F0502020204030204" pitchFamily="34" charset="0"/>
+                      </a:endParaRPr>
+                    </a:p>
+                  </a:txBody>
+                  <a:tcPr marL="9525" marR="9525" marT="9525" marB="0" anchor="ctr"/>
+                </a:tc>
+                <a:extLst>
+                  <a:ext uri="{0D108BD9-81ED-4DB2-BD59-A6C34878D82A}">
+                    <a16:rowId xmlns:a16="http://schemas.microsoft.com/office/drawing/2014/main" val="4074244370"/>
+                  </a:ext>
+                </a:extLst>
+              </a:tr>
+              <a:tr h="353730">
+                <a:tc>
+                  <a:txBody>
+                    <a:bodyPr/>
+                    <a:lstStyle/>
+                    <a:p>
+                      <a:pPr algn="ctr" fontAlgn="ctr"/>
+                      <a:r>
+                        <a:rPr lang="en-US" sz="1000" u="none" strike="noStrike" dirty="0">
+                          <a:effectLst/>
+                        </a:rPr>
+                        <a:t>2</a:t>
+                      </a:r>
+                      <a:endParaRPr lang="en-US" sz="1000" b="0" i="0" u="none" strike="noStrike" dirty="0">
+                        <a:solidFill>
+                          <a:srgbClr val="FF0000"/>
+                        </a:solidFill>
+                        <a:effectLst/>
+                        <a:latin typeface="Consolas" panose="020B0609020204030204" pitchFamily="49" charset="0"/>
+                      </a:endParaRPr>
+                    </a:p>
+                  </a:txBody>
+                  <a:tcPr marL="9525" marR="9525" marT="9525" marB="0" anchor="ctr"/>
+                </a:tc>
+                <a:tc>
+                  <a:txBody>
+                    <a:bodyPr/>
+                    <a:lstStyle/>
+                    <a:p>
+                      <a:pPr algn="ctr" fontAlgn="ctr"/>
+                      <a:r>
+                        <a:rPr lang="en-US" sz="1100" u="none" strike="noStrike">
+                          <a:effectLst/>
+                        </a:rPr>
+                        <a:t>0.215238</a:t>
+                      </a:r>
+                      <a:endParaRPr lang="en-US" sz="1100" b="0" i="0" u="none" strike="noStrike">
+                        <a:solidFill>
+                          <a:srgbClr val="FF0000"/>
+                        </a:solidFill>
+                        <a:effectLst/>
+                        <a:latin typeface="Calibri" panose="020F0502020204030204" pitchFamily="34" charset="0"/>
+                      </a:endParaRPr>
+                    </a:p>
+                  </a:txBody>
+                  <a:tcPr marL="9525" marR="9525" marT="9525" marB="0" anchor="ctr"/>
+                </a:tc>
+                <a:tc>
+                  <a:txBody>
+                    <a:bodyPr/>
+                    <a:lstStyle/>
+                    <a:p>
+                      <a:pPr algn="ctr" fontAlgn="ctr"/>
+                      <a:r>
+                        <a:rPr lang="en-US" sz="1100" u="none" strike="noStrike">
+                          <a:effectLst/>
+                        </a:rPr>
+                        <a:t>0.406514</a:t>
+                      </a:r>
+                      <a:endParaRPr lang="en-US" sz="1100" b="0" i="0" u="none" strike="noStrike">
+                        <a:solidFill>
+                          <a:srgbClr val="FF0000"/>
+                        </a:solidFill>
+                        <a:effectLst/>
+                        <a:latin typeface="Calibri" panose="020F0502020204030204" pitchFamily="34" charset="0"/>
+                      </a:endParaRPr>
+                    </a:p>
+                  </a:txBody>
+                  <a:tcPr marL="9525" marR="9525" marT="9525" marB="0" anchor="ctr"/>
+                </a:tc>
+                <a:extLst>
+                  <a:ext uri="{0D108BD9-81ED-4DB2-BD59-A6C34878D82A}">
+                    <a16:rowId xmlns:a16="http://schemas.microsoft.com/office/drawing/2014/main" val="2917244701"/>
+                  </a:ext>
+                </a:extLst>
+              </a:tr>
+              <a:tr h="353730">
+                <a:tc>
+                  <a:txBody>
+                    <a:bodyPr/>
+                    <a:lstStyle/>
+                    <a:p>
+                      <a:pPr marL="0" algn="ctr" defTabSz="457200" rtl="0" eaLnBrk="1" fontAlgn="ctr" latinLnBrk="0" hangingPunct="1"/>
+                      <a:r>
+                        <a:rPr lang="en-US" sz="1000" u="none" strike="noStrike" kern="1200" dirty="0">
+                          <a:solidFill>
+                            <a:srgbClr val="FF0000"/>
+                          </a:solidFill>
+                          <a:effectLst/>
+                          <a:latin typeface="+mn-lt"/>
+                          <a:ea typeface="+mn-ea"/>
+                          <a:cs typeface="+mn-cs"/>
+                        </a:rPr>
+                        <a:t>3</a:t>
+                      </a:r>
+                    </a:p>
+                  </a:txBody>
+                  <a:tcPr marL="9525" marR="9525" marT="9525" marB="0" anchor="ctr"/>
+                </a:tc>
+                <a:tc>
+                  <a:txBody>
+                    <a:bodyPr/>
+                    <a:lstStyle/>
+                    <a:p>
+                      <a:pPr marL="0" algn="ctr" defTabSz="457200" rtl="0" eaLnBrk="1" fontAlgn="ctr" latinLnBrk="0" hangingPunct="1"/>
+                      <a:r>
+                        <a:rPr lang="en-US" sz="1000" u="none" strike="noStrike" kern="1200" dirty="0">
+                          <a:solidFill>
+                            <a:srgbClr val="FF0000"/>
+                          </a:solidFill>
+                          <a:effectLst/>
+                          <a:latin typeface="+mn-lt"/>
+                          <a:ea typeface="+mn-ea"/>
+                          <a:cs typeface="+mn-cs"/>
+                        </a:rPr>
+                        <a:t>0.204919</a:t>
+                      </a:r>
+                    </a:p>
+                  </a:txBody>
+                  <a:tcPr marL="9525" marR="9525" marT="9525" marB="0" anchor="ctr"/>
+                </a:tc>
+                <a:tc>
+                  <a:txBody>
+                    <a:bodyPr/>
+                    <a:lstStyle/>
+                    <a:p>
+                      <a:pPr marL="0" algn="ctr" defTabSz="457200" rtl="0" eaLnBrk="1" fontAlgn="ctr" latinLnBrk="0" hangingPunct="1"/>
+                      <a:r>
+                        <a:rPr lang="en-US" sz="1000" u="none" strike="noStrike" kern="1200" dirty="0">
+                          <a:solidFill>
+                            <a:srgbClr val="FF0000"/>
+                          </a:solidFill>
+                          <a:effectLst/>
+                          <a:latin typeface="+mn-lt"/>
+                          <a:ea typeface="+mn-ea"/>
+                          <a:cs typeface="+mn-cs"/>
+                        </a:rPr>
+                        <a:t>0.476852</a:t>
+                      </a:r>
+                    </a:p>
+                  </a:txBody>
+                  <a:tcPr marL="9525" marR="9525" marT="9525" marB="0" anchor="ctr"/>
+                </a:tc>
+                <a:extLst>
+                  <a:ext uri="{0D108BD9-81ED-4DB2-BD59-A6C34878D82A}">
+                    <a16:rowId xmlns:a16="http://schemas.microsoft.com/office/drawing/2014/main" val="3187902103"/>
+                  </a:ext>
+                </a:extLst>
+              </a:tr>
+            </a:tbl>
+          </a:graphicData>
+        </a:graphic>
+      </p:graphicFrame>
     </p:spTree>
     <p:extLst>
       <p:ext uri="{BB962C8B-B14F-4D97-AF65-F5344CB8AC3E}">
@@ -6871,6 +7453,98 @@
 </file>
 
 <file path=ppt/slides/slide11.xml><?xml version="1.0" encoding="utf-8"?>
+<p:sld xmlns:a="http://schemas.openxmlformats.org/drawingml/2006/main" xmlns:r="http://schemas.openxmlformats.org/officeDocument/2006/relationships" xmlns:p="http://schemas.openxmlformats.org/presentationml/2006/main">
+  <p:cSld>
+    <p:spTree>
+      <p:nvGrpSpPr>
+        <p:cNvPr id="1" name=""/>
+        <p:cNvGrpSpPr/>
+        <p:nvPr/>
+      </p:nvGrpSpPr>
+      <p:grpSpPr>
+        <a:xfrm>
+          <a:off x="0" y="0"/>
+          <a:ext cx="0" cy="0"/>
+          <a:chOff x="0" y="0"/>
+          <a:chExt cx="0" cy="0"/>
+        </a:xfrm>
+      </p:grpSpPr>
+      <p:sp>
+        <p:nvSpPr>
+          <p:cNvPr id="2" name="Title 1">
+            <a:extLst>
+              <a:ext uri="{FF2B5EF4-FFF2-40B4-BE49-F238E27FC236}">
+                <a16:creationId xmlns:a16="http://schemas.microsoft.com/office/drawing/2014/main" id="{82C50CD1-3386-425A-A82E-73CED8071C99}"/>
+              </a:ext>
+            </a:extLst>
+          </p:cNvPr>
+          <p:cNvSpPr>
+            <a:spLocks noGrp="1"/>
+          </p:cNvSpPr>
+          <p:nvPr>
+            <p:ph type="title"/>
+          </p:nvPr>
+        </p:nvSpPr>
+        <p:spPr/>
+        <p:txBody>
+          <a:bodyPr/>
+          <a:lstStyle/>
+          <a:p>
+            <a:endParaRPr lang="en-US" dirty="0"/>
+          </a:p>
+        </p:txBody>
+      </p:sp>
+      <p:sp>
+        <p:nvSpPr>
+          <p:cNvPr id="3" name="Content Placeholder 2">
+            <a:extLst>
+              <a:ext uri="{FF2B5EF4-FFF2-40B4-BE49-F238E27FC236}">
+                <a16:creationId xmlns:a16="http://schemas.microsoft.com/office/drawing/2014/main" id="{1924AF6C-32D4-4F67-A9F8-AFB842C304A9}"/>
+              </a:ext>
+            </a:extLst>
+          </p:cNvPr>
+          <p:cNvSpPr>
+            <a:spLocks noGrp="1"/>
+          </p:cNvSpPr>
+          <p:nvPr>
+            <p:ph idx="1"/>
+          </p:nvPr>
+        </p:nvSpPr>
+        <p:spPr/>
+        <p:txBody>
+          <a:bodyPr/>
+          <a:lstStyle/>
+          <a:p>
+            <a:r>
+              <a:rPr lang="en-US" dirty="0"/>
+              <a:t>Characters = 301</a:t>
+            </a:r>
+          </a:p>
+          <a:p>
+            <a:r>
+              <a:rPr lang="en-US" dirty="0"/>
+              <a:t>Words = 43</a:t>
+            </a:r>
+          </a:p>
+          <a:p>
+            <a:endParaRPr lang="en-US" dirty="0"/>
+          </a:p>
+        </p:txBody>
+      </p:sp>
+    </p:spTree>
+    <p:extLst>
+      <p:ext uri="{BB962C8B-B14F-4D97-AF65-F5344CB8AC3E}">
+        <p14:creationId xmlns:p14="http://schemas.microsoft.com/office/powerpoint/2010/main" val="3648593400"/>
+      </p:ext>
+    </p:extLst>
+  </p:cSld>
+  <p:clrMapOvr>
+    <a:masterClrMapping/>
+  </p:clrMapOvr>
+</p:sld>
+</file>
+
+<file path=ppt/slides/slide12.xml><?xml version="1.0" encoding="utf-8"?>
 <p:sld xmlns:a="http://schemas.openxmlformats.org/drawingml/2006/main" xmlns:r="http://schemas.openxmlformats.org/officeDocument/2006/relationships" xmlns:p="http://schemas.openxmlformats.org/presentationml/2006/main">
   <p:cSld>
     <p:spTree>
@@ -6960,7 +7634,7 @@
 </p:sld>
 </file>
 
-<file path=ppt/slides/slide12.xml><?xml version="1.0" encoding="utf-8"?>
+<file path=ppt/slides/slide13.xml><?xml version="1.0" encoding="utf-8"?>
 <p:sld xmlns:a="http://schemas.openxmlformats.org/drawingml/2006/main" xmlns:r="http://schemas.openxmlformats.org/officeDocument/2006/relationships" xmlns:p="http://schemas.openxmlformats.org/presentationml/2006/main">
   <p:cSld>
     <p:spTree>
@@ -7086,7 +7760,7 @@
           <p:cNvPr id="2" name="Title 1">
             <a:extLst>
               <a:ext uri="{FF2B5EF4-FFF2-40B4-BE49-F238E27FC236}">
-                <a16:creationId xmlns:a16="http://schemas.microsoft.com/office/drawing/2014/main" id="{6EA22F8D-DCBB-4E43-AB3C-C4BA912D2282}"/>
+                <a16:creationId xmlns:a16="http://schemas.microsoft.com/office/drawing/2014/main" id="{B5B9DB02-59F8-4FB4-A24A-0AAA3E8A7329}"/>
               </a:ext>
             </a:extLst>
           </p:cNvPr>
@@ -7104,17 +7778,17 @@
           <a:p>
             <a:r>
               <a:rPr lang="en-US" dirty="0"/>
-              <a:t>Question?</a:t>
-            </a:r>
-          </a:p>
-        </p:txBody>
-      </p:sp>
-      <p:sp>
-        <p:nvSpPr>
-          <p:cNvPr id="16" name="Content Placeholder 15">
+              <a:t>Background</a:t>
+            </a:r>
+          </a:p>
+        </p:txBody>
+      </p:sp>
+      <p:sp>
+        <p:nvSpPr>
+          <p:cNvPr id="3" name="Content Placeholder 2">
             <a:extLst>
               <a:ext uri="{FF2B5EF4-FFF2-40B4-BE49-F238E27FC236}">
-                <a16:creationId xmlns:a16="http://schemas.microsoft.com/office/drawing/2014/main" id="{EB9178E6-BC05-4951-8F77-2F100E4F1FD9}"/>
+                <a16:creationId xmlns:a16="http://schemas.microsoft.com/office/drawing/2014/main" id="{09FB5608-75B3-4C45-96B1-E1B9A94CD0F7}"/>
               </a:ext>
             </a:extLst>
           </p:cNvPr>
@@ -7132,22 +7806,20 @@
           <a:p>
             <a:r>
               <a:rPr lang="en-US" dirty="0"/>
-              <a:t>How can we increase social media growth through post analytics? </a:t>
-            </a:r>
-          </a:p>
-          <a:p>
-            <a:endParaRPr lang="en-US" dirty="0"/>
+              <a:t>BDA</a:t>
+            </a:r>
           </a:p>
           <a:p>
             <a:r>
               <a:rPr lang="en-US" dirty="0"/>
-              <a:t>Algorithm </a:t>
-            </a:r>
-          </a:p>
-          <a:p>
+              <a:t>Job</a:t>
+            </a:r>
+          </a:p>
+          <a:p>
+            <a:pPr lvl="1"/>
             <a:r>
               <a:rPr lang="en-US" dirty="0"/>
-              <a:t>Psychology</a:t>
+              <a:t>Recruit and Retention</a:t>
             </a:r>
           </a:p>
         </p:txBody>
@@ -7155,7 +7827,7 @@
     </p:spTree>
     <p:extLst>
       <p:ext uri="{BB962C8B-B14F-4D97-AF65-F5344CB8AC3E}">
-        <p14:creationId xmlns:p14="http://schemas.microsoft.com/office/powerpoint/2010/main" val="1064868949"/>
+        <p14:creationId xmlns:p14="http://schemas.microsoft.com/office/powerpoint/2010/main" val="2738762824"/>
       </p:ext>
     </p:extLst>
   </p:cSld>
@@ -7184,6 +7856,107 @@
       </p:grpSpPr>
       <p:sp>
         <p:nvSpPr>
+          <p:cNvPr id="2" name="Title 1">
+            <a:extLst>
+              <a:ext uri="{FF2B5EF4-FFF2-40B4-BE49-F238E27FC236}">
+                <a16:creationId xmlns:a16="http://schemas.microsoft.com/office/drawing/2014/main" id="{6EA22F8D-DCBB-4E43-AB3C-C4BA912D2282}"/>
+              </a:ext>
+            </a:extLst>
+          </p:cNvPr>
+          <p:cNvSpPr>
+            <a:spLocks noGrp="1"/>
+          </p:cNvSpPr>
+          <p:nvPr>
+            <p:ph type="title"/>
+          </p:nvPr>
+        </p:nvSpPr>
+        <p:spPr/>
+        <p:txBody>
+          <a:bodyPr/>
+          <a:lstStyle/>
+          <a:p>
+            <a:r>
+              <a:rPr lang="en-US" dirty="0"/>
+              <a:t>Question?</a:t>
+            </a:r>
+          </a:p>
+        </p:txBody>
+      </p:sp>
+      <p:sp>
+        <p:nvSpPr>
+          <p:cNvPr id="16" name="Content Placeholder 15">
+            <a:extLst>
+              <a:ext uri="{FF2B5EF4-FFF2-40B4-BE49-F238E27FC236}">
+                <a16:creationId xmlns:a16="http://schemas.microsoft.com/office/drawing/2014/main" id="{EB9178E6-BC05-4951-8F77-2F100E4F1FD9}"/>
+              </a:ext>
+            </a:extLst>
+          </p:cNvPr>
+          <p:cNvSpPr>
+            <a:spLocks noGrp="1"/>
+          </p:cNvSpPr>
+          <p:nvPr>
+            <p:ph idx="1"/>
+          </p:nvPr>
+        </p:nvSpPr>
+        <p:spPr/>
+        <p:txBody>
+          <a:bodyPr/>
+          <a:lstStyle/>
+          <a:p>
+            <a:r>
+              <a:rPr lang="en-US" dirty="0"/>
+              <a:t>How can we increase social media growth through post analytics? </a:t>
+            </a:r>
+          </a:p>
+          <a:p>
+            <a:endParaRPr lang="en-US" dirty="0"/>
+          </a:p>
+          <a:p>
+            <a:r>
+              <a:rPr lang="en-US" dirty="0"/>
+              <a:t>Algorithm </a:t>
+            </a:r>
+          </a:p>
+          <a:p>
+            <a:r>
+              <a:rPr lang="en-US" dirty="0"/>
+              <a:t>Psychology</a:t>
+            </a:r>
+          </a:p>
+        </p:txBody>
+      </p:sp>
+    </p:spTree>
+    <p:extLst>
+      <p:ext uri="{BB962C8B-B14F-4D97-AF65-F5344CB8AC3E}">
+        <p14:creationId xmlns:p14="http://schemas.microsoft.com/office/powerpoint/2010/main" val="1064868949"/>
+      </p:ext>
+    </p:extLst>
+  </p:cSld>
+  <p:clrMapOvr>
+    <a:masterClrMapping/>
+  </p:clrMapOvr>
+</p:sld>
+</file>
+
+<file path=ppt/slides/slide4.xml><?xml version="1.0" encoding="utf-8"?>
+<p:sld xmlns:a="http://schemas.openxmlformats.org/drawingml/2006/main" xmlns:r="http://schemas.openxmlformats.org/officeDocument/2006/relationships" xmlns:p="http://schemas.openxmlformats.org/presentationml/2006/main">
+  <p:cSld>
+    <p:spTree>
+      <p:nvGrpSpPr>
+        <p:cNvPr id="1" name=""/>
+        <p:cNvGrpSpPr/>
+        <p:nvPr/>
+      </p:nvGrpSpPr>
+      <p:grpSpPr>
+        <a:xfrm>
+          <a:off x="0" y="0"/>
+          <a:ext cx="0" cy="0"/>
+          <a:chOff x="0" y="0"/>
+          <a:chExt cx="0" cy="0"/>
+        </a:xfrm>
+      </p:grpSpPr>
+      <p:sp>
+        <p:nvSpPr>
           <p:cNvPr id="3" name="Content Placeholder 2">
             <a:extLst>
               <a:ext uri="{FF2B5EF4-FFF2-40B4-BE49-F238E27FC236}">
@@ -7239,7 +8012,7 @@
 </p:sld>
 </file>
 
-<file path=ppt/slides/slide4.xml><?xml version="1.0" encoding="utf-8"?>
+<file path=ppt/slides/slide5.xml><?xml version="1.0" encoding="utf-8"?>
 <p:sld xmlns:a="http://schemas.openxmlformats.org/drawingml/2006/main" xmlns:r="http://schemas.openxmlformats.org/officeDocument/2006/relationships" xmlns:p="http://schemas.openxmlformats.org/presentationml/2006/main">
   <p:cSld>
     <p:spTree>
@@ -7329,96 +8102,6 @@
 </p:sld>
 </file>
 
-<file path=ppt/slides/slide5.xml><?xml version="1.0" encoding="utf-8"?>
-<p:sld xmlns:a="http://schemas.openxmlformats.org/drawingml/2006/main" xmlns:r="http://schemas.openxmlformats.org/officeDocument/2006/relationships" xmlns:p="http://schemas.openxmlformats.org/presentationml/2006/main">
-  <p:cSld>
-    <p:spTree>
-      <p:nvGrpSpPr>
-        <p:cNvPr id="1" name=""/>
-        <p:cNvGrpSpPr/>
-        <p:nvPr/>
-      </p:nvGrpSpPr>
-      <p:grpSpPr>
-        <a:xfrm>
-          <a:off x="0" y="0"/>
-          <a:ext cx="0" cy="0"/>
-          <a:chOff x="0" y="0"/>
-          <a:chExt cx="0" cy="0"/>
-        </a:xfrm>
-      </p:grpSpPr>
-      <p:sp>
-        <p:nvSpPr>
-          <p:cNvPr id="2" name="Title 1">
-            <a:extLst>
-              <a:ext uri="{FF2B5EF4-FFF2-40B4-BE49-F238E27FC236}">
-                <a16:creationId xmlns:a16="http://schemas.microsoft.com/office/drawing/2014/main" id="{56C70A08-B945-487F-8E70-E1C63484547C}"/>
-              </a:ext>
-            </a:extLst>
-          </p:cNvPr>
-          <p:cNvSpPr>
-            <a:spLocks noGrp="1"/>
-          </p:cNvSpPr>
-          <p:nvPr>
-            <p:ph type="title"/>
-          </p:nvPr>
-        </p:nvSpPr>
-        <p:spPr/>
-        <p:txBody>
-          <a:bodyPr/>
-          <a:lstStyle/>
-          <a:p>
-            <a:endParaRPr lang="en-US"/>
-          </a:p>
-        </p:txBody>
-      </p:sp>
-      <p:pic>
-        <p:nvPicPr>
-          <p:cNvPr id="5" name="Content Placeholder 4">
-            <a:extLst>
-              <a:ext uri="{FF2B5EF4-FFF2-40B4-BE49-F238E27FC236}">
-                <a16:creationId xmlns:a16="http://schemas.microsoft.com/office/drawing/2014/main" id="{11ECEBEC-04C5-4459-866E-B00088A578C0}"/>
-              </a:ext>
-            </a:extLst>
-          </p:cNvPr>
-          <p:cNvPicPr>
-            <a:picLocks noGrp="1" noChangeAspect="1"/>
-          </p:cNvPicPr>
-          <p:nvPr>
-            <p:ph idx="1"/>
-          </p:nvPr>
-        </p:nvPicPr>
-        <p:blipFill>
-          <a:blip r:embed="rId2">
-            <a:extLst>
-              <a:ext uri="{28A0092B-C50C-407E-A947-70E740481C1C}">
-                <a14:useLocalDpi xmlns:a14="http://schemas.microsoft.com/office/drawing/2010/main" val="0"/>
-              </a:ext>
-            </a:extLst>
-          </a:blip>
-          <a:stretch>
-            <a:fillRect/>
-          </a:stretch>
-        </p:blipFill>
-        <p:spPr>
-          <a:xfrm>
-            <a:off x="838200" y="847897"/>
-            <a:ext cx="10515600" cy="5153891"/>
-          </a:xfrm>
-        </p:spPr>
-      </p:pic>
-    </p:spTree>
-    <p:extLst>
-      <p:ext uri="{BB962C8B-B14F-4D97-AF65-F5344CB8AC3E}">
-        <p14:creationId xmlns:p14="http://schemas.microsoft.com/office/powerpoint/2010/main" val="1945193266"/>
-      </p:ext>
-    </p:extLst>
-  </p:cSld>
-  <p:clrMapOvr>
-    <a:masterClrMapping/>
-  </p:clrMapOvr>
-</p:sld>
-</file>
-
 <file path=ppt/slides/slide6.xml><?xml version="1.0" encoding="utf-8"?>
 <p:sld xmlns:a="http://schemas.openxmlformats.org/drawingml/2006/main" xmlns:r="http://schemas.openxmlformats.org/officeDocument/2006/relationships" xmlns:p="http://schemas.openxmlformats.org/presentationml/2006/main">
   <p:cSld>
@@ -7441,7 +8124,7 @@
           <p:cNvPr id="2" name="Title 1">
             <a:extLst>
               <a:ext uri="{FF2B5EF4-FFF2-40B4-BE49-F238E27FC236}">
-                <a16:creationId xmlns:a16="http://schemas.microsoft.com/office/drawing/2014/main" id="{9A74597D-1EBE-488C-A05D-D0CA02F7B4EE}"/>
+                <a16:creationId xmlns:a16="http://schemas.microsoft.com/office/drawing/2014/main" id="{56C70A08-B945-487F-8E70-E1C63484547C}"/>
               </a:ext>
             </a:extLst>
           </p:cNvPr>
@@ -7457,10 +8140,7 @@
           <a:bodyPr/>
           <a:lstStyle/>
           <a:p>
-            <a:r>
-              <a:rPr lang="en-US" dirty="0"/>
-              <a:t>Regression</a:t>
-            </a:r>
+            <a:endParaRPr lang="en-US"/>
           </a:p>
         </p:txBody>
       </p:sp>
@@ -7469,7 +8149,7 @@
           <p:cNvPr id="5" name="Content Placeholder 4">
             <a:extLst>
               <a:ext uri="{FF2B5EF4-FFF2-40B4-BE49-F238E27FC236}">
-                <a16:creationId xmlns:a16="http://schemas.microsoft.com/office/drawing/2014/main" id="{FBD400AA-B24F-4F1E-BB69-742A6DB3CD7E}"/>
+                <a16:creationId xmlns:a16="http://schemas.microsoft.com/office/drawing/2014/main" id="{11ECEBEC-04C5-4459-866E-B00088A578C0}"/>
               </a:ext>
             </a:extLst>
           </p:cNvPr>
@@ -7494,15 +8174,15 @@
         </p:blipFill>
         <p:spPr>
           <a:xfrm>
-            <a:off x="707517" y="2111880"/>
-            <a:ext cx="10776965" cy="2634239"/>
+            <a:off x="1" y="0"/>
+            <a:ext cx="12187344" cy="6857999"/>
           </a:xfrm>
         </p:spPr>
       </p:pic>
     </p:spTree>
     <p:extLst>
       <p:ext uri="{BB962C8B-B14F-4D97-AF65-F5344CB8AC3E}">
-        <p14:creationId xmlns:p14="http://schemas.microsoft.com/office/powerpoint/2010/main" val="129825343"/>
+        <p14:creationId xmlns:p14="http://schemas.microsoft.com/office/powerpoint/2010/main" val="1945193266"/>
       </p:ext>
     </p:extLst>
   </p:cSld>
@@ -7534,7 +8214,7 @@
           <p:cNvPr id="2" name="Title 1">
             <a:extLst>
               <a:ext uri="{FF2B5EF4-FFF2-40B4-BE49-F238E27FC236}">
-                <a16:creationId xmlns:a16="http://schemas.microsoft.com/office/drawing/2014/main" id="{7642BFD7-A845-4054-95CC-F67BDFA2751C}"/>
+                <a16:creationId xmlns:a16="http://schemas.microsoft.com/office/drawing/2014/main" id="{9A74597D-1EBE-488C-A05D-D0CA02F7B4EE}"/>
               </a:ext>
             </a:extLst>
           </p:cNvPr>
@@ -7550,10 +8230,10 @@
           <a:bodyPr/>
           <a:lstStyle/>
           <a:p>
-            <a:br>
+            <a:r>
               <a:rPr lang="en-US" dirty="0"/>
-            </a:br>
-            <a:endParaRPr lang="en-US" dirty="0"/>
+              <a:t>Regression</a:t>
+            </a:r>
           </a:p>
         </p:txBody>
       </p:sp>
@@ -7562,7 +8242,7 @@
           <p:cNvPr id="5" name="Content Placeholder 4">
             <a:extLst>
               <a:ext uri="{FF2B5EF4-FFF2-40B4-BE49-F238E27FC236}">
-                <a16:creationId xmlns:a16="http://schemas.microsoft.com/office/drawing/2014/main" id="{EE25A986-11D4-4784-8409-61868FFA0E5C}"/>
+                <a16:creationId xmlns:a16="http://schemas.microsoft.com/office/drawing/2014/main" id="{FBD400AA-B24F-4F1E-BB69-742A6DB3CD7E}"/>
               </a:ext>
             </a:extLst>
           </p:cNvPr>
@@ -7587,192 +8267,15 @@
         </p:blipFill>
         <p:spPr>
           <a:xfrm>
-            <a:off x="115909" y="1713498"/>
-            <a:ext cx="6095930" cy="2015344"/>
+            <a:off x="707517" y="2111880"/>
+            <a:ext cx="10776965" cy="4555620"/>
           </a:xfrm>
-        </p:spPr>
-      </p:pic>
-      <p:pic>
-        <p:nvPicPr>
-          <p:cNvPr id="7" name="Picture 6">
-            <a:extLst>
-              <a:ext uri="{FF2B5EF4-FFF2-40B4-BE49-F238E27FC236}">
-                <a16:creationId xmlns:a16="http://schemas.microsoft.com/office/drawing/2014/main" id="{387A46BB-DD88-4138-B36A-131310B9A95E}"/>
-              </a:ext>
-            </a:extLst>
-          </p:cNvPr>
-          <p:cNvPicPr>
-            <a:picLocks noChangeAspect="1"/>
-          </p:cNvPicPr>
-          <p:nvPr/>
-        </p:nvPicPr>
-        <p:blipFill>
-          <a:blip r:embed="rId3">
-            <a:extLst>
-              <a:ext uri="{28A0092B-C50C-407E-A947-70E740481C1C}">
-                <a14:useLocalDpi xmlns:a14="http://schemas.microsoft.com/office/drawing/2010/main" val="0"/>
-              </a:ext>
-            </a:extLst>
-          </a:blip>
-          <a:stretch>
-            <a:fillRect/>
-          </a:stretch>
-        </p:blipFill>
-        <p:spPr>
-          <a:xfrm>
-            <a:off x="115909" y="4284133"/>
-            <a:ext cx="6095929" cy="2468642"/>
-          </a:xfrm>
-          <a:prstGeom prst="rect">
-            <a:avLst/>
-          </a:prstGeom>
-        </p:spPr>
-      </p:pic>
-      <p:sp>
-        <p:nvSpPr>
-          <p:cNvPr id="8" name="TextBox 7">
-            <a:extLst>
-              <a:ext uri="{FF2B5EF4-FFF2-40B4-BE49-F238E27FC236}">
-                <a16:creationId xmlns:a16="http://schemas.microsoft.com/office/drawing/2014/main" id="{10D56313-4E34-4A2C-A087-683C1891F363}"/>
-              </a:ext>
-            </a:extLst>
-          </p:cNvPr>
-          <p:cNvSpPr txBox="1"/>
-          <p:nvPr/>
-        </p:nvSpPr>
-        <p:spPr>
-          <a:xfrm>
-            <a:off x="431799" y="1207531"/>
-            <a:ext cx="2599267" cy="369332"/>
-          </a:xfrm>
-          <a:prstGeom prst="rect">
-            <a:avLst/>
-          </a:prstGeom>
-          <a:noFill/>
-        </p:spPr>
-        <p:txBody>
-          <a:bodyPr wrap="square" rtlCol="0">
-            <a:spAutoFit/>
-          </a:bodyPr>
-          <a:lstStyle/>
-          <a:p>
-            <a:r>
-              <a:rPr lang="en-US" dirty="0"/>
-              <a:t>Reels</a:t>
-            </a:r>
-          </a:p>
-        </p:txBody>
-      </p:sp>
-      <p:sp>
-        <p:nvSpPr>
-          <p:cNvPr id="9" name="TextBox 8">
-            <a:extLst>
-              <a:ext uri="{FF2B5EF4-FFF2-40B4-BE49-F238E27FC236}">
-                <a16:creationId xmlns:a16="http://schemas.microsoft.com/office/drawing/2014/main" id="{51DEC791-2E37-473F-A4A4-4BB6D567A5AF}"/>
-              </a:ext>
-            </a:extLst>
-          </p:cNvPr>
-          <p:cNvSpPr txBox="1"/>
-          <p:nvPr/>
-        </p:nvSpPr>
-        <p:spPr>
-          <a:xfrm>
-            <a:off x="431798" y="3899761"/>
-            <a:ext cx="2599267" cy="369332"/>
-          </a:xfrm>
-          <a:prstGeom prst="rect">
-            <a:avLst/>
-          </a:prstGeom>
-          <a:noFill/>
-        </p:spPr>
-        <p:txBody>
-          <a:bodyPr wrap="square" rtlCol="0">
-            <a:spAutoFit/>
-          </a:bodyPr>
-          <a:lstStyle/>
-          <a:p>
-            <a:r>
-              <a:rPr lang="en-US" dirty="0"/>
-              <a:t>Carousel</a:t>
-            </a:r>
-          </a:p>
-        </p:txBody>
-      </p:sp>
-      <p:sp>
-        <p:nvSpPr>
-          <p:cNvPr id="10" name="TextBox 9">
-            <a:extLst>
-              <a:ext uri="{FF2B5EF4-FFF2-40B4-BE49-F238E27FC236}">
-                <a16:creationId xmlns:a16="http://schemas.microsoft.com/office/drawing/2014/main" id="{40D2E48C-FB0E-4C66-9563-B5E729D41C8B}"/>
-              </a:ext>
-            </a:extLst>
-          </p:cNvPr>
-          <p:cNvSpPr txBox="1"/>
-          <p:nvPr/>
-        </p:nvSpPr>
-        <p:spPr>
-          <a:xfrm>
-            <a:off x="8339666" y="2963331"/>
-            <a:ext cx="2599267" cy="369332"/>
-          </a:xfrm>
-          <a:prstGeom prst="rect">
-            <a:avLst/>
-          </a:prstGeom>
-          <a:noFill/>
-        </p:spPr>
-        <p:txBody>
-          <a:bodyPr wrap="square" rtlCol="0">
-            <a:spAutoFit/>
-          </a:bodyPr>
-          <a:lstStyle/>
-          <a:p>
-            <a:r>
-              <a:rPr lang="en-US" dirty="0"/>
-              <a:t>Images</a:t>
-            </a:r>
-          </a:p>
-        </p:txBody>
-      </p:sp>
-      <p:pic>
-        <p:nvPicPr>
-          <p:cNvPr id="12" name="Picture 11">
-            <a:extLst>
-              <a:ext uri="{FF2B5EF4-FFF2-40B4-BE49-F238E27FC236}">
-                <a16:creationId xmlns:a16="http://schemas.microsoft.com/office/drawing/2014/main" id="{11525264-B848-4ECA-BA62-D2501BAB1E37}"/>
-              </a:ext>
-            </a:extLst>
-          </p:cNvPr>
-          <p:cNvPicPr>
-            <a:picLocks noChangeAspect="1"/>
-          </p:cNvPicPr>
-          <p:nvPr/>
-        </p:nvPicPr>
-        <p:blipFill>
-          <a:blip r:embed="rId4">
-            <a:extLst>
-              <a:ext uri="{28A0092B-C50C-407E-A947-70E740481C1C}">
-                <a14:useLocalDpi xmlns:a14="http://schemas.microsoft.com/office/drawing/2010/main" val="0"/>
-              </a:ext>
-            </a:extLst>
-          </a:blip>
-          <a:stretch>
-            <a:fillRect/>
-          </a:stretch>
-        </p:blipFill>
-        <p:spPr>
-          <a:xfrm>
-            <a:off x="5776435" y="3327399"/>
-            <a:ext cx="6415565" cy="1561387"/>
-          </a:xfrm>
-          <a:prstGeom prst="rect">
-            <a:avLst/>
-          </a:prstGeom>
         </p:spPr>
       </p:pic>
     </p:spTree>
     <p:extLst>
       <p:ext uri="{BB962C8B-B14F-4D97-AF65-F5344CB8AC3E}">
-        <p14:creationId xmlns:p14="http://schemas.microsoft.com/office/powerpoint/2010/main" val="90016574"/>
+        <p14:creationId xmlns:p14="http://schemas.microsoft.com/office/powerpoint/2010/main" val="129825343"/>
       </p:ext>
     </p:extLst>
   </p:cSld>
@@ -7857,8 +8360,8 @@
         </p:blipFill>
         <p:spPr>
           <a:xfrm>
-            <a:off x="677863" y="3063662"/>
-            <a:ext cx="8596312" cy="2075289"/>
+            <a:off x="110967" y="1609725"/>
+            <a:ext cx="11667167" cy="4905375"/>
           </a:xfrm>
         </p:spPr>
       </p:pic>
@@ -7892,34 +8395,6 @@
           <a:chExt cx="0" cy="0"/>
         </a:xfrm>
       </p:grpSpPr>
-      <p:sp>
-        <p:nvSpPr>
-          <p:cNvPr id="2" name="Title 1">
-            <a:extLst>
-              <a:ext uri="{FF2B5EF4-FFF2-40B4-BE49-F238E27FC236}">
-                <a16:creationId xmlns:a16="http://schemas.microsoft.com/office/drawing/2014/main" id="{26989C17-4F50-45F7-A91B-436D8F445774}"/>
-              </a:ext>
-            </a:extLst>
-          </p:cNvPr>
-          <p:cNvSpPr>
-            <a:spLocks noGrp="1"/>
-          </p:cNvSpPr>
-          <p:nvPr>
-            <p:ph type="title"/>
-          </p:nvPr>
-        </p:nvSpPr>
-        <p:spPr/>
-        <p:txBody>
-          <a:bodyPr/>
-          <a:lstStyle/>
-          <a:p>
-            <a:r>
-              <a:rPr lang="en-US" dirty="0"/>
-              <a:t>Cluster</a:t>
-            </a:r>
-          </a:p>
-        </p:txBody>
-      </p:sp>
       <p:pic>
         <p:nvPicPr>
           <p:cNvPr id="5" name="Content Placeholder 4">
@@ -7950,8 +8425,8 @@
         </p:blipFill>
         <p:spPr>
           <a:xfrm>
-            <a:off x="677863" y="3055244"/>
-            <a:ext cx="8596312" cy="2092125"/>
+            <a:off x="16609" y="0"/>
+            <a:ext cx="12175391" cy="6858000"/>
           </a:xfrm>
         </p:spPr>
       </p:pic>
@@ -7969,8 +8444,8 @@
         </p:nvSpPr>
         <p:spPr>
           <a:xfrm>
-            <a:off x="1219200" y="3733801"/>
-            <a:ext cx="4210050" cy="933449"/>
+            <a:off x="504825" y="2962275"/>
+            <a:ext cx="4210050" cy="1247775"/>
           </a:xfrm>
           <a:prstGeom prst="ellipse">
             <a:avLst/>
@@ -8021,8 +8496,8 @@
         </p:nvSpPr>
         <p:spPr>
           <a:xfrm>
-            <a:off x="2990850" y="2743200"/>
-            <a:ext cx="7391400" cy="533400"/>
+            <a:off x="2419350" y="1409701"/>
+            <a:ext cx="8782050" cy="857249"/>
           </a:xfrm>
           <a:prstGeom prst="ellipse">
             <a:avLst/>

--- a/Scolarship Symposium.pptx
+++ b/Scolarship Symposium.pptx
@@ -5,22 +5,24 @@
     <p:sldMasterId id="2147483672" r:id="rId1"/>
   </p:sldMasterIdLst>
   <p:notesMasterIdLst>
-    <p:notesMasterId r:id="rId15"/>
+    <p:notesMasterId r:id="rId17"/>
   </p:notesMasterIdLst>
   <p:sldIdLst>
     <p:sldId id="256" r:id="rId2"/>
-    <p:sldId id="270" r:id="rId3"/>
-    <p:sldId id="257" r:id="rId4"/>
-    <p:sldId id="260" r:id="rId5"/>
-    <p:sldId id="266" r:id="rId6"/>
-    <p:sldId id="267" r:id="rId7"/>
-    <p:sldId id="258" r:id="rId8"/>
-    <p:sldId id="261" r:id="rId9"/>
-    <p:sldId id="262" r:id="rId10"/>
-    <p:sldId id="264" r:id="rId11"/>
-    <p:sldId id="269" r:id="rId12"/>
-    <p:sldId id="265" r:id="rId13"/>
-    <p:sldId id="268" r:id="rId14"/>
+    <p:sldId id="257" r:id="rId3"/>
+    <p:sldId id="260" r:id="rId4"/>
+    <p:sldId id="266" r:id="rId5"/>
+    <p:sldId id="267" r:id="rId6"/>
+    <p:sldId id="265" r:id="rId7"/>
+    <p:sldId id="261" r:id="rId8"/>
+    <p:sldId id="258" r:id="rId9"/>
+    <p:sldId id="272" r:id="rId10"/>
+    <p:sldId id="262" r:id="rId11"/>
+    <p:sldId id="264" r:id="rId12"/>
+    <p:sldId id="271" r:id="rId13"/>
+    <p:sldId id="270" r:id="rId14"/>
+    <p:sldId id="269" r:id="rId15"/>
+    <p:sldId id="268" r:id="rId16"/>
   </p:sldIdLst>
   <p:sldSz cx="12192000" cy="6858000"/>
   <p:notesSz cx="6858000" cy="9144000"/>
@@ -127,6 +129,384 @@
 </p:presentation>
 </file>
 
+<file path=ppt/revisionInfo.xml><?xml version="1.0" encoding="utf-8"?>
+<p1510:revInfo xmlns:a="http://schemas.openxmlformats.org/drawingml/2006/main" xmlns:r="http://schemas.openxmlformats.org/officeDocument/2006/relationships" xmlns:p1510="http://schemas.microsoft.com/office/powerpoint/2015/10/main">
+  <p1510:revLst>
+    <p1510:client id="{C55DBD8D-AEAC-4193-8608-EDE0EA6D0ED7}" v="18" dt="2026-03-23T19:42:07.797"/>
+  </p1510:revLst>
+</p1510:revInfo>
+</file>
+
+<file path=ppt/changesInfos/changesInfo1.xml><?xml version="1.0" encoding="utf-8"?>
+<pc:chgInfo xmlns:a="http://schemas.openxmlformats.org/drawingml/2006/main" xmlns:r="http://schemas.openxmlformats.org/officeDocument/2006/relationships" xmlns:ac="http://schemas.microsoft.com/office/drawing/2013/main/command" xmlns:pc="http://schemas.microsoft.com/office/powerpoint/2013/main/command">
+  <pc:docChgLst>
+    <pc:chgData name="Tyler Parker" userId="d600db0a132671fc" providerId="LiveId" clId="{604D48C0-C6CD-4CFE-A0AF-6B69BDB117D4}"/>
+    <pc:docChg chg="undo custSel addSld delSld modSld sldOrd">
+      <pc:chgData name="Tyler Parker" userId="d600db0a132671fc" providerId="LiveId" clId="{604D48C0-C6CD-4CFE-A0AF-6B69BDB117D4}" dt="2026-03-23T19:42:14.654" v="256" actId="5793"/>
+      <pc:docMkLst>
+        <pc:docMk/>
+      </pc:docMkLst>
+      <pc:sldChg chg="modSp mod">
+        <pc:chgData name="Tyler Parker" userId="d600db0a132671fc" providerId="LiveId" clId="{604D48C0-C6CD-4CFE-A0AF-6B69BDB117D4}" dt="2026-03-23T14:58:36.981" v="41" actId="20577"/>
+        <pc:sldMkLst>
+          <pc:docMk/>
+          <pc:sldMk cId="2562106679" sldId="256"/>
+        </pc:sldMkLst>
+        <pc:spChg chg="mod">
+          <ac:chgData name="Tyler Parker" userId="d600db0a132671fc" providerId="LiveId" clId="{604D48C0-C6CD-4CFE-A0AF-6B69BDB117D4}" dt="2026-03-23T14:57:36.687" v="2" actId="122"/>
+          <ac:spMkLst>
+            <pc:docMk/>
+            <pc:sldMk cId="2562106679" sldId="256"/>
+            <ac:spMk id="2" creationId="{31629243-0B25-4BAA-B8C5-53022B96E8B9}"/>
+          </ac:spMkLst>
+        </pc:spChg>
+        <pc:spChg chg="mod">
+          <ac:chgData name="Tyler Parker" userId="d600db0a132671fc" providerId="LiveId" clId="{604D48C0-C6CD-4CFE-A0AF-6B69BDB117D4}" dt="2026-03-23T14:58:36.981" v="41" actId="20577"/>
+          <ac:spMkLst>
+            <pc:docMk/>
+            <pc:sldMk cId="2562106679" sldId="256"/>
+            <ac:spMk id="3" creationId="{146C54AC-81F5-4878-B446-2590D5E0A078}"/>
+          </ac:spMkLst>
+        </pc:spChg>
+      </pc:sldChg>
+      <pc:sldChg chg="addSp delSp modSp mod">
+        <pc:chgData name="Tyler Parker" userId="d600db0a132671fc" providerId="LiveId" clId="{604D48C0-C6CD-4CFE-A0AF-6B69BDB117D4}" dt="2026-03-23T19:22:27.997" v="251" actId="20577"/>
+        <pc:sldMkLst>
+          <pc:docMk/>
+          <pc:sldMk cId="1064868949" sldId="257"/>
+        </pc:sldMkLst>
+        <pc:spChg chg="del">
+          <ac:chgData name="Tyler Parker" userId="d600db0a132671fc" providerId="LiveId" clId="{604D48C0-C6CD-4CFE-A0AF-6B69BDB117D4}" dt="2026-03-23T15:01:37.778" v="118" actId="478"/>
+          <ac:spMkLst>
+            <pc:docMk/>
+            <pc:sldMk cId="1064868949" sldId="257"/>
+            <ac:spMk id="2" creationId="{6EA22F8D-DCBB-4E43-AB3C-C4BA912D2282}"/>
+          </ac:spMkLst>
+        </pc:spChg>
+        <pc:spChg chg="add mod">
+          <ac:chgData name="Tyler Parker" userId="d600db0a132671fc" providerId="LiveId" clId="{604D48C0-C6CD-4CFE-A0AF-6B69BDB117D4}" dt="2026-03-23T15:01:37.778" v="118" actId="478"/>
+          <ac:spMkLst>
+            <pc:docMk/>
+            <pc:sldMk cId="1064868949" sldId="257"/>
+            <ac:spMk id="4" creationId="{C1453ACE-CAD5-8D98-B66A-87A79E52ABED}"/>
+          </ac:spMkLst>
+        </pc:spChg>
+        <pc:spChg chg="mod">
+          <ac:chgData name="Tyler Parker" userId="d600db0a132671fc" providerId="LiveId" clId="{604D48C0-C6CD-4CFE-A0AF-6B69BDB117D4}" dt="2026-03-23T19:22:27.997" v="251" actId="20577"/>
+          <ac:spMkLst>
+            <pc:docMk/>
+            <pc:sldMk cId="1064868949" sldId="257"/>
+            <ac:spMk id="16" creationId="{EB9178E6-BC05-4951-8F77-2F100E4F1FD9}"/>
+          </ac:spMkLst>
+        </pc:spChg>
+      </pc:sldChg>
+      <pc:sldChg chg="addSp delSp modSp mod">
+        <pc:chgData name="Tyler Parker" userId="d600db0a132671fc" providerId="LiveId" clId="{604D48C0-C6CD-4CFE-A0AF-6B69BDB117D4}" dt="2026-03-23T15:10:48.028" v="163" actId="962"/>
+        <pc:sldMkLst>
+          <pc:docMk/>
+          <pc:sldMk cId="129825343" sldId="258"/>
+        </pc:sldMkLst>
+        <pc:spChg chg="add del mod">
+          <ac:chgData name="Tyler Parker" userId="d600db0a132671fc" providerId="LiveId" clId="{604D48C0-C6CD-4CFE-A0AF-6B69BDB117D4}" dt="2026-03-23T15:10:23.506" v="156"/>
+          <ac:spMkLst>
+            <pc:docMk/>
+            <pc:sldMk cId="129825343" sldId="258"/>
+            <ac:spMk id="4" creationId="{A437D717-A1F4-C664-61CE-43AFDA5C7BD7}"/>
+          </ac:spMkLst>
+        </pc:spChg>
+        <pc:picChg chg="del mod">
+          <ac:chgData name="Tyler Parker" userId="d600db0a132671fc" providerId="LiveId" clId="{604D48C0-C6CD-4CFE-A0AF-6B69BDB117D4}" dt="2026-03-23T15:07:40.076" v="154" actId="478"/>
+          <ac:picMkLst>
+            <pc:docMk/>
+            <pc:sldMk cId="129825343" sldId="258"/>
+            <ac:picMk id="5" creationId="{FBD400AA-B24F-4F1E-BB69-742A6DB3CD7E}"/>
+          </ac:picMkLst>
+        </pc:picChg>
+        <pc:picChg chg="add mod ord">
+          <ac:chgData name="Tyler Parker" userId="d600db0a132671fc" providerId="LiveId" clId="{604D48C0-C6CD-4CFE-A0AF-6B69BDB117D4}" dt="2026-03-23T15:10:48.028" v="163" actId="962"/>
+          <ac:picMkLst>
+            <pc:docMk/>
+            <pc:sldMk cId="129825343" sldId="258"/>
+            <ac:picMk id="7" creationId="{FF415377-A8B6-AF39-245F-BD4869525BE2}"/>
+          </ac:picMkLst>
+        </pc:picChg>
+      </pc:sldChg>
+      <pc:sldChg chg="ord">
+        <pc:chgData name="Tyler Parker" userId="d600db0a132671fc" providerId="LiveId" clId="{604D48C0-C6CD-4CFE-A0AF-6B69BDB117D4}" dt="2026-03-23T15:11:23.686" v="167"/>
+        <pc:sldMkLst>
+          <pc:docMk/>
+          <pc:sldMk cId="4008137295" sldId="261"/>
+        </pc:sldMkLst>
+      </pc:sldChg>
+      <pc:sldChg chg="addSp delSp modSp mod addAnim delAnim modNotesTx">
+        <pc:chgData name="Tyler Parker" userId="d600db0a132671fc" providerId="LiveId" clId="{604D48C0-C6CD-4CFE-A0AF-6B69BDB117D4}" dt="2026-03-23T16:14:14.450" v="206" actId="14100"/>
+        <pc:sldMkLst>
+          <pc:docMk/>
+          <pc:sldMk cId="2955730375" sldId="262"/>
+        </pc:sldMkLst>
+        <pc:spChg chg="add del mod">
+          <ac:chgData name="Tyler Parker" userId="d600db0a132671fc" providerId="LiveId" clId="{604D48C0-C6CD-4CFE-A0AF-6B69BDB117D4}" dt="2026-03-23T15:17:38.405" v="196" actId="478"/>
+          <ac:spMkLst>
+            <pc:docMk/>
+            <pc:sldMk cId="2955730375" sldId="262"/>
+            <ac:spMk id="3" creationId="{232F8AC1-B331-322E-BA86-C163954A7C05}"/>
+          </ac:spMkLst>
+        </pc:spChg>
+        <pc:spChg chg="add del">
+          <ac:chgData name="Tyler Parker" userId="d600db0a132671fc" providerId="LiveId" clId="{604D48C0-C6CD-4CFE-A0AF-6B69BDB117D4}" dt="2026-03-23T16:13:54.642" v="200" actId="478"/>
+          <ac:spMkLst>
+            <pc:docMk/>
+            <pc:sldMk cId="2955730375" sldId="262"/>
+            <ac:spMk id="6" creationId="{55689BE9-DCCC-469E-8CA1-9AAB2F043E2F}"/>
+          </ac:spMkLst>
+        </pc:spChg>
+        <pc:spChg chg="add del">
+          <ac:chgData name="Tyler Parker" userId="d600db0a132671fc" providerId="LiveId" clId="{604D48C0-C6CD-4CFE-A0AF-6B69BDB117D4}" dt="2026-03-23T16:13:52.326" v="199" actId="478"/>
+          <ac:spMkLst>
+            <pc:docMk/>
+            <pc:sldMk cId="2955730375" sldId="262"/>
+            <ac:spMk id="7" creationId="{6A60CC85-C09F-473C-BFFE-B4E0D11FC50B}"/>
+          </ac:spMkLst>
+        </pc:spChg>
+        <pc:spChg chg="add mod">
+          <ac:chgData name="Tyler Parker" userId="d600db0a132671fc" providerId="LiveId" clId="{604D48C0-C6CD-4CFE-A0AF-6B69BDB117D4}" dt="2026-03-23T16:13:48.707" v="198"/>
+          <ac:spMkLst>
+            <pc:docMk/>
+            <pc:sldMk cId="2955730375" sldId="262"/>
+            <ac:spMk id="10" creationId="{F700B8A9-6E16-FCE8-A370-053B2C949FE2}"/>
+          </ac:spMkLst>
+        </pc:spChg>
+        <pc:picChg chg="add del">
+          <ac:chgData name="Tyler Parker" userId="d600db0a132671fc" providerId="LiveId" clId="{604D48C0-C6CD-4CFE-A0AF-6B69BDB117D4}" dt="2026-03-23T16:13:35.622" v="197" actId="478"/>
+          <ac:picMkLst>
+            <pc:docMk/>
+            <pc:sldMk cId="2955730375" sldId="262"/>
+            <ac:picMk id="5" creationId="{5B6A3E19-4E2E-4263-8708-BD52414703B3}"/>
+          </ac:picMkLst>
+        </pc:picChg>
+        <pc:picChg chg="add del mod ord">
+          <ac:chgData name="Tyler Parker" userId="d600db0a132671fc" providerId="LiveId" clId="{604D48C0-C6CD-4CFE-A0AF-6B69BDB117D4}" dt="2026-03-23T15:17:37.116" v="193" actId="931"/>
+          <ac:picMkLst>
+            <pc:docMk/>
+            <pc:sldMk cId="2955730375" sldId="262"/>
+            <ac:picMk id="8" creationId="{B1EADC20-5499-E8F4-6E83-A0243A05626A}"/>
+          </ac:picMkLst>
+        </pc:picChg>
+        <pc:picChg chg="mod">
+          <ac:chgData name="Tyler Parker" userId="d600db0a132671fc" providerId="LiveId" clId="{604D48C0-C6CD-4CFE-A0AF-6B69BDB117D4}" dt="2026-03-23T16:14:14.450" v="206" actId="14100"/>
+          <ac:picMkLst>
+            <pc:docMk/>
+            <pc:sldMk cId="2955730375" sldId="262"/>
+            <ac:picMk id="11" creationId="{AC7198DC-461F-B082-0FEE-1162F3DDB322}"/>
+          </ac:picMkLst>
+        </pc:picChg>
+      </pc:sldChg>
+      <pc:sldChg chg="addSp delSp modSp mod setBg">
+        <pc:chgData name="Tyler Parker" userId="d600db0a132671fc" providerId="LiveId" clId="{604D48C0-C6CD-4CFE-A0AF-6B69BDB117D4}" dt="2026-03-23T16:47:53.994" v="221" actId="478"/>
+        <pc:sldMkLst>
+          <pc:docMk/>
+          <pc:sldMk cId="570200493" sldId="264"/>
+        </pc:sldMkLst>
+        <pc:spChg chg="mod">
+          <ac:chgData name="Tyler Parker" userId="d600db0a132671fc" providerId="LiveId" clId="{604D48C0-C6CD-4CFE-A0AF-6B69BDB117D4}" dt="2026-03-23T16:43:35.699" v="211" actId="26606"/>
+          <ac:spMkLst>
+            <pc:docMk/>
+            <pc:sldMk cId="570200493" sldId="264"/>
+            <ac:spMk id="2" creationId="{0B6C79B9-EB15-47C4-993C-2FB13D5EF156}"/>
+          </ac:spMkLst>
+        </pc:spChg>
+        <pc:spChg chg="mod">
+          <ac:chgData name="Tyler Parker" userId="d600db0a132671fc" providerId="LiveId" clId="{604D48C0-C6CD-4CFE-A0AF-6B69BDB117D4}" dt="2026-03-23T16:43:35.699" v="211" actId="26606"/>
+          <ac:spMkLst>
+            <pc:docMk/>
+            <pc:sldMk cId="570200493" sldId="264"/>
+            <ac:spMk id="3" creationId="{88A93EF8-36E4-4FBA-B439-4DD9AD0A99FF}"/>
+          </ac:spMkLst>
+        </pc:spChg>
+        <pc:spChg chg="add">
+          <ac:chgData name="Tyler Parker" userId="d600db0a132671fc" providerId="LiveId" clId="{604D48C0-C6CD-4CFE-A0AF-6B69BDB117D4}" dt="2026-03-23T16:43:35.699" v="211" actId="26606"/>
+          <ac:spMkLst>
+            <pc:docMk/>
+            <pc:sldMk cId="570200493" sldId="264"/>
+            <ac:spMk id="1035" creationId="{3F088236-D655-4F88-B238-E16762358025}"/>
+          </ac:spMkLst>
+        </pc:spChg>
+        <pc:spChg chg="add">
+          <ac:chgData name="Tyler Parker" userId="d600db0a132671fc" providerId="LiveId" clId="{604D48C0-C6CD-4CFE-A0AF-6B69BDB117D4}" dt="2026-03-23T16:43:35.699" v="211" actId="26606"/>
+          <ac:spMkLst>
+            <pc:docMk/>
+            <pc:sldMk cId="570200493" sldId="264"/>
+            <ac:spMk id="1037" creationId="{3DAC0C92-199E-475C-9390-119A9B027276}"/>
+          </ac:spMkLst>
+        </pc:spChg>
+        <pc:spChg chg="add">
+          <ac:chgData name="Tyler Parker" userId="d600db0a132671fc" providerId="LiveId" clId="{604D48C0-C6CD-4CFE-A0AF-6B69BDB117D4}" dt="2026-03-23T16:43:35.699" v="211" actId="26606"/>
+          <ac:spMkLst>
+            <pc:docMk/>
+            <pc:sldMk cId="570200493" sldId="264"/>
+            <ac:spMk id="1039" creationId="{C4CFB339-0ED8-4FE2-9EF1-6D1375B8499B}"/>
+          </ac:spMkLst>
+        </pc:spChg>
+        <pc:spChg chg="add">
+          <ac:chgData name="Tyler Parker" userId="d600db0a132671fc" providerId="LiveId" clId="{604D48C0-C6CD-4CFE-A0AF-6B69BDB117D4}" dt="2026-03-23T16:43:35.699" v="211" actId="26606"/>
+          <ac:spMkLst>
+            <pc:docMk/>
+            <pc:sldMk cId="570200493" sldId="264"/>
+            <ac:spMk id="1041" creationId="{31896C80-2069-4431-9C19-83B913734490}"/>
+          </ac:spMkLst>
+        </pc:spChg>
+        <pc:spChg chg="add">
+          <ac:chgData name="Tyler Parker" userId="d600db0a132671fc" providerId="LiveId" clId="{604D48C0-C6CD-4CFE-A0AF-6B69BDB117D4}" dt="2026-03-23T16:43:35.699" v="211" actId="26606"/>
+          <ac:spMkLst>
+            <pc:docMk/>
+            <pc:sldMk cId="570200493" sldId="264"/>
+            <ac:spMk id="1043" creationId="{BF120A21-0841-4823-B0C4-28AEBCEF9B78}"/>
+          </ac:spMkLst>
+        </pc:spChg>
+        <pc:spChg chg="add">
+          <ac:chgData name="Tyler Parker" userId="d600db0a132671fc" providerId="LiveId" clId="{604D48C0-C6CD-4CFE-A0AF-6B69BDB117D4}" dt="2026-03-23T16:43:35.699" v="211" actId="26606"/>
+          <ac:spMkLst>
+            <pc:docMk/>
+            <pc:sldMk cId="570200493" sldId="264"/>
+            <ac:spMk id="1045" creationId="{DBB05BAE-BBD3-4289-899F-A6851503C6B0}"/>
+          </ac:spMkLst>
+        </pc:spChg>
+        <pc:spChg chg="add">
+          <ac:chgData name="Tyler Parker" userId="d600db0a132671fc" providerId="LiveId" clId="{604D48C0-C6CD-4CFE-A0AF-6B69BDB117D4}" dt="2026-03-23T16:43:35.699" v="211" actId="26606"/>
+          <ac:spMkLst>
+            <pc:docMk/>
+            <pc:sldMk cId="570200493" sldId="264"/>
+            <ac:spMk id="1047" creationId="{9874D11C-36F5-4BBE-A490-019A54E953B0}"/>
+          </ac:spMkLst>
+        </pc:spChg>
+        <pc:graphicFrameChg chg="del">
+          <ac:chgData name="Tyler Parker" userId="d600db0a132671fc" providerId="LiveId" clId="{604D48C0-C6CD-4CFE-A0AF-6B69BDB117D4}" dt="2026-03-23T16:28:22.339" v="209" actId="478"/>
+          <ac:graphicFrameMkLst>
+            <pc:docMk/>
+            <pc:sldMk cId="570200493" sldId="264"/>
+            <ac:graphicFrameMk id="4" creationId="{E74F61F8-8836-4DFF-A90B-4343BB165FF6}"/>
+          </ac:graphicFrameMkLst>
+        </pc:graphicFrameChg>
+        <pc:picChg chg="add del mod ord">
+          <ac:chgData name="Tyler Parker" userId="d600db0a132671fc" providerId="LiveId" clId="{604D48C0-C6CD-4CFE-A0AF-6B69BDB117D4}" dt="2026-03-23T16:43:47.569" v="213" actId="478"/>
+          <ac:picMkLst>
+            <pc:docMk/>
+            <pc:sldMk cId="570200493" sldId="264"/>
+            <ac:picMk id="1026" creationId="{1F6DB003-7E67-DA86-70D6-C01EA3A50660}"/>
+          </ac:picMkLst>
+        </pc:picChg>
+        <pc:picChg chg="add del mod">
+          <ac:chgData name="Tyler Parker" userId="d600db0a132671fc" providerId="LiveId" clId="{604D48C0-C6CD-4CFE-A0AF-6B69BDB117D4}" dt="2026-03-23T16:47:53.994" v="221" actId="478"/>
+          <ac:picMkLst>
+            <pc:docMk/>
+            <pc:sldMk cId="570200493" sldId="264"/>
+            <ac:picMk id="1028" creationId="{CE55F7CC-DA11-6A48-AF71-DB1EB6226461}"/>
+          </ac:picMkLst>
+        </pc:picChg>
+        <pc:picChg chg="add del mod">
+          <ac:chgData name="Tyler Parker" userId="d600db0a132671fc" providerId="LiveId" clId="{604D48C0-C6CD-4CFE-A0AF-6B69BDB117D4}" dt="2026-03-23T16:46:12.571" v="220" actId="478"/>
+          <ac:picMkLst>
+            <pc:docMk/>
+            <pc:sldMk cId="570200493" sldId="264"/>
+            <ac:picMk id="1030" creationId="{54C78954-DD78-2EED-5ED1-0BB76DA4E7D7}"/>
+          </ac:picMkLst>
+        </pc:picChg>
+      </pc:sldChg>
+      <pc:sldChg chg="ord">
+        <pc:chgData name="Tyler Parker" userId="d600db0a132671fc" providerId="LiveId" clId="{604D48C0-C6CD-4CFE-A0AF-6B69BDB117D4}" dt="2026-03-23T16:53:26.020" v="238"/>
+        <pc:sldMkLst>
+          <pc:docMk/>
+          <pc:sldMk cId="1661780556" sldId="265"/>
+        </pc:sldMkLst>
+      </pc:sldChg>
+      <pc:sldChg chg="del">
+        <pc:chgData name="Tyler Parker" userId="d600db0a132671fc" providerId="LiveId" clId="{604D48C0-C6CD-4CFE-A0AF-6B69BDB117D4}" dt="2026-03-23T14:55:28.865" v="0" actId="47"/>
+        <pc:sldMkLst>
+          <pc:docMk/>
+          <pc:sldMk cId="2738762824" sldId="270"/>
+        </pc:sldMkLst>
+      </pc:sldChg>
+      <pc:sldChg chg="addSp delSp modSp new mod">
+        <pc:chgData name="Tyler Parker" userId="d600db0a132671fc" providerId="LiveId" clId="{604D48C0-C6CD-4CFE-A0AF-6B69BDB117D4}" dt="2026-03-23T16:49:26.776" v="236" actId="14100"/>
+        <pc:sldMkLst>
+          <pc:docMk/>
+          <pc:sldMk cId="3406865343" sldId="270"/>
+        </pc:sldMkLst>
+        <pc:spChg chg="mod">
+          <ac:chgData name="Tyler Parker" userId="d600db0a132671fc" providerId="LiveId" clId="{604D48C0-C6CD-4CFE-A0AF-6B69BDB117D4}" dt="2026-03-23T16:48:08.258" v="225"/>
+          <ac:spMkLst>
+            <pc:docMk/>
+            <pc:sldMk cId="3406865343" sldId="270"/>
+            <ac:spMk id="3" creationId="{06260828-9B1A-219B-D3CD-C1774116F309}"/>
+          </ac:spMkLst>
+        </pc:spChg>
+        <pc:spChg chg="add del">
+          <ac:chgData name="Tyler Parker" userId="d600db0a132671fc" providerId="LiveId" clId="{604D48C0-C6CD-4CFE-A0AF-6B69BDB117D4}" dt="2026-03-23T16:48:01.009" v="224" actId="22"/>
+          <ac:spMkLst>
+            <pc:docMk/>
+            <pc:sldMk cId="3406865343" sldId="270"/>
+            <ac:spMk id="5" creationId="{B2DAD7A4-7354-0234-47EB-A322723D306C}"/>
+          </ac:spMkLst>
+        </pc:spChg>
+        <pc:picChg chg="mod">
+          <ac:chgData name="Tyler Parker" userId="d600db0a132671fc" providerId="LiveId" clId="{604D48C0-C6CD-4CFE-A0AF-6B69BDB117D4}" dt="2026-03-23T16:49:26.776" v="236" actId="14100"/>
+          <ac:picMkLst>
+            <pc:docMk/>
+            <pc:sldMk cId="3406865343" sldId="270"/>
+            <ac:picMk id="6" creationId="{872A77F3-C987-F14C-9A4C-ADCF3B534B1D}"/>
+          </ac:picMkLst>
+        </pc:picChg>
+      </pc:sldChg>
+      <pc:sldChg chg="new del">
+        <pc:chgData name="Tyler Parker" userId="d600db0a132671fc" providerId="LiveId" clId="{604D48C0-C6CD-4CFE-A0AF-6B69BDB117D4}" dt="2026-03-23T16:23:19.086" v="208" actId="47"/>
+        <pc:sldMkLst>
+          <pc:docMk/>
+          <pc:sldMk cId="3858164259" sldId="270"/>
+        </pc:sldMkLst>
+      </pc:sldChg>
+      <pc:sldChg chg="modSp new mod">
+        <pc:chgData name="Tyler Parker" userId="d600db0a132671fc" providerId="LiveId" clId="{604D48C0-C6CD-4CFE-A0AF-6B69BDB117D4}" dt="2026-03-23T16:49:03.581" v="231" actId="14100"/>
+        <pc:sldMkLst>
+          <pc:docMk/>
+          <pc:sldMk cId="2984929715" sldId="271"/>
+        </pc:sldMkLst>
+        <pc:spChg chg="mod">
+          <ac:chgData name="Tyler Parker" userId="d600db0a132671fc" providerId="LiveId" clId="{604D48C0-C6CD-4CFE-A0AF-6B69BDB117D4}" dt="2026-03-23T16:48:33.854" v="227"/>
+          <ac:spMkLst>
+            <pc:docMk/>
+            <pc:sldMk cId="2984929715" sldId="271"/>
+            <ac:spMk id="3" creationId="{872748A2-BA92-FD8D-8ECF-07FAF7F49F60}"/>
+          </ac:spMkLst>
+        </pc:spChg>
+        <pc:picChg chg="mod">
+          <ac:chgData name="Tyler Parker" userId="d600db0a132671fc" providerId="LiveId" clId="{604D48C0-C6CD-4CFE-A0AF-6B69BDB117D4}" dt="2026-03-23T16:49:03.581" v="231" actId="14100"/>
+          <ac:picMkLst>
+            <pc:docMk/>
+            <pc:sldMk cId="2984929715" sldId="271"/>
+            <ac:picMk id="4" creationId="{D9698BE3-45D8-CEDD-B77E-1FA04D4D7588}"/>
+          </ac:picMkLst>
+        </pc:picChg>
+      </pc:sldChg>
+      <pc:sldChg chg="modSp new mod">
+        <pc:chgData name="Tyler Parker" userId="d600db0a132671fc" providerId="LiveId" clId="{604D48C0-C6CD-4CFE-A0AF-6B69BDB117D4}" dt="2026-03-23T19:42:14.654" v="256" actId="5793"/>
+        <pc:sldMkLst>
+          <pc:docMk/>
+          <pc:sldMk cId="2218329834" sldId="272"/>
+        </pc:sldMkLst>
+        <pc:spChg chg="mod">
+          <ac:chgData name="Tyler Parker" userId="d600db0a132671fc" providerId="LiveId" clId="{604D48C0-C6CD-4CFE-A0AF-6B69BDB117D4}" dt="2026-03-23T19:42:14.654" v="256" actId="5793"/>
+          <ac:spMkLst>
+            <pc:docMk/>
+            <pc:sldMk cId="2218329834" sldId="272"/>
+            <ac:spMk id="3" creationId="{929990AD-1E62-97CF-6034-5966B15E76DB}"/>
+          </ac:spMkLst>
+        </pc:spChg>
+      </pc:sldChg>
+    </pc:docChg>
+  </pc:docChgLst>
+</pc:chgInfo>
+</file>
+
 <file path=ppt/notesMasters/notesMaster1.xml><?xml version="1.0" encoding="utf-8"?>
 <p:notesMaster xmlns:a="http://schemas.openxmlformats.org/drawingml/2006/main" xmlns:r="http://schemas.openxmlformats.org/officeDocument/2006/relationships" xmlns:p="http://schemas.openxmlformats.org/presentationml/2006/main">
   <p:cSld>
@@ -209,7 +589,7 @@
           <a:p>
             <a:fld id="{FD20C370-9B30-4FC2-90F1-F83A67B7726F}" type="datetimeFigureOut">
               <a:rPr lang="en-US" smtClean="0"/>
-              <a:t>3/20/2026</a:t>
+              <a:t>3/23/2026</a:t>
             </a:fld>
             <a:endParaRPr lang="en-US"/>
           </a:p>
@@ -640,7 +1020,7 @@
           <a:p>
             <a:fld id="{39957B42-9C2E-4808-BE61-1A853C789FAB}" type="slidenum">
               <a:rPr lang="en-US" smtClean="0"/>
-              <a:t>4</a:t>
+              <a:t>3</a:t>
             </a:fld>
             <a:endParaRPr lang="en-US"/>
           </a:p>
@@ -967,7 +1347,7 @@
           <a:p>
             <a:fld id="{39957B42-9C2E-4808-BE61-1A853C789FAB}" type="slidenum">
               <a:rPr lang="en-US" smtClean="0"/>
-              <a:t>9</a:t>
+              <a:t>10</a:t>
             </a:fld>
             <a:endParaRPr lang="en-US"/>
           </a:p>
@@ -1051,7 +1431,7 @@
           <a:p>
             <a:fld id="{39957B42-9C2E-4808-BE61-1A853C789FAB}" type="slidenum">
               <a:rPr lang="en-US" smtClean="0"/>
-              <a:t>10</a:t>
+              <a:t>11</a:t>
             </a:fld>
             <a:endParaRPr lang="en-US"/>
           </a:p>
@@ -1237,6 +1617,13 @@
               <a:schemeClr val="lt1"/>
             </a:fontRef>
           </p:style>
+          <p:txBody>
+            <a:bodyPr/>
+            <a:lstStyle/>
+            <a:p>
+              <a:endParaRPr lang="en-US"/>
+            </a:p>
+          </p:txBody>
         </p:sp>
         <p:sp>
           <p:nvSpPr>
@@ -1300,6 +1687,13 @@
               <a:schemeClr val="lt1"/>
             </a:fontRef>
           </p:style>
+          <p:txBody>
+            <a:bodyPr/>
+            <a:lstStyle/>
+            <a:p>
+              <a:endParaRPr lang="en-US"/>
+            </a:p>
+          </p:txBody>
         </p:sp>
         <p:sp>
           <p:nvSpPr>
@@ -1341,6 +1735,13 @@
               <a:schemeClr val="lt1"/>
             </a:fontRef>
           </p:style>
+          <p:txBody>
+            <a:bodyPr/>
+            <a:lstStyle/>
+            <a:p>
+              <a:endParaRPr lang="en-US"/>
+            </a:p>
+          </p:txBody>
         </p:sp>
         <p:sp>
           <p:nvSpPr>
@@ -1405,6 +1806,13 @@
               <a:schemeClr val="lt1"/>
             </a:fontRef>
           </p:style>
+          <p:txBody>
+            <a:bodyPr/>
+            <a:lstStyle/>
+            <a:p>
+              <a:endParaRPr lang="en-US"/>
+            </a:p>
+          </p:txBody>
         </p:sp>
         <p:sp>
           <p:nvSpPr>
@@ -1470,6 +1878,13 @@
               <a:schemeClr val="lt1"/>
             </a:fontRef>
           </p:style>
+          <p:txBody>
+            <a:bodyPr/>
+            <a:lstStyle/>
+            <a:p>
+              <a:endParaRPr lang="en-US"/>
+            </a:p>
+          </p:txBody>
         </p:sp>
         <p:sp>
           <p:nvSpPr>
@@ -1533,6 +1948,13 @@
               <a:schemeClr val="lt1"/>
             </a:fontRef>
           </p:style>
+          <p:txBody>
+            <a:bodyPr/>
+            <a:lstStyle/>
+            <a:p>
+              <a:endParaRPr lang="en-US"/>
+            </a:p>
+          </p:txBody>
         </p:sp>
         <p:sp>
           <p:nvSpPr>
@@ -1574,6 +1996,13 @@
               <a:schemeClr val="lt1"/>
             </a:fontRef>
           </p:style>
+          <p:txBody>
+            <a:bodyPr/>
+            <a:lstStyle/>
+            <a:p>
+              <a:endParaRPr lang="en-US"/>
+            </a:p>
+          </p:txBody>
         </p:sp>
         <p:sp>
           <p:nvSpPr>
@@ -1615,6 +2044,13 @@
               <a:schemeClr val="lt1"/>
             </a:fontRef>
           </p:style>
+          <p:txBody>
+            <a:bodyPr/>
+            <a:lstStyle/>
+            <a:p>
+              <a:endParaRPr lang="en-US"/>
+            </a:p>
+          </p:txBody>
         </p:sp>
       </p:grpSp>
       <p:sp>
@@ -1792,7 +2228,7 @@
           <a:p>
             <a:fld id="{54EE00D9-0E8B-4EEB-87D3-6B20B0F560C5}" type="datetimeFigureOut">
               <a:rPr lang="en-US" smtClean="0"/>
-              <a:t>3/20/2026</a:t>
+              <a:t>3/23/2026</a:t>
             </a:fld>
             <a:endParaRPr lang="en-US"/>
           </a:p>
@@ -2043,7 +2479,7 @@
           <a:p>
             <a:fld id="{54EE00D9-0E8B-4EEB-87D3-6B20B0F560C5}" type="datetimeFigureOut">
               <a:rPr lang="en-US" smtClean="0"/>
-              <a:t>3/20/2026</a:t>
+              <a:t>3/23/2026</a:t>
             </a:fld>
             <a:endParaRPr lang="en-US"/>
           </a:p>
@@ -2357,7 +2793,7 @@
           <a:p>
             <a:fld id="{54EE00D9-0E8B-4EEB-87D3-6B20B0F560C5}" type="datetimeFigureOut">
               <a:rPr lang="en-US" smtClean="0"/>
-              <a:t>3/20/2026</a:t>
+              <a:t>3/23/2026</a:t>
             </a:fld>
             <a:endParaRPr lang="en-US"/>
           </a:p>
@@ -2698,7 +3134,7 @@
           <a:p>
             <a:fld id="{54EE00D9-0E8B-4EEB-87D3-6B20B0F560C5}" type="datetimeFigureOut">
               <a:rPr lang="en-US" smtClean="0"/>
-              <a:t>3/20/2026</a:t>
+              <a:t>3/23/2026</a:t>
             </a:fld>
             <a:endParaRPr lang="en-US"/>
           </a:p>
@@ -3012,7 +3448,7 @@
           <a:p>
             <a:fld id="{54EE00D9-0E8B-4EEB-87D3-6B20B0F560C5}" type="datetimeFigureOut">
               <a:rPr lang="en-US" smtClean="0"/>
-              <a:t>3/20/2026</a:t>
+              <a:t>3/23/2026</a:t>
             </a:fld>
             <a:endParaRPr lang="en-US"/>
           </a:p>
@@ -3405,7 +3841,7 @@
           <a:p>
             <a:fld id="{54EE00D9-0E8B-4EEB-87D3-6B20B0F560C5}" type="datetimeFigureOut">
               <a:rPr lang="en-US" smtClean="0"/>
-              <a:t>3/20/2026</a:t>
+              <a:t>3/23/2026</a:t>
             </a:fld>
             <a:endParaRPr lang="en-US"/>
           </a:p>
@@ -3575,7 +4011,7 @@
           <a:p>
             <a:fld id="{54EE00D9-0E8B-4EEB-87D3-6B20B0F560C5}" type="datetimeFigureOut">
               <a:rPr lang="en-US" smtClean="0"/>
-              <a:t>3/20/2026</a:t>
+              <a:t>3/23/2026</a:t>
             </a:fld>
             <a:endParaRPr lang="en-US"/>
           </a:p>
@@ -3755,7 +4191,7 @@
           <a:p>
             <a:fld id="{54EE00D9-0E8B-4EEB-87D3-6B20B0F560C5}" type="datetimeFigureOut">
               <a:rPr lang="en-US" smtClean="0"/>
-              <a:t>3/20/2026</a:t>
+              <a:t>3/23/2026</a:t>
             </a:fld>
             <a:endParaRPr lang="en-US"/>
           </a:p>
@@ -3931,7 +4367,7 @@
           <a:p>
             <a:fld id="{54EE00D9-0E8B-4EEB-87D3-6B20B0F560C5}" type="datetimeFigureOut">
               <a:rPr lang="en-US" smtClean="0"/>
-              <a:t>3/20/2026</a:t>
+              <a:t>3/23/2026</a:t>
             </a:fld>
             <a:endParaRPr lang="en-US"/>
           </a:p>
@@ -4178,7 +4614,7 @@
           <a:p>
             <a:fld id="{54EE00D9-0E8B-4EEB-87D3-6B20B0F560C5}" type="datetimeFigureOut">
               <a:rPr lang="en-US" smtClean="0"/>
-              <a:t>3/20/2026</a:t>
+              <a:t>3/23/2026</a:t>
             </a:fld>
             <a:endParaRPr lang="en-US"/>
           </a:p>
@@ -4410,7 +4846,7 @@
           <a:p>
             <a:fld id="{54EE00D9-0E8B-4EEB-87D3-6B20B0F560C5}" type="datetimeFigureOut">
               <a:rPr lang="en-US" smtClean="0"/>
-              <a:t>3/20/2026</a:t>
+              <a:t>3/23/2026</a:t>
             </a:fld>
             <a:endParaRPr lang="en-US"/>
           </a:p>
@@ -4784,7 +5220,7 @@
           <a:p>
             <a:fld id="{54EE00D9-0E8B-4EEB-87D3-6B20B0F560C5}" type="datetimeFigureOut">
               <a:rPr lang="en-US" smtClean="0"/>
-              <a:t>3/20/2026</a:t>
+              <a:t>3/23/2026</a:t>
             </a:fld>
             <a:endParaRPr lang="en-US"/>
           </a:p>
@@ -4907,7 +5343,7 @@
           <a:p>
             <a:fld id="{54EE00D9-0E8B-4EEB-87D3-6B20B0F560C5}" type="datetimeFigureOut">
               <a:rPr lang="en-US" smtClean="0"/>
-              <a:t>3/20/2026</a:t>
+              <a:t>3/23/2026</a:t>
             </a:fld>
             <a:endParaRPr lang="en-US"/>
           </a:p>
@@ -5002,7 +5438,7 @@
           <a:p>
             <a:fld id="{54EE00D9-0E8B-4EEB-87D3-6B20B0F560C5}" type="datetimeFigureOut">
               <a:rPr lang="en-US" smtClean="0"/>
-              <a:t>3/20/2026</a:t>
+              <a:t>3/23/2026</a:t>
             </a:fld>
             <a:endParaRPr lang="en-US"/>
           </a:p>
@@ -5257,7 +5693,7 @@
           <a:p>
             <a:fld id="{54EE00D9-0E8B-4EEB-87D3-6B20B0F560C5}" type="datetimeFigureOut">
               <a:rPr lang="en-US" smtClean="0"/>
-              <a:t>3/20/2026</a:t>
+              <a:t>3/23/2026</a:t>
             </a:fld>
             <a:endParaRPr lang="en-US"/>
           </a:p>
@@ -5520,7 +5956,7 @@
           <a:p>
             <a:fld id="{54EE00D9-0E8B-4EEB-87D3-6B20B0F560C5}" type="datetimeFigureOut">
               <a:rPr lang="en-US" smtClean="0"/>
-              <a:t>3/20/2026</a:t>
+              <a:t>3/23/2026</a:t>
             </a:fld>
             <a:endParaRPr lang="en-US"/>
           </a:p>
@@ -5753,6 +6189,13 @@
               <a:schemeClr val="lt1"/>
             </a:fontRef>
           </p:style>
+          <p:txBody>
+            <a:bodyPr/>
+            <a:lstStyle/>
+            <a:p>
+              <a:endParaRPr lang="en-US"/>
+            </a:p>
+          </p:txBody>
         </p:sp>
         <p:sp>
           <p:nvSpPr>
@@ -5816,6 +6259,13 @@
               <a:schemeClr val="lt1"/>
             </a:fontRef>
           </p:style>
+          <p:txBody>
+            <a:bodyPr/>
+            <a:lstStyle/>
+            <a:p>
+              <a:endParaRPr lang="en-US"/>
+            </a:p>
+          </p:txBody>
         </p:sp>
         <p:sp>
           <p:nvSpPr>
@@ -5857,6 +6307,13 @@
               <a:schemeClr val="lt1"/>
             </a:fontRef>
           </p:style>
+          <p:txBody>
+            <a:bodyPr/>
+            <a:lstStyle/>
+            <a:p>
+              <a:endParaRPr lang="en-US"/>
+            </a:p>
+          </p:txBody>
         </p:sp>
         <p:sp>
           <p:nvSpPr>
@@ -5921,6 +6378,13 @@
               <a:schemeClr val="lt1"/>
             </a:fontRef>
           </p:style>
+          <p:txBody>
+            <a:bodyPr/>
+            <a:lstStyle/>
+            <a:p>
+              <a:endParaRPr lang="en-US"/>
+            </a:p>
+          </p:txBody>
         </p:sp>
         <p:sp>
           <p:nvSpPr>
@@ -5986,6 +6450,13 @@
               <a:schemeClr val="lt1"/>
             </a:fontRef>
           </p:style>
+          <p:txBody>
+            <a:bodyPr/>
+            <a:lstStyle/>
+            <a:p>
+              <a:endParaRPr lang="en-US"/>
+            </a:p>
+          </p:txBody>
         </p:sp>
         <p:sp>
           <p:nvSpPr>
@@ -6049,6 +6520,13 @@
               <a:schemeClr val="lt1"/>
             </a:fontRef>
           </p:style>
+          <p:txBody>
+            <a:bodyPr/>
+            <a:lstStyle/>
+            <a:p>
+              <a:endParaRPr lang="en-US"/>
+            </a:p>
+          </p:txBody>
         </p:sp>
         <p:sp>
           <p:nvSpPr>
@@ -6090,6 +6568,13 @@
               <a:schemeClr val="lt1"/>
             </a:fontRef>
           </p:style>
+          <p:txBody>
+            <a:bodyPr/>
+            <a:lstStyle/>
+            <a:p>
+              <a:endParaRPr lang="en-US"/>
+            </a:p>
+          </p:txBody>
         </p:sp>
         <p:sp>
           <p:nvSpPr>
@@ -6131,6 +6616,13 @@
               <a:schemeClr val="lt1"/>
             </a:fontRef>
           </p:style>
+          <p:txBody>
+            <a:bodyPr/>
+            <a:lstStyle/>
+            <a:p>
+              <a:endParaRPr lang="en-US"/>
+            </a:p>
+          </p:txBody>
         </p:sp>
       </p:grpSp>
       <p:sp>
@@ -6263,7 +6755,7 @@
           <a:p>
             <a:fld id="{54EE00D9-0E8B-4EEB-87D3-6B20B0F560C5}" type="datetimeFigureOut">
               <a:rPr lang="en-US" smtClean="0"/>
-              <a:t>3/20/2026</a:t>
+              <a:t>3/23/2026</a:t>
             </a:fld>
             <a:endParaRPr lang="en-US"/>
           </a:p>
@@ -6808,9 +7300,17 @@
           <a:bodyPr/>
           <a:lstStyle/>
           <a:p>
+            <a:pPr algn="ctr"/>
             <a:r>
               <a:rPr lang="en-US" dirty="0"/>
-              <a:t>Arkansas Tech Social Media Analytics</a:t>
+              <a:t>Wonder Boys &amp; Social </a:t>
+            </a:r>
+            <a:br>
+              <a:rPr lang="en-US" dirty="0"/>
+            </a:br>
+            <a:r>
+              <a:rPr lang="en-US" dirty="0"/>
+              <a:t>Noise</a:t>
             </a:r>
           </a:p>
         </p:txBody>
@@ -6836,7 +7336,16 @@
           <a:bodyPr/>
           <a:lstStyle/>
           <a:p>
-            <a:endParaRPr lang="en-US"/>
+            <a:r>
+              <a:rPr lang="en-US" dirty="0"/>
+              <a:t>Tyler Parker</a:t>
+            </a:r>
+          </a:p>
+          <a:p>
+            <a:r>
+              <a:rPr lang="en-US" dirty="0"/>
+              <a:t>Arkansas Tech University</a:t>
+            </a:r>
           </a:p>
         </p:txBody>
       </p:sp>
@@ -6872,6 +7381,99 @@
       </p:grpSpPr>
       <p:sp>
         <p:nvSpPr>
+          <p:cNvPr id="10" name="Content Placeholder 9">
+            <a:extLst>
+              <a:ext uri="{FF2B5EF4-FFF2-40B4-BE49-F238E27FC236}">
+                <a16:creationId xmlns:a16="http://schemas.microsoft.com/office/drawing/2014/main" id="{F700B8A9-6E16-FCE8-A370-053B2C949FE2}"/>
+              </a:ext>
+            </a:extLst>
+          </p:cNvPr>
+          <p:cNvSpPr>
+            <a:spLocks noGrp="1"/>
+          </p:cNvSpPr>
+          <p:nvPr>
+            <p:ph idx="1"/>
+          </p:nvPr>
+        </p:nvSpPr>
+        <p:spPr/>
+        <p:txBody>
+          <a:bodyPr/>
+          <a:lstStyle/>
+          <a:p>
+            <a:endParaRPr lang="en-US" dirty="0"/>
+          </a:p>
+        </p:txBody>
+      </p:sp>
+      <p:pic>
+        <p:nvPicPr>
+          <p:cNvPr id="11" name="Picture 10">
+            <a:extLst>
+              <a:ext uri="{FF2B5EF4-FFF2-40B4-BE49-F238E27FC236}">
+                <a16:creationId xmlns:a16="http://schemas.microsoft.com/office/drawing/2014/main" id="{AC7198DC-461F-B082-0FEE-1162F3DDB322}"/>
+              </a:ext>
+            </a:extLst>
+          </p:cNvPr>
+          <p:cNvPicPr>
+            <a:picLocks noChangeAspect="1"/>
+          </p:cNvPicPr>
+          <p:nvPr/>
+        </p:nvPicPr>
+        <p:blipFill>
+          <a:blip r:embed="rId3"/>
+          <a:stretch>
+            <a:fillRect/>
+          </a:stretch>
+        </p:blipFill>
+        <p:spPr>
+          <a:xfrm>
+            <a:off x="1" y="0"/>
+            <a:ext cx="12192000" cy="6858000"/>
+          </a:xfrm>
+          <a:prstGeom prst="rect">
+            <a:avLst/>
+          </a:prstGeom>
+        </p:spPr>
+      </p:pic>
+    </p:spTree>
+    <p:extLst>
+      <p:ext uri="{BB962C8B-B14F-4D97-AF65-F5344CB8AC3E}">
+        <p14:creationId xmlns:p14="http://schemas.microsoft.com/office/powerpoint/2010/main" val="2955730375"/>
+      </p:ext>
+    </p:extLst>
+  </p:cSld>
+  <p:clrMapOvr>
+    <a:masterClrMapping/>
+  </p:clrMapOvr>
+</p:sld>
+</file>
+
+<file path=ppt/slides/slide11.xml><?xml version="1.0" encoding="utf-8"?>
+<p:sld xmlns:a="http://schemas.openxmlformats.org/drawingml/2006/main" xmlns:r="http://schemas.openxmlformats.org/officeDocument/2006/relationships" xmlns:p="http://schemas.openxmlformats.org/presentationml/2006/main">
+  <p:cSld>
+    <p:bg>
+      <p:bgPr>
+        <a:solidFill>
+          <a:schemeClr val="bg1"/>
+        </a:solidFill>
+        <a:effectLst/>
+      </p:bgPr>
+    </p:bg>
+    <p:spTree>
+      <p:nvGrpSpPr>
+        <p:cNvPr id="1" name=""/>
+        <p:cNvGrpSpPr/>
+        <p:nvPr/>
+      </p:nvGrpSpPr>
+      <p:grpSpPr>
+        <a:xfrm>
+          <a:off x="0" y="0"/>
+          <a:ext cx="0" cy="0"/>
+          <a:chOff x="0" y="0"/>
+          <a:chExt cx="0" cy="0"/>
+        </a:xfrm>
+      </p:grpSpPr>
+      <p:sp>
+        <p:nvSpPr>
           <p:cNvPr id="2" name="Title 1">
             <a:extLst>
               <a:ext uri="{FF2B5EF4-FFF2-40B4-BE49-F238E27FC236}">
@@ -6886,9 +7488,16 @@
             <p:ph type="title"/>
           </p:nvPr>
         </p:nvSpPr>
-        <p:spPr/>
-        <p:txBody>
-          <a:bodyPr/>
+        <p:spPr>
+          <a:xfrm>
+            <a:off x="677333" y="609600"/>
+            <a:ext cx="3851123" cy="1320800"/>
+          </a:xfrm>
+        </p:spPr>
+        <p:txBody>
+          <a:bodyPr>
+            <a:normAutofit/>
+          </a:bodyPr>
           <a:lstStyle/>
           <a:p>
             <a:r>
@@ -6914,9 +7523,16 @@
             <p:ph idx="1"/>
           </p:nvPr>
         </p:nvSpPr>
-        <p:spPr/>
-        <p:txBody>
-          <a:bodyPr/>
+        <p:spPr>
+          <a:xfrm>
+            <a:off x="677334" y="2160589"/>
+            <a:ext cx="3851122" cy="3880773"/>
+          </a:xfrm>
+        </p:spPr>
+        <p:txBody>
+          <a:bodyPr>
+            <a:normAutofit/>
+          </a:bodyPr>
           <a:lstStyle/>
           <a:p>
             <a:r>
@@ -6938,507 +7554,682 @@
           </a:p>
         </p:txBody>
       </p:sp>
-      <p:graphicFrame>
-        <p:nvGraphicFramePr>
-          <p:cNvPr id="4" name="Table 3">
+      <p:cxnSp>
+        <p:nvCxnSpPr>
+          <p:cNvPr id="1031" name="Straight Connector 1030">
             <a:extLst>
               <a:ext uri="{FF2B5EF4-FFF2-40B4-BE49-F238E27FC236}">
-                <a16:creationId xmlns:a16="http://schemas.microsoft.com/office/drawing/2014/main" id="{E74F61F8-8836-4DFF-A90B-4343BB165FF6}"/>
+                <a16:creationId xmlns:a16="http://schemas.microsoft.com/office/drawing/2014/main" id="{64FA5DFF-7FE6-4855-84E6-DFA78EE978BD}"/>
+              </a:ext>
+              <a:ext uri="{C183D7F6-B498-43B3-948B-1728B52AA6E4}">
+                <adec:decorative xmlns:adec="http://schemas.microsoft.com/office/drawing/2017/decorative" val="1"/>
               </a:ext>
             </a:extLst>
           </p:cNvPr>
-          <p:cNvGraphicFramePr>
-            <a:graphicFrameLocks noGrp="1"/>
-          </p:cNvGraphicFramePr>
+          <p:cNvCxnSpPr>
+            <a:cxnSpLocks noGrp="1" noRot="1" noChangeAspect="1" noMove="1" noResize="1" noEditPoints="1" noAdjustHandles="1" noChangeArrowheads="1" noChangeShapeType="1"/>
+          </p:cNvCxnSpPr>
           <p:nvPr>
             <p:extLst>
-              <p:ext uri="{D42A27DB-BD31-4B8C-83A1-F6EECF244321}">
-                <p14:modId xmlns:p14="http://schemas.microsoft.com/office/powerpoint/2010/main" val="586515612"/>
+              <p:ext uri="{386F3935-93C4-4BCD-93E2-E3B085C9AB24}">
+                <p16:designElem xmlns:p16="http://schemas.microsoft.com/office/powerpoint/2015/main" val="1"/>
               </p:ext>
             </p:extLst>
           </p:nvPr>
-        </p:nvGraphicFramePr>
-        <p:xfrm>
-          <a:off x="1041400" y="3839499"/>
-          <a:ext cx="3159125" cy="2408901"/>
-        </p:xfrm>
-        <a:graphic>
-          <a:graphicData uri="http://schemas.openxmlformats.org/drawingml/2006/table">
-            <a:tbl>
-              <a:tblPr>
-                <a:tableStyleId>{5C22544A-7EE6-4342-B048-85BDC9FD1C3A}</a:tableStyleId>
-              </a:tblPr>
-              <a:tblGrid>
-                <a:gridCol w="858792">
-                  <a:extLst>
-                    <a:ext uri="{9D8B030D-6E8A-4147-A177-3AD203B41FA5}">
-                      <a16:colId xmlns:a16="http://schemas.microsoft.com/office/drawing/2014/main" val="1655049291"/>
-                    </a:ext>
-                  </a:extLst>
-                </a:gridCol>
-                <a:gridCol w="1088824">
-                  <a:extLst>
-                    <a:ext uri="{9D8B030D-6E8A-4147-A177-3AD203B41FA5}">
-                      <a16:colId xmlns:a16="http://schemas.microsoft.com/office/drawing/2014/main" val="1575252837"/>
-                    </a:ext>
-                  </a:extLst>
-                </a:gridCol>
-                <a:gridCol w="1211509">
-                  <a:extLst>
-                    <a:ext uri="{9D8B030D-6E8A-4147-A177-3AD203B41FA5}">
-                      <a16:colId xmlns:a16="http://schemas.microsoft.com/office/drawing/2014/main" val="1863034092"/>
-                    </a:ext>
-                  </a:extLst>
-                </a:gridCol>
-              </a:tblGrid>
-              <a:tr h="640251">
-                <a:tc>
-                  <a:txBody>
-                    <a:bodyPr/>
-                    <a:lstStyle/>
-                    <a:p>
-                      <a:pPr algn="ctr" fontAlgn="ctr"/>
-                      <a:endParaRPr lang="en-US" sz="1000" b="0" i="0" u="none" strike="noStrike">
-                        <a:solidFill>
-                          <a:srgbClr val="FF0000"/>
-                        </a:solidFill>
-                        <a:effectLst/>
-                        <a:latin typeface="Consolas" panose="020B0609020204030204" pitchFamily="49" charset="0"/>
-                      </a:endParaRPr>
-                    </a:p>
-                  </a:txBody>
-                  <a:tcPr marL="9525" marR="9525" marT="9525" marB="0" anchor="ctr"/>
-                </a:tc>
-                <a:tc>
-                  <a:txBody>
-                    <a:bodyPr/>
-                    <a:lstStyle/>
-                    <a:p>
-                      <a:pPr algn="ctr" fontAlgn="ctr"/>
-                      <a:r>
-                        <a:rPr lang="en-US" sz="1100" u="none" strike="noStrike">
-                          <a:effectLst/>
-                        </a:rPr>
-                        <a:t>sentiment</a:t>
-                      </a:r>
-                      <a:endParaRPr lang="en-US" sz="1100" b="0" i="0" u="none" strike="noStrike">
-                        <a:solidFill>
-                          <a:srgbClr val="FF0000"/>
-                        </a:solidFill>
-                        <a:effectLst/>
-                        <a:latin typeface="Calibri" panose="020F0502020204030204" pitchFamily="34" charset="0"/>
-                      </a:endParaRPr>
-                    </a:p>
-                  </a:txBody>
-                  <a:tcPr marL="9525" marR="9525" marT="9525" marB="0" anchor="ctr"/>
-                </a:tc>
-                <a:tc>
-                  <a:txBody>
-                    <a:bodyPr/>
-                    <a:lstStyle/>
-                    <a:p>
-                      <a:pPr algn="ctr" fontAlgn="ctr"/>
-                      <a:r>
-                        <a:rPr lang="en-US" sz="1100" u="none" strike="noStrike">
-                          <a:effectLst/>
-                        </a:rPr>
-                        <a:t>subjectivity</a:t>
-                      </a:r>
-                      <a:endParaRPr lang="en-US" sz="1100" b="0" i="0" u="none" strike="noStrike">
-                        <a:solidFill>
-                          <a:srgbClr val="FF0000"/>
-                        </a:solidFill>
-                        <a:effectLst/>
-                        <a:latin typeface="Calibri" panose="020F0502020204030204" pitchFamily="34" charset="0"/>
-                      </a:endParaRPr>
-                    </a:p>
-                  </a:txBody>
-                  <a:tcPr marL="9525" marR="9525" marT="9525" marB="0" anchor="ctr"/>
-                </a:tc>
-                <a:extLst>
-                  <a:ext uri="{0D108BD9-81ED-4DB2-BD59-A6C34878D82A}">
-                    <a16:rowId xmlns:a16="http://schemas.microsoft.com/office/drawing/2014/main" val="3936685550"/>
-                  </a:ext>
-                </a:extLst>
-              </a:tr>
-              <a:tr h="353730">
-                <a:tc>
-                  <a:txBody>
-                    <a:bodyPr/>
-                    <a:lstStyle/>
-                    <a:p>
-                      <a:pPr algn="ctr" fontAlgn="ctr"/>
-                      <a:r>
-                        <a:rPr lang="en-US" sz="1000" u="none" strike="noStrike">
-                          <a:effectLst/>
-                        </a:rPr>
-                        <a:t>cluster</a:t>
-                      </a:r>
-                      <a:endParaRPr lang="en-US" sz="1000" b="0" i="0" u="none" strike="noStrike">
-                        <a:solidFill>
-                          <a:srgbClr val="FF0000"/>
-                        </a:solidFill>
-                        <a:effectLst/>
-                        <a:latin typeface="Consolas" panose="020B0609020204030204" pitchFamily="49" charset="0"/>
-                      </a:endParaRPr>
-                    </a:p>
-                  </a:txBody>
-                  <a:tcPr marL="9525" marR="9525" marT="9525" marB="0" anchor="ctr"/>
-                </a:tc>
-                <a:tc>
-                  <a:txBody>
-                    <a:bodyPr/>
-                    <a:lstStyle/>
-                    <a:p>
-                      <a:pPr algn="ctr" fontAlgn="ctr"/>
-                      <a:endParaRPr lang="en-US" sz="1100" b="0" i="0" u="none" strike="noStrike">
-                        <a:solidFill>
-                          <a:srgbClr val="FF0000"/>
-                        </a:solidFill>
-                        <a:effectLst/>
-                        <a:latin typeface="Calibri" panose="020F0502020204030204" pitchFamily="34" charset="0"/>
-                      </a:endParaRPr>
-                    </a:p>
-                  </a:txBody>
-                  <a:tcPr marL="9525" marR="9525" marT="9525" marB="0" anchor="ctr"/>
-                </a:tc>
-                <a:tc>
-                  <a:txBody>
-                    <a:bodyPr/>
-                    <a:lstStyle/>
-                    <a:p>
-                      <a:pPr algn="ctr" fontAlgn="ctr"/>
-                      <a:endParaRPr lang="en-US" sz="1100" b="0" i="0" u="none" strike="noStrike">
-                        <a:solidFill>
-                          <a:srgbClr val="FF0000"/>
-                        </a:solidFill>
-                        <a:effectLst/>
-                        <a:latin typeface="Calibri" panose="020F0502020204030204" pitchFamily="34" charset="0"/>
-                      </a:endParaRPr>
-                    </a:p>
-                  </a:txBody>
-                  <a:tcPr marL="9525" marR="9525" marT="9525" marB="0" anchor="ctr"/>
-                </a:tc>
-                <a:extLst>
-                  <a:ext uri="{0D108BD9-81ED-4DB2-BD59-A6C34878D82A}">
-                    <a16:rowId xmlns:a16="http://schemas.microsoft.com/office/drawing/2014/main" val="193498854"/>
-                  </a:ext>
-                </a:extLst>
-              </a:tr>
-              <a:tr h="353730">
-                <a:tc>
-                  <a:txBody>
-                    <a:bodyPr/>
-                    <a:lstStyle/>
-                    <a:p>
-                      <a:pPr algn="ctr" fontAlgn="ctr"/>
-                      <a:r>
-                        <a:rPr lang="en-US" sz="1000" u="none" strike="noStrike" dirty="0">
-                          <a:solidFill>
-                            <a:srgbClr val="FF0000"/>
-                          </a:solidFill>
-                          <a:effectLst/>
-                        </a:rPr>
-                        <a:t>0</a:t>
-                      </a:r>
-                      <a:endParaRPr lang="en-US" sz="1000" b="0" i="0" u="none" strike="noStrike" dirty="0">
-                        <a:solidFill>
-                          <a:srgbClr val="FF0000"/>
-                        </a:solidFill>
-                        <a:effectLst/>
-                        <a:latin typeface="Consolas" panose="020B0609020204030204" pitchFamily="49" charset="0"/>
-                      </a:endParaRPr>
-                    </a:p>
-                  </a:txBody>
-                  <a:tcPr marL="9525" marR="9525" marT="9525" marB="0" anchor="ctr"/>
-                </a:tc>
-                <a:tc>
-                  <a:txBody>
-                    <a:bodyPr/>
-                    <a:lstStyle/>
-                    <a:p>
-                      <a:pPr algn="ctr" fontAlgn="ctr"/>
-                      <a:r>
-                        <a:rPr lang="en-US" sz="1100" u="none" strike="noStrike" dirty="0">
-                          <a:solidFill>
-                            <a:srgbClr val="FF0000"/>
-                          </a:solidFill>
-                          <a:effectLst/>
-                        </a:rPr>
-                        <a:t>0.222052</a:t>
-                      </a:r>
-                      <a:endParaRPr lang="en-US" sz="1100" b="0" i="0" u="none" strike="noStrike" dirty="0">
-                        <a:solidFill>
-                          <a:srgbClr val="FF0000"/>
-                        </a:solidFill>
-                        <a:effectLst/>
-                        <a:latin typeface="Calibri" panose="020F0502020204030204" pitchFamily="34" charset="0"/>
-                      </a:endParaRPr>
-                    </a:p>
-                  </a:txBody>
-                  <a:tcPr marL="9525" marR="9525" marT="9525" marB="0" anchor="ctr"/>
-                </a:tc>
-                <a:tc>
-                  <a:txBody>
-                    <a:bodyPr/>
-                    <a:lstStyle/>
-                    <a:p>
-                      <a:pPr algn="ctr" fontAlgn="ctr"/>
-                      <a:r>
-                        <a:rPr lang="en-US" sz="1100" u="none" strike="noStrike" dirty="0">
-                          <a:solidFill>
-                            <a:srgbClr val="FF0000"/>
-                          </a:solidFill>
-                          <a:effectLst/>
-                        </a:rPr>
-                        <a:t>0.326461</a:t>
-                      </a:r>
-                      <a:endParaRPr lang="en-US" sz="1100" b="0" i="0" u="none" strike="noStrike" dirty="0">
-                        <a:solidFill>
-                          <a:srgbClr val="FF0000"/>
-                        </a:solidFill>
-                        <a:effectLst/>
-                        <a:latin typeface="Calibri" panose="020F0502020204030204" pitchFamily="34" charset="0"/>
-                      </a:endParaRPr>
-                    </a:p>
-                  </a:txBody>
-                  <a:tcPr marL="9525" marR="9525" marT="9525" marB="0" anchor="ctr"/>
-                </a:tc>
-                <a:extLst>
-                  <a:ext uri="{0D108BD9-81ED-4DB2-BD59-A6C34878D82A}">
-                    <a16:rowId xmlns:a16="http://schemas.microsoft.com/office/drawing/2014/main" val="963202060"/>
-                  </a:ext>
-                </a:extLst>
-              </a:tr>
-              <a:tr h="353730">
-                <a:tc>
-                  <a:txBody>
-                    <a:bodyPr/>
-                    <a:lstStyle/>
-                    <a:p>
-                      <a:pPr algn="ctr" fontAlgn="ctr"/>
-                      <a:r>
-                        <a:rPr lang="en-US" sz="1000" u="none" strike="noStrike">
-                          <a:effectLst/>
-                        </a:rPr>
-                        <a:t>1</a:t>
-                      </a:r>
-                      <a:endParaRPr lang="en-US" sz="1000" b="0" i="0" u="none" strike="noStrike">
-                        <a:solidFill>
-                          <a:srgbClr val="FF0000"/>
-                        </a:solidFill>
-                        <a:effectLst/>
-                        <a:latin typeface="Consolas" panose="020B0609020204030204" pitchFamily="49" charset="0"/>
-                      </a:endParaRPr>
-                    </a:p>
-                  </a:txBody>
-                  <a:tcPr marL="9525" marR="9525" marT="9525" marB="0" anchor="ctr"/>
-                </a:tc>
-                <a:tc>
-                  <a:txBody>
-                    <a:bodyPr/>
-                    <a:lstStyle/>
-                    <a:p>
-                      <a:pPr algn="ctr" fontAlgn="ctr"/>
-                      <a:r>
-                        <a:rPr lang="en-US" sz="1100" u="none" strike="noStrike">
-                          <a:effectLst/>
-                        </a:rPr>
-                        <a:t>0.123042</a:t>
-                      </a:r>
-                      <a:endParaRPr lang="en-US" sz="1100" b="0" i="0" u="none" strike="noStrike">
-                        <a:solidFill>
-                          <a:srgbClr val="FF0000"/>
-                        </a:solidFill>
-                        <a:effectLst/>
-                        <a:latin typeface="Calibri" panose="020F0502020204030204" pitchFamily="34" charset="0"/>
-                      </a:endParaRPr>
-                    </a:p>
-                  </a:txBody>
-                  <a:tcPr marL="9525" marR="9525" marT="9525" marB="0" anchor="ctr"/>
-                </a:tc>
-                <a:tc>
-                  <a:txBody>
-                    <a:bodyPr/>
-                    <a:lstStyle/>
-                    <a:p>
-                      <a:pPr algn="ctr" fontAlgn="ctr"/>
-                      <a:r>
-                        <a:rPr lang="en-US" sz="1100" u="none" strike="noStrike">
-                          <a:effectLst/>
-                        </a:rPr>
-                        <a:t>0.296481</a:t>
-                      </a:r>
-                      <a:endParaRPr lang="en-US" sz="1100" b="0" i="0" u="none" strike="noStrike">
-                        <a:solidFill>
-                          <a:srgbClr val="FF0000"/>
-                        </a:solidFill>
-                        <a:effectLst/>
-                        <a:latin typeface="Calibri" panose="020F0502020204030204" pitchFamily="34" charset="0"/>
-                      </a:endParaRPr>
-                    </a:p>
-                  </a:txBody>
-                  <a:tcPr marL="9525" marR="9525" marT="9525" marB="0" anchor="ctr"/>
-                </a:tc>
-                <a:extLst>
-                  <a:ext uri="{0D108BD9-81ED-4DB2-BD59-A6C34878D82A}">
-                    <a16:rowId xmlns:a16="http://schemas.microsoft.com/office/drawing/2014/main" val="4074244370"/>
-                  </a:ext>
-                </a:extLst>
-              </a:tr>
-              <a:tr h="353730">
-                <a:tc>
-                  <a:txBody>
-                    <a:bodyPr/>
-                    <a:lstStyle/>
-                    <a:p>
-                      <a:pPr algn="ctr" fontAlgn="ctr"/>
-                      <a:r>
-                        <a:rPr lang="en-US" sz="1000" u="none" strike="noStrike" dirty="0">
-                          <a:effectLst/>
-                        </a:rPr>
-                        <a:t>2</a:t>
-                      </a:r>
-                      <a:endParaRPr lang="en-US" sz="1000" b="0" i="0" u="none" strike="noStrike" dirty="0">
-                        <a:solidFill>
-                          <a:srgbClr val="FF0000"/>
-                        </a:solidFill>
-                        <a:effectLst/>
-                        <a:latin typeface="Consolas" panose="020B0609020204030204" pitchFamily="49" charset="0"/>
-                      </a:endParaRPr>
-                    </a:p>
-                  </a:txBody>
-                  <a:tcPr marL="9525" marR="9525" marT="9525" marB="0" anchor="ctr"/>
-                </a:tc>
-                <a:tc>
-                  <a:txBody>
-                    <a:bodyPr/>
-                    <a:lstStyle/>
-                    <a:p>
-                      <a:pPr algn="ctr" fontAlgn="ctr"/>
-                      <a:r>
-                        <a:rPr lang="en-US" sz="1100" u="none" strike="noStrike">
-                          <a:effectLst/>
-                        </a:rPr>
-                        <a:t>0.215238</a:t>
-                      </a:r>
-                      <a:endParaRPr lang="en-US" sz="1100" b="0" i="0" u="none" strike="noStrike">
-                        <a:solidFill>
-                          <a:srgbClr val="FF0000"/>
-                        </a:solidFill>
-                        <a:effectLst/>
-                        <a:latin typeface="Calibri" panose="020F0502020204030204" pitchFamily="34" charset="0"/>
-                      </a:endParaRPr>
-                    </a:p>
-                  </a:txBody>
-                  <a:tcPr marL="9525" marR="9525" marT="9525" marB="0" anchor="ctr"/>
-                </a:tc>
-                <a:tc>
-                  <a:txBody>
-                    <a:bodyPr/>
-                    <a:lstStyle/>
-                    <a:p>
-                      <a:pPr algn="ctr" fontAlgn="ctr"/>
-                      <a:r>
-                        <a:rPr lang="en-US" sz="1100" u="none" strike="noStrike">
-                          <a:effectLst/>
-                        </a:rPr>
-                        <a:t>0.406514</a:t>
-                      </a:r>
-                      <a:endParaRPr lang="en-US" sz="1100" b="0" i="0" u="none" strike="noStrike">
-                        <a:solidFill>
-                          <a:srgbClr val="FF0000"/>
-                        </a:solidFill>
-                        <a:effectLst/>
-                        <a:latin typeface="Calibri" panose="020F0502020204030204" pitchFamily="34" charset="0"/>
-                      </a:endParaRPr>
-                    </a:p>
-                  </a:txBody>
-                  <a:tcPr marL="9525" marR="9525" marT="9525" marB="0" anchor="ctr"/>
-                </a:tc>
-                <a:extLst>
-                  <a:ext uri="{0D108BD9-81ED-4DB2-BD59-A6C34878D82A}">
-                    <a16:rowId xmlns:a16="http://schemas.microsoft.com/office/drawing/2014/main" val="2917244701"/>
-                  </a:ext>
-                </a:extLst>
-              </a:tr>
-              <a:tr h="353730">
-                <a:tc>
-                  <a:txBody>
-                    <a:bodyPr/>
-                    <a:lstStyle/>
-                    <a:p>
-                      <a:pPr marL="0" algn="ctr" defTabSz="457200" rtl="0" eaLnBrk="1" fontAlgn="ctr" latinLnBrk="0" hangingPunct="1"/>
-                      <a:r>
-                        <a:rPr lang="en-US" sz="1000" u="none" strike="noStrike" kern="1200" dirty="0">
-                          <a:solidFill>
-                            <a:srgbClr val="FF0000"/>
-                          </a:solidFill>
-                          <a:effectLst/>
-                          <a:latin typeface="+mn-lt"/>
-                          <a:ea typeface="+mn-ea"/>
-                          <a:cs typeface="+mn-cs"/>
-                        </a:rPr>
-                        <a:t>3</a:t>
-                      </a:r>
-                    </a:p>
-                  </a:txBody>
-                  <a:tcPr marL="9525" marR="9525" marT="9525" marB="0" anchor="ctr"/>
-                </a:tc>
-                <a:tc>
-                  <a:txBody>
-                    <a:bodyPr/>
-                    <a:lstStyle/>
-                    <a:p>
-                      <a:pPr marL="0" algn="ctr" defTabSz="457200" rtl="0" eaLnBrk="1" fontAlgn="ctr" latinLnBrk="0" hangingPunct="1"/>
-                      <a:r>
-                        <a:rPr lang="en-US" sz="1000" u="none" strike="noStrike" kern="1200" dirty="0">
-                          <a:solidFill>
-                            <a:srgbClr val="FF0000"/>
-                          </a:solidFill>
-                          <a:effectLst/>
-                          <a:latin typeface="+mn-lt"/>
-                          <a:ea typeface="+mn-ea"/>
-                          <a:cs typeface="+mn-cs"/>
-                        </a:rPr>
-                        <a:t>0.204919</a:t>
-                      </a:r>
-                    </a:p>
-                  </a:txBody>
-                  <a:tcPr marL="9525" marR="9525" marT="9525" marB="0" anchor="ctr"/>
-                </a:tc>
-                <a:tc>
-                  <a:txBody>
-                    <a:bodyPr/>
-                    <a:lstStyle/>
-                    <a:p>
-                      <a:pPr marL="0" algn="ctr" defTabSz="457200" rtl="0" eaLnBrk="1" fontAlgn="ctr" latinLnBrk="0" hangingPunct="1"/>
-                      <a:r>
-                        <a:rPr lang="en-US" sz="1000" u="none" strike="noStrike" kern="1200" dirty="0">
-                          <a:solidFill>
-                            <a:srgbClr val="FF0000"/>
-                          </a:solidFill>
-                          <a:effectLst/>
-                          <a:latin typeface="+mn-lt"/>
-                          <a:ea typeface="+mn-ea"/>
-                          <a:cs typeface="+mn-cs"/>
-                        </a:rPr>
-                        <a:t>0.476852</a:t>
-                      </a:r>
-                    </a:p>
-                  </a:txBody>
-                  <a:tcPr marL="9525" marR="9525" marT="9525" marB="0" anchor="ctr"/>
-                </a:tc>
-                <a:extLst>
-                  <a:ext uri="{0D108BD9-81ED-4DB2-BD59-A6C34878D82A}">
-                    <a16:rowId xmlns:a16="http://schemas.microsoft.com/office/drawing/2014/main" val="3187902103"/>
-                  </a:ext>
-                </a:extLst>
-              </a:tr>
-            </a:tbl>
-          </a:graphicData>
-        </a:graphic>
-      </p:graphicFrame>
+        </p:nvCxnSpPr>
+        <p:spPr>
+          <a:xfrm>
+            <a:off x="9371012" y="0"/>
+            <a:ext cx="1219200" cy="6858000"/>
+          </a:xfrm>
+          <a:prstGeom prst="line">
+            <a:avLst/>
+          </a:prstGeom>
+          <a:ln w="9525">
+            <a:solidFill>
+              <a:schemeClr val="bg1">
+                <a:lumMod val="75000"/>
+              </a:schemeClr>
+            </a:solidFill>
+          </a:ln>
+        </p:spPr>
+        <p:style>
+          <a:lnRef idx="2">
+            <a:schemeClr val="accent1"/>
+          </a:lnRef>
+          <a:fillRef idx="0">
+            <a:schemeClr val="accent1"/>
+          </a:fillRef>
+          <a:effectRef idx="1">
+            <a:schemeClr val="accent1"/>
+          </a:effectRef>
+          <a:fontRef idx="minor">
+            <a:schemeClr val="tx1"/>
+          </a:fontRef>
+        </p:style>
+      </p:cxnSp>
+      <p:cxnSp>
+        <p:nvCxnSpPr>
+          <p:cNvPr id="1033" name="Straight Connector 1032">
+            <a:extLst>
+              <a:ext uri="{FF2B5EF4-FFF2-40B4-BE49-F238E27FC236}">
+                <a16:creationId xmlns:a16="http://schemas.microsoft.com/office/drawing/2014/main" id="{2AFD8CBA-54A3-4363-991B-B9C631BBFA74}"/>
+              </a:ext>
+              <a:ext uri="{C183D7F6-B498-43B3-948B-1728B52AA6E4}">
+                <adec:decorative xmlns:adec="http://schemas.microsoft.com/office/drawing/2017/decorative" val="1"/>
+              </a:ext>
+            </a:extLst>
+          </p:cNvPr>
+          <p:cNvCxnSpPr>
+            <a:cxnSpLocks noGrp="1" noRot="1" noChangeAspect="1" noMove="1" noResize="1" noEditPoints="1" noAdjustHandles="1" noChangeArrowheads="1" noChangeShapeType="1"/>
+          </p:cNvCxnSpPr>
+          <p:nvPr>
+            <p:extLst>
+              <p:ext uri="{386F3935-93C4-4BCD-93E2-E3B085C9AB24}">
+                <p16:designElem xmlns:p16="http://schemas.microsoft.com/office/powerpoint/2015/main" val="1"/>
+              </p:ext>
+            </p:extLst>
+          </p:nvPr>
+        </p:nvCxnSpPr>
+        <p:spPr>
+          <a:xfrm flipH="1">
+            <a:off x="7425267" y="3681413"/>
+            <a:ext cx="4763558" cy="3176587"/>
+          </a:xfrm>
+          <a:prstGeom prst="line">
+            <a:avLst/>
+          </a:prstGeom>
+          <a:ln w="9525">
+            <a:solidFill>
+              <a:schemeClr val="bg1">
+                <a:lumMod val="85000"/>
+              </a:schemeClr>
+            </a:solidFill>
+          </a:ln>
+        </p:spPr>
+        <p:style>
+          <a:lnRef idx="2">
+            <a:schemeClr val="accent1"/>
+          </a:lnRef>
+          <a:fillRef idx="0">
+            <a:schemeClr val="accent1"/>
+          </a:fillRef>
+          <a:effectRef idx="1">
+            <a:schemeClr val="accent1"/>
+          </a:effectRef>
+          <a:fontRef idx="minor">
+            <a:schemeClr val="tx1"/>
+          </a:fontRef>
+        </p:style>
+      </p:cxnSp>
+      <p:sp>
+        <p:nvSpPr>
+          <p:cNvPr id="1035" name="Rectangle 23">
+            <a:extLst>
+              <a:ext uri="{FF2B5EF4-FFF2-40B4-BE49-F238E27FC236}">
+                <a16:creationId xmlns:a16="http://schemas.microsoft.com/office/drawing/2014/main" id="{3F088236-D655-4F88-B238-E16762358025}"/>
+              </a:ext>
+              <a:ext uri="{C183D7F6-B498-43B3-948B-1728B52AA6E4}">
+                <adec:decorative xmlns:adec="http://schemas.microsoft.com/office/drawing/2017/decorative" val="1"/>
+              </a:ext>
+            </a:extLst>
+          </p:cNvPr>
+          <p:cNvSpPr>
+            <a:spLocks noGrp="1" noRot="1" noChangeAspect="1" noMove="1" noResize="1" noEditPoints="1" noAdjustHandles="1" noChangeArrowheads="1" noChangeShapeType="1" noTextEdit="1"/>
+          </p:cNvSpPr>
+          <p:nvPr>
+            <p:extLst>
+              <p:ext uri="{386F3935-93C4-4BCD-93E2-E3B085C9AB24}">
+                <p16:designElem xmlns:p16="http://schemas.microsoft.com/office/powerpoint/2015/main" val="1"/>
+              </p:ext>
+            </p:extLst>
+          </p:nvPr>
+        </p:nvSpPr>
+        <p:spPr>
+          <a:xfrm>
+            <a:off x="9181476" y="-8467"/>
+            <a:ext cx="3007349" cy="6866467"/>
+          </a:xfrm>
+          <a:custGeom>
+            <a:avLst/>
+            <a:gdLst/>
+            <a:ahLst/>
+            <a:cxnLst/>
+            <a:rect l="l" t="t" r="r" b="b"/>
+            <a:pathLst>
+              <a:path w="3007349" h="6866467">
+                <a:moveTo>
+                  <a:pt x="2045532" y="0"/>
+                </a:moveTo>
+                <a:lnTo>
+                  <a:pt x="3007349" y="0"/>
+                </a:lnTo>
+                <a:lnTo>
+                  <a:pt x="3007349" y="6866467"/>
+                </a:lnTo>
+                <a:lnTo>
+                  <a:pt x="0" y="6866467"/>
+                </a:lnTo>
+                <a:lnTo>
+                  <a:pt x="2045532" y="0"/>
+                </a:lnTo>
+                <a:close/>
+              </a:path>
+            </a:pathLst>
+          </a:custGeom>
+          <a:solidFill>
+            <a:schemeClr val="accent1">
+              <a:alpha val="30000"/>
+            </a:schemeClr>
+          </a:solidFill>
+          <a:ln>
+            <a:noFill/>
+          </a:ln>
+          <a:effectLst/>
+        </p:spPr>
+        <p:style>
+          <a:lnRef idx="1">
+            <a:schemeClr val="accent1"/>
+          </a:lnRef>
+          <a:fillRef idx="3">
+            <a:schemeClr val="accent1"/>
+          </a:fillRef>
+          <a:effectRef idx="2">
+            <a:schemeClr val="accent1"/>
+          </a:effectRef>
+          <a:fontRef idx="minor">
+            <a:schemeClr val="lt1"/>
+          </a:fontRef>
+        </p:style>
+        <p:txBody>
+          <a:bodyPr/>
+          <a:lstStyle/>
+          <a:p>
+            <a:endParaRPr lang="en-US"/>
+          </a:p>
+        </p:txBody>
+      </p:sp>
+      <p:sp>
+        <p:nvSpPr>
+          <p:cNvPr id="1037" name="Rectangle 25">
+            <a:extLst>
+              <a:ext uri="{FF2B5EF4-FFF2-40B4-BE49-F238E27FC236}">
+                <a16:creationId xmlns:a16="http://schemas.microsoft.com/office/drawing/2014/main" id="{3DAC0C92-199E-475C-9390-119A9B027276}"/>
+              </a:ext>
+              <a:ext uri="{C183D7F6-B498-43B3-948B-1728B52AA6E4}">
+                <adec:decorative xmlns:adec="http://schemas.microsoft.com/office/drawing/2017/decorative" val="1"/>
+              </a:ext>
+            </a:extLst>
+          </p:cNvPr>
+          <p:cNvSpPr>
+            <a:spLocks noGrp="1" noRot="1" noChangeAspect="1" noMove="1" noResize="1" noEditPoints="1" noAdjustHandles="1" noChangeArrowheads="1" noChangeShapeType="1" noTextEdit="1"/>
+          </p:cNvSpPr>
+          <p:nvPr>
+            <p:extLst>
+              <p:ext uri="{386F3935-93C4-4BCD-93E2-E3B085C9AB24}">
+                <p16:designElem xmlns:p16="http://schemas.microsoft.com/office/powerpoint/2015/main" val="1"/>
+              </p:ext>
+            </p:extLst>
+          </p:nvPr>
+        </p:nvSpPr>
+        <p:spPr>
+          <a:xfrm>
+            <a:off x="9603442" y="-8467"/>
+            <a:ext cx="2588558" cy="6866467"/>
+          </a:xfrm>
+          <a:custGeom>
+            <a:avLst/>
+            <a:gdLst/>
+            <a:ahLst/>
+            <a:cxnLst/>
+            <a:rect l="l" t="t" r="r" b="b"/>
+            <a:pathLst>
+              <a:path w="2573311" h="6866467">
+                <a:moveTo>
+                  <a:pt x="0" y="0"/>
+                </a:moveTo>
+                <a:lnTo>
+                  <a:pt x="2573311" y="0"/>
+                </a:lnTo>
+                <a:lnTo>
+                  <a:pt x="2573311" y="6866467"/>
+                </a:lnTo>
+                <a:lnTo>
+                  <a:pt x="1202336" y="6866467"/>
+                </a:lnTo>
+                <a:lnTo>
+                  <a:pt x="0" y="0"/>
+                </a:lnTo>
+                <a:close/>
+              </a:path>
+            </a:pathLst>
+          </a:custGeom>
+          <a:solidFill>
+            <a:schemeClr val="accent1">
+              <a:alpha val="20000"/>
+            </a:schemeClr>
+          </a:solidFill>
+          <a:ln>
+            <a:noFill/>
+          </a:ln>
+          <a:effectLst/>
+        </p:spPr>
+        <p:style>
+          <a:lnRef idx="1">
+            <a:schemeClr val="accent1"/>
+          </a:lnRef>
+          <a:fillRef idx="3">
+            <a:schemeClr val="accent1"/>
+          </a:fillRef>
+          <a:effectRef idx="2">
+            <a:schemeClr val="accent1"/>
+          </a:effectRef>
+          <a:fontRef idx="minor">
+            <a:schemeClr val="lt1"/>
+          </a:fontRef>
+        </p:style>
+        <p:txBody>
+          <a:bodyPr/>
+          <a:lstStyle/>
+          <a:p>
+            <a:endParaRPr lang="en-US"/>
+          </a:p>
+        </p:txBody>
+      </p:sp>
+      <p:sp>
+        <p:nvSpPr>
+          <p:cNvPr id="1039" name="Isosceles Triangle 24">
+            <a:extLst>
+              <a:ext uri="{FF2B5EF4-FFF2-40B4-BE49-F238E27FC236}">
+                <a16:creationId xmlns:a16="http://schemas.microsoft.com/office/drawing/2014/main" id="{C4CFB339-0ED8-4FE2-9EF1-6D1375B8499B}"/>
+              </a:ext>
+              <a:ext uri="{C183D7F6-B498-43B3-948B-1728B52AA6E4}">
+                <adec:decorative xmlns:adec="http://schemas.microsoft.com/office/drawing/2017/decorative" val="1"/>
+              </a:ext>
+            </a:extLst>
+          </p:cNvPr>
+          <p:cNvSpPr>
+            <a:spLocks noGrp="1" noRot="1" noChangeAspect="1" noMove="1" noResize="1" noEditPoints="1" noAdjustHandles="1" noChangeArrowheads="1" noChangeShapeType="1" noTextEdit="1"/>
+          </p:cNvSpPr>
+          <p:nvPr>
+            <p:extLst>
+              <p:ext uri="{386F3935-93C4-4BCD-93E2-E3B085C9AB24}">
+                <p16:designElem xmlns:p16="http://schemas.microsoft.com/office/powerpoint/2015/main" val="1"/>
+              </p:ext>
+            </p:extLst>
+          </p:nvPr>
+        </p:nvSpPr>
+        <p:spPr>
+          <a:xfrm>
+            <a:off x="8932333" y="3048000"/>
+            <a:ext cx="3259667" cy="3810000"/>
+          </a:xfrm>
+          <a:prstGeom prst="triangle">
+            <a:avLst>
+              <a:gd name="adj" fmla="val 100000"/>
+            </a:avLst>
+          </a:prstGeom>
+          <a:solidFill>
+            <a:schemeClr val="accent2">
+              <a:alpha val="72000"/>
+            </a:schemeClr>
+          </a:solidFill>
+          <a:ln>
+            <a:noFill/>
+          </a:ln>
+          <a:effectLst/>
+        </p:spPr>
+        <p:style>
+          <a:lnRef idx="1">
+            <a:schemeClr val="accent1"/>
+          </a:lnRef>
+          <a:fillRef idx="3">
+            <a:schemeClr val="accent1"/>
+          </a:fillRef>
+          <a:effectRef idx="2">
+            <a:schemeClr val="accent1"/>
+          </a:effectRef>
+          <a:fontRef idx="minor">
+            <a:schemeClr val="lt1"/>
+          </a:fontRef>
+        </p:style>
+        <p:txBody>
+          <a:bodyPr/>
+          <a:lstStyle/>
+          <a:p>
+            <a:endParaRPr lang="en-US"/>
+          </a:p>
+        </p:txBody>
+      </p:sp>
+      <p:sp>
+        <p:nvSpPr>
+          <p:cNvPr id="1041" name="Rectangle 27">
+            <a:extLst>
+              <a:ext uri="{FF2B5EF4-FFF2-40B4-BE49-F238E27FC236}">
+                <a16:creationId xmlns:a16="http://schemas.microsoft.com/office/drawing/2014/main" id="{31896C80-2069-4431-9C19-83B913734490}"/>
+              </a:ext>
+              <a:ext uri="{C183D7F6-B498-43B3-948B-1728B52AA6E4}">
+                <adec:decorative xmlns:adec="http://schemas.microsoft.com/office/drawing/2017/decorative" val="1"/>
+              </a:ext>
+            </a:extLst>
+          </p:cNvPr>
+          <p:cNvSpPr>
+            <a:spLocks noGrp="1" noRot="1" noChangeAspect="1" noMove="1" noResize="1" noEditPoints="1" noAdjustHandles="1" noChangeArrowheads="1" noChangeShapeType="1" noTextEdit="1"/>
+          </p:cNvSpPr>
+          <p:nvPr>
+            <p:extLst>
+              <p:ext uri="{386F3935-93C4-4BCD-93E2-E3B085C9AB24}">
+                <p16:designElem xmlns:p16="http://schemas.microsoft.com/office/powerpoint/2015/main" val="1"/>
+              </p:ext>
+            </p:extLst>
+          </p:nvPr>
+        </p:nvSpPr>
+        <p:spPr>
+          <a:xfrm>
+            <a:off x="9334500" y="-8467"/>
+            <a:ext cx="2854326" cy="6866467"/>
+          </a:xfrm>
+          <a:custGeom>
+            <a:avLst/>
+            <a:gdLst/>
+            <a:ahLst/>
+            <a:cxnLst/>
+            <a:rect l="l" t="t" r="r" b="b"/>
+            <a:pathLst>
+              <a:path w="2858013" h="6866467">
+                <a:moveTo>
+                  <a:pt x="0" y="0"/>
+                </a:moveTo>
+                <a:lnTo>
+                  <a:pt x="2858013" y="0"/>
+                </a:lnTo>
+                <a:lnTo>
+                  <a:pt x="2858013" y="6866467"/>
+                </a:lnTo>
+                <a:lnTo>
+                  <a:pt x="2473942" y="6866467"/>
+                </a:lnTo>
+                <a:lnTo>
+                  <a:pt x="0" y="0"/>
+                </a:lnTo>
+                <a:close/>
+              </a:path>
+            </a:pathLst>
+          </a:custGeom>
+          <a:solidFill>
+            <a:schemeClr val="accent2">
+              <a:lumMod val="75000"/>
+              <a:alpha val="47000"/>
+            </a:schemeClr>
+          </a:solidFill>
+          <a:ln>
+            <a:noFill/>
+          </a:ln>
+          <a:effectLst/>
+        </p:spPr>
+        <p:style>
+          <a:lnRef idx="1">
+            <a:schemeClr val="accent1"/>
+          </a:lnRef>
+          <a:fillRef idx="3">
+            <a:schemeClr val="accent1"/>
+          </a:fillRef>
+          <a:effectRef idx="2">
+            <a:schemeClr val="accent1"/>
+          </a:effectRef>
+          <a:fontRef idx="minor">
+            <a:schemeClr val="lt1"/>
+          </a:fontRef>
+        </p:style>
+        <p:txBody>
+          <a:bodyPr/>
+          <a:lstStyle/>
+          <a:p>
+            <a:endParaRPr lang="en-US"/>
+          </a:p>
+        </p:txBody>
+      </p:sp>
+      <p:sp>
+        <p:nvSpPr>
+          <p:cNvPr id="1043" name="Rectangle 28">
+            <a:extLst>
+              <a:ext uri="{FF2B5EF4-FFF2-40B4-BE49-F238E27FC236}">
+                <a16:creationId xmlns:a16="http://schemas.microsoft.com/office/drawing/2014/main" id="{BF120A21-0841-4823-B0C4-28AEBCEF9B78}"/>
+              </a:ext>
+              <a:ext uri="{C183D7F6-B498-43B3-948B-1728B52AA6E4}">
+                <adec:decorative xmlns:adec="http://schemas.microsoft.com/office/drawing/2017/decorative" val="1"/>
+              </a:ext>
+            </a:extLst>
+          </p:cNvPr>
+          <p:cNvSpPr>
+            <a:spLocks noGrp="1" noRot="1" noChangeAspect="1" noMove="1" noResize="1" noEditPoints="1" noAdjustHandles="1" noChangeArrowheads="1" noChangeShapeType="1" noTextEdit="1"/>
+          </p:cNvSpPr>
+          <p:nvPr>
+            <p:extLst>
+              <p:ext uri="{386F3935-93C4-4BCD-93E2-E3B085C9AB24}">
+                <p16:designElem xmlns:p16="http://schemas.microsoft.com/office/powerpoint/2015/main" val="1"/>
+              </p:ext>
+            </p:extLst>
+          </p:nvPr>
+        </p:nvSpPr>
+        <p:spPr>
+          <a:xfrm>
+            <a:off x="10898730" y="-8467"/>
+            <a:ext cx="1290094" cy="6866467"/>
+          </a:xfrm>
+          <a:custGeom>
+            <a:avLst/>
+            <a:gdLst/>
+            <a:ahLst/>
+            <a:cxnLst/>
+            <a:rect l="l" t="t" r="r" b="b"/>
+            <a:pathLst>
+              <a:path w="1290094" h="6858000">
+                <a:moveTo>
+                  <a:pt x="1019735" y="0"/>
+                </a:moveTo>
+                <a:lnTo>
+                  <a:pt x="1290094" y="0"/>
+                </a:lnTo>
+                <a:lnTo>
+                  <a:pt x="1290094" y="6858000"/>
+                </a:lnTo>
+                <a:lnTo>
+                  <a:pt x="0" y="6858000"/>
+                </a:lnTo>
+                <a:lnTo>
+                  <a:pt x="1019735" y="0"/>
+                </a:lnTo>
+                <a:close/>
+              </a:path>
+            </a:pathLst>
+          </a:custGeom>
+          <a:solidFill>
+            <a:schemeClr val="accent1">
+              <a:lumMod val="60000"/>
+              <a:lumOff val="40000"/>
+              <a:alpha val="70000"/>
+            </a:schemeClr>
+          </a:solidFill>
+          <a:ln>
+            <a:noFill/>
+          </a:ln>
+          <a:effectLst/>
+        </p:spPr>
+        <p:style>
+          <a:lnRef idx="1">
+            <a:schemeClr val="accent1"/>
+          </a:lnRef>
+          <a:fillRef idx="3">
+            <a:schemeClr val="accent1"/>
+          </a:fillRef>
+          <a:effectRef idx="2">
+            <a:schemeClr val="accent1"/>
+          </a:effectRef>
+          <a:fontRef idx="minor">
+            <a:schemeClr val="lt1"/>
+          </a:fontRef>
+        </p:style>
+        <p:txBody>
+          <a:bodyPr/>
+          <a:lstStyle/>
+          <a:p>
+            <a:endParaRPr lang="en-US"/>
+          </a:p>
+        </p:txBody>
+      </p:sp>
+      <p:sp>
+        <p:nvSpPr>
+          <p:cNvPr id="1045" name="Rectangle 29">
+            <a:extLst>
+              <a:ext uri="{FF2B5EF4-FFF2-40B4-BE49-F238E27FC236}">
+                <a16:creationId xmlns:a16="http://schemas.microsoft.com/office/drawing/2014/main" id="{DBB05BAE-BBD3-4289-899F-A6851503C6B0}"/>
+              </a:ext>
+              <a:ext uri="{C183D7F6-B498-43B3-948B-1728B52AA6E4}">
+                <adec:decorative xmlns:adec="http://schemas.microsoft.com/office/drawing/2017/decorative" val="1"/>
+              </a:ext>
+            </a:extLst>
+          </p:cNvPr>
+          <p:cNvSpPr>
+            <a:spLocks noGrp="1" noRot="1" noChangeAspect="1" noMove="1" noResize="1" noEditPoints="1" noAdjustHandles="1" noChangeArrowheads="1" noChangeShapeType="1" noTextEdit="1"/>
+          </p:cNvSpPr>
+          <p:nvPr>
+            <p:extLst>
+              <p:ext uri="{386F3935-93C4-4BCD-93E2-E3B085C9AB24}">
+                <p16:designElem xmlns:p16="http://schemas.microsoft.com/office/powerpoint/2015/main" val="1"/>
+              </p:ext>
+            </p:extLst>
+          </p:nvPr>
+        </p:nvSpPr>
+        <p:spPr>
+          <a:xfrm>
+            <a:off x="10938999" y="-8467"/>
+            <a:ext cx="1249825" cy="6866467"/>
+          </a:xfrm>
+          <a:custGeom>
+            <a:avLst/>
+            <a:gdLst/>
+            <a:ahLst/>
+            <a:cxnLst/>
+            <a:rect l="l" t="t" r="r" b="b"/>
+            <a:pathLst>
+              <a:path w="1249825" h="6858000">
+                <a:moveTo>
+                  <a:pt x="0" y="0"/>
+                </a:moveTo>
+                <a:lnTo>
+                  <a:pt x="1249825" y="0"/>
+                </a:lnTo>
+                <a:lnTo>
+                  <a:pt x="1249825" y="6858000"/>
+                </a:lnTo>
+                <a:lnTo>
+                  <a:pt x="1109382" y="6858000"/>
+                </a:lnTo>
+                <a:lnTo>
+                  <a:pt x="0" y="0"/>
+                </a:lnTo>
+                <a:close/>
+              </a:path>
+            </a:pathLst>
+          </a:custGeom>
+          <a:solidFill>
+            <a:schemeClr val="accent1">
+              <a:alpha val="65000"/>
+            </a:schemeClr>
+          </a:solidFill>
+          <a:ln>
+            <a:noFill/>
+          </a:ln>
+          <a:effectLst/>
+        </p:spPr>
+        <p:style>
+          <a:lnRef idx="1">
+            <a:schemeClr val="accent1"/>
+          </a:lnRef>
+          <a:fillRef idx="3">
+            <a:schemeClr val="accent1"/>
+          </a:fillRef>
+          <a:effectRef idx="2">
+            <a:schemeClr val="accent1"/>
+          </a:effectRef>
+          <a:fontRef idx="minor">
+            <a:schemeClr val="lt1"/>
+          </a:fontRef>
+        </p:style>
+        <p:txBody>
+          <a:bodyPr/>
+          <a:lstStyle/>
+          <a:p>
+            <a:endParaRPr lang="en-US"/>
+          </a:p>
+        </p:txBody>
+      </p:sp>
+      <p:sp>
+        <p:nvSpPr>
+          <p:cNvPr id="1047" name="Isosceles Triangle 29">
+            <a:extLst>
+              <a:ext uri="{FF2B5EF4-FFF2-40B4-BE49-F238E27FC236}">
+                <a16:creationId xmlns:a16="http://schemas.microsoft.com/office/drawing/2014/main" id="{9874D11C-36F5-4BBE-A490-019A54E953B0}"/>
+              </a:ext>
+              <a:ext uri="{C183D7F6-B498-43B3-948B-1728B52AA6E4}">
+                <adec:decorative xmlns:adec="http://schemas.microsoft.com/office/drawing/2017/decorative" val="1"/>
+              </a:ext>
+            </a:extLst>
+          </p:cNvPr>
+          <p:cNvSpPr>
+            <a:spLocks noGrp="1" noRot="1" noChangeAspect="1" noMove="1" noResize="1" noEditPoints="1" noAdjustHandles="1" noChangeArrowheads="1" noChangeShapeType="1" noTextEdit="1"/>
+          </p:cNvSpPr>
+          <p:nvPr>
+            <p:extLst>
+              <p:ext uri="{386F3935-93C4-4BCD-93E2-E3B085C9AB24}">
+                <p16:designElem xmlns:p16="http://schemas.microsoft.com/office/powerpoint/2015/main" val="1"/>
+              </p:ext>
+            </p:extLst>
+          </p:nvPr>
+        </p:nvSpPr>
+        <p:spPr>
+          <a:xfrm>
+            <a:off x="10371666" y="3589867"/>
+            <a:ext cx="1817159" cy="3268133"/>
+          </a:xfrm>
+          <a:prstGeom prst="triangle">
+            <a:avLst>
+              <a:gd name="adj" fmla="val 100000"/>
+            </a:avLst>
+          </a:prstGeom>
+          <a:solidFill>
+            <a:schemeClr val="accent1">
+              <a:alpha val="80000"/>
+            </a:schemeClr>
+          </a:solidFill>
+          <a:ln>
+            <a:noFill/>
+          </a:ln>
+          <a:effectLst/>
+        </p:spPr>
+        <p:style>
+          <a:lnRef idx="1">
+            <a:schemeClr val="accent1"/>
+          </a:lnRef>
+          <a:fillRef idx="3">
+            <a:schemeClr val="accent1"/>
+          </a:fillRef>
+          <a:effectRef idx="2">
+            <a:schemeClr val="accent1"/>
+          </a:effectRef>
+          <a:fontRef idx="minor">
+            <a:schemeClr val="lt1"/>
+          </a:fontRef>
+        </p:style>
+        <p:txBody>
+          <a:bodyPr/>
+          <a:lstStyle/>
+          <a:p>
+            <a:endParaRPr lang="en-US"/>
+          </a:p>
+        </p:txBody>
+      </p:sp>
     </p:spTree>
     <p:extLst>
       <p:ext uri="{BB962C8B-B14F-4D97-AF65-F5344CB8AC3E}">
@@ -7452,7 +8243,7 @@
 </p:sld>
 </file>
 
-<file path=ppt/slides/slide11.xml><?xml version="1.0" encoding="utf-8"?>
+<file path=ppt/slides/slide12.xml><?xml version="1.0" encoding="utf-8"?>
 <p:sld xmlns:a="http://schemas.openxmlformats.org/drawingml/2006/main" xmlns:r="http://schemas.openxmlformats.org/officeDocument/2006/relationships" xmlns:p="http://schemas.openxmlformats.org/presentationml/2006/main">
   <p:cSld>
     <p:spTree>
@@ -7474,6 +8265,226 @@
           <p:cNvPr id="2" name="Title 1">
             <a:extLst>
               <a:ext uri="{FF2B5EF4-FFF2-40B4-BE49-F238E27FC236}">
+                <a16:creationId xmlns:a16="http://schemas.microsoft.com/office/drawing/2014/main" id="{12C2E5D7-957D-1717-FB3F-D5BAA0AE6F9C}"/>
+              </a:ext>
+            </a:extLst>
+          </p:cNvPr>
+          <p:cNvSpPr>
+            <a:spLocks noGrp="1"/>
+          </p:cNvSpPr>
+          <p:nvPr>
+            <p:ph type="title"/>
+          </p:nvPr>
+        </p:nvSpPr>
+        <p:spPr/>
+        <p:txBody>
+          <a:bodyPr/>
+          <a:lstStyle/>
+          <a:p>
+            <a:endParaRPr lang="en-US"/>
+          </a:p>
+        </p:txBody>
+      </p:sp>
+      <p:sp>
+        <p:nvSpPr>
+          <p:cNvPr id="3" name="Content Placeholder 2">
+            <a:extLst>
+              <a:ext uri="{FF2B5EF4-FFF2-40B4-BE49-F238E27FC236}">
+                <a16:creationId xmlns:a16="http://schemas.microsoft.com/office/drawing/2014/main" id="{872748A2-BA92-FD8D-8ECF-07FAF7F49F60}"/>
+              </a:ext>
+            </a:extLst>
+          </p:cNvPr>
+          <p:cNvSpPr>
+            <a:spLocks noGrp="1"/>
+          </p:cNvSpPr>
+          <p:nvPr>
+            <p:ph idx="1"/>
+          </p:nvPr>
+        </p:nvSpPr>
+        <p:spPr/>
+        <p:txBody>
+          <a:bodyPr/>
+          <a:lstStyle/>
+          <a:p>
+            <a:endParaRPr lang="en-US" dirty="0"/>
+          </a:p>
+        </p:txBody>
+      </p:sp>
+      <p:pic>
+        <p:nvPicPr>
+          <p:cNvPr id="4" name="Picture 3">
+            <a:extLst>
+              <a:ext uri="{FF2B5EF4-FFF2-40B4-BE49-F238E27FC236}">
+                <a16:creationId xmlns:a16="http://schemas.microsoft.com/office/drawing/2014/main" id="{D9698BE3-45D8-CEDD-B77E-1FA04D4D7588}"/>
+              </a:ext>
+            </a:extLst>
+          </p:cNvPr>
+          <p:cNvPicPr>
+            <a:picLocks noChangeAspect="1"/>
+          </p:cNvPicPr>
+          <p:nvPr/>
+        </p:nvPicPr>
+        <p:blipFill>
+          <a:blip r:embed="rId2"/>
+          <a:stretch>
+            <a:fillRect/>
+          </a:stretch>
+        </p:blipFill>
+        <p:spPr>
+          <a:xfrm>
+            <a:off x="-1" y="0"/>
+            <a:ext cx="12192001" cy="6823626"/>
+          </a:xfrm>
+          <a:prstGeom prst="rect">
+            <a:avLst/>
+          </a:prstGeom>
+        </p:spPr>
+      </p:pic>
+    </p:spTree>
+    <p:extLst>
+      <p:ext uri="{BB962C8B-B14F-4D97-AF65-F5344CB8AC3E}">
+        <p14:creationId xmlns:p14="http://schemas.microsoft.com/office/powerpoint/2010/main" val="2984929715"/>
+      </p:ext>
+    </p:extLst>
+  </p:cSld>
+  <p:clrMapOvr>
+    <a:masterClrMapping/>
+  </p:clrMapOvr>
+</p:sld>
+</file>
+
+<file path=ppt/slides/slide13.xml><?xml version="1.0" encoding="utf-8"?>
+<p:sld xmlns:a="http://schemas.openxmlformats.org/drawingml/2006/main" xmlns:r="http://schemas.openxmlformats.org/officeDocument/2006/relationships" xmlns:p="http://schemas.openxmlformats.org/presentationml/2006/main">
+  <p:cSld>
+    <p:spTree>
+      <p:nvGrpSpPr>
+        <p:cNvPr id="1" name=""/>
+        <p:cNvGrpSpPr/>
+        <p:nvPr/>
+      </p:nvGrpSpPr>
+      <p:grpSpPr>
+        <a:xfrm>
+          <a:off x="0" y="0"/>
+          <a:ext cx="0" cy="0"/>
+          <a:chOff x="0" y="0"/>
+          <a:chExt cx="0" cy="0"/>
+        </a:xfrm>
+      </p:grpSpPr>
+      <p:sp>
+        <p:nvSpPr>
+          <p:cNvPr id="2" name="Title 1">
+            <a:extLst>
+              <a:ext uri="{FF2B5EF4-FFF2-40B4-BE49-F238E27FC236}">
+                <a16:creationId xmlns:a16="http://schemas.microsoft.com/office/drawing/2014/main" id="{E96F1A84-7076-8759-99C9-79FE3D83EF33}"/>
+              </a:ext>
+            </a:extLst>
+          </p:cNvPr>
+          <p:cNvSpPr>
+            <a:spLocks noGrp="1"/>
+          </p:cNvSpPr>
+          <p:nvPr>
+            <p:ph type="title"/>
+          </p:nvPr>
+        </p:nvSpPr>
+        <p:spPr/>
+        <p:txBody>
+          <a:bodyPr/>
+          <a:lstStyle/>
+          <a:p>
+            <a:endParaRPr lang="en-US"/>
+          </a:p>
+        </p:txBody>
+      </p:sp>
+      <p:sp>
+        <p:nvSpPr>
+          <p:cNvPr id="3" name="Content Placeholder 2">
+            <a:extLst>
+              <a:ext uri="{FF2B5EF4-FFF2-40B4-BE49-F238E27FC236}">
+                <a16:creationId xmlns:a16="http://schemas.microsoft.com/office/drawing/2014/main" id="{06260828-9B1A-219B-D3CD-C1774116F309}"/>
+              </a:ext>
+            </a:extLst>
+          </p:cNvPr>
+          <p:cNvSpPr>
+            <a:spLocks noGrp="1"/>
+          </p:cNvSpPr>
+          <p:nvPr>
+            <p:ph idx="1"/>
+          </p:nvPr>
+        </p:nvSpPr>
+        <p:spPr/>
+        <p:txBody>
+          <a:bodyPr/>
+          <a:lstStyle/>
+          <a:p>
+            <a:endParaRPr lang="en-US" dirty="0"/>
+          </a:p>
+        </p:txBody>
+      </p:sp>
+      <p:pic>
+        <p:nvPicPr>
+          <p:cNvPr id="6" name="Picture 5">
+            <a:extLst>
+              <a:ext uri="{FF2B5EF4-FFF2-40B4-BE49-F238E27FC236}">
+                <a16:creationId xmlns:a16="http://schemas.microsoft.com/office/drawing/2014/main" id="{872A77F3-C987-F14C-9A4C-ADCF3B534B1D}"/>
+              </a:ext>
+            </a:extLst>
+          </p:cNvPr>
+          <p:cNvPicPr>
+            <a:picLocks noChangeAspect="1"/>
+          </p:cNvPicPr>
+          <p:nvPr/>
+        </p:nvPicPr>
+        <p:blipFill>
+          <a:blip r:embed="rId2"/>
+          <a:stretch>
+            <a:fillRect/>
+          </a:stretch>
+        </p:blipFill>
+        <p:spPr>
+          <a:xfrm>
+            <a:off x="0" y="0"/>
+            <a:ext cx="12192000" cy="6858000"/>
+          </a:xfrm>
+          <a:prstGeom prst="rect">
+            <a:avLst/>
+          </a:prstGeom>
+        </p:spPr>
+      </p:pic>
+    </p:spTree>
+    <p:extLst>
+      <p:ext uri="{BB962C8B-B14F-4D97-AF65-F5344CB8AC3E}">
+        <p14:creationId xmlns:p14="http://schemas.microsoft.com/office/powerpoint/2010/main" val="3406865343"/>
+      </p:ext>
+    </p:extLst>
+  </p:cSld>
+  <p:clrMapOvr>
+    <a:masterClrMapping/>
+  </p:clrMapOvr>
+</p:sld>
+</file>
+
+<file path=ppt/slides/slide14.xml><?xml version="1.0" encoding="utf-8"?>
+<p:sld xmlns:a="http://schemas.openxmlformats.org/drawingml/2006/main" xmlns:r="http://schemas.openxmlformats.org/officeDocument/2006/relationships" xmlns:p="http://schemas.openxmlformats.org/presentationml/2006/main">
+  <p:cSld>
+    <p:spTree>
+      <p:nvGrpSpPr>
+        <p:cNvPr id="1" name=""/>
+        <p:cNvGrpSpPr/>
+        <p:nvPr/>
+      </p:nvGrpSpPr>
+      <p:grpSpPr>
+        <a:xfrm>
+          <a:off x="0" y="0"/>
+          <a:ext cx="0" cy="0"/>
+          <a:chOff x="0" y="0"/>
+          <a:chExt cx="0" cy="0"/>
+        </a:xfrm>
+      </p:grpSpPr>
+      <p:sp>
+        <p:nvSpPr>
+          <p:cNvPr id="2" name="Title 1">
+            <a:extLst>
+              <a:ext uri="{FF2B5EF4-FFF2-40B4-BE49-F238E27FC236}">
                 <a16:creationId xmlns:a16="http://schemas.microsoft.com/office/drawing/2014/main" id="{82C50CD1-3386-425A-A82E-73CED8071C99}"/>
               </a:ext>
             </a:extLst>
@@ -7544,7 +8555,453 @@
 </p:sld>
 </file>
 
-<file path=ppt/slides/slide12.xml><?xml version="1.0" encoding="utf-8"?>
+<file path=ppt/slides/slide15.xml><?xml version="1.0" encoding="utf-8"?>
+<p:sld xmlns:a="http://schemas.openxmlformats.org/drawingml/2006/main" xmlns:r="http://schemas.openxmlformats.org/officeDocument/2006/relationships" xmlns:p="http://schemas.openxmlformats.org/presentationml/2006/main">
+  <p:cSld>
+    <p:spTree>
+      <p:nvGrpSpPr>
+        <p:cNvPr id="1" name=""/>
+        <p:cNvGrpSpPr/>
+        <p:nvPr/>
+      </p:nvGrpSpPr>
+      <p:grpSpPr>
+        <a:xfrm>
+          <a:off x="0" y="0"/>
+          <a:ext cx="0" cy="0"/>
+          <a:chOff x="0" y="0"/>
+          <a:chExt cx="0" cy="0"/>
+        </a:xfrm>
+      </p:grpSpPr>
+      <p:sp>
+        <p:nvSpPr>
+          <p:cNvPr id="2" name="Title 1">
+            <a:extLst>
+              <a:ext uri="{FF2B5EF4-FFF2-40B4-BE49-F238E27FC236}">
+                <a16:creationId xmlns:a16="http://schemas.microsoft.com/office/drawing/2014/main" id="{C0012F4D-A7D8-46C2-82E6-544FB677E3F4}"/>
+              </a:ext>
+            </a:extLst>
+          </p:cNvPr>
+          <p:cNvSpPr>
+            <a:spLocks noGrp="1"/>
+          </p:cNvSpPr>
+          <p:nvPr>
+            <p:ph type="title"/>
+          </p:nvPr>
+        </p:nvSpPr>
+        <p:spPr/>
+        <p:txBody>
+          <a:bodyPr/>
+          <a:lstStyle/>
+          <a:p>
+            <a:r>
+              <a:rPr lang="en-US" dirty="0"/>
+              <a:t>Findings</a:t>
+            </a:r>
+          </a:p>
+        </p:txBody>
+      </p:sp>
+      <p:sp>
+        <p:nvSpPr>
+          <p:cNvPr id="3" name="Content Placeholder 2">
+            <a:extLst>
+              <a:ext uri="{FF2B5EF4-FFF2-40B4-BE49-F238E27FC236}">
+                <a16:creationId xmlns:a16="http://schemas.microsoft.com/office/drawing/2014/main" id="{7EC03E82-2625-4DCD-83F9-16EFE3035E6C}"/>
+              </a:ext>
+            </a:extLst>
+          </p:cNvPr>
+          <p:cNvSpPr>
+            <a:spLocks noGrp="1"/>
+          </p:cNvSpPr>
+          <p:nvPr>
+            <p:ph idx="1"/>
+          </p:nvPr>
+        </p:nvSpPr>
+        <p:spPr/>
+        <p:txBody>
+          <a:bodyPr/>
+          <a:lstStyle/>
+          <a:p>
+            <a:r>
+              <a:rPr lang="en-US" dirty="0"/>
+              <a:t>Keep descriptions short</a:t>
+            </a:r>
+          </a:p>
+          <a:p>
+            <a:r>
+              <a:rPr lang="en-US" dirty="0"/>
+              <a:t>Post on Fridays (8 am / 10 pm)</a:t>
+            </a:r>
+          </a:p>
+          <a:p>
+            <a:r>
+              <a:rPr lang="en-US" dirty="0"/>
+              <a:t>Keep a similar feel to other post that went viral</a:t>
+            </a:r>
+          </a:p>
+          <a:p>
+            <a:r>
+              <a:rPr lang="en-US" dirty="0"/>
+              <a:t>Push more views </a:t>
+            </a:r>
+          </a:p>
+        </p:txBody>
+      </p:sp>
+    </p:spTree>
+    <p:extLst>
+      <p:ext uri="{BB962C8B-B14F-4D97-AF65-F5344CB8AC3E}">
+        <p14:creationId xmlns:p14="http://schemas.microsoft.com/office/powerpoint/2010/main" val="3394391066"/>
+      </p:ext>
+    </p:extLst>
+  </p:cSld>
+  <p:clrMapOvr>
+    <a:masterClrMapping/>
+  </p:clrMapOvr>
+</p:sld>
+</file>
+
+<file path=ppt/slides/slide2.xml><?xml version="1.0" encoding="utf-8"?>
+<p:sld xmlns:a="http://schemas.openxmlformats.org/drawingml/2006/main" xmlns:r="http://schemas.openxmlformats.org/officeDocument/2006/relationships" xmlns:p="http://schemas.openxmlformats.org/presentationml/2006/main">
+  <p:cSld>
+    <p:spTree>
+      <p:nvGrpSpPr>
+        <p:cNvPr id="1" name=""/>
+        <p:cNvGrpSpPr/>
+        <p:nvPr/>
+      </p:nvGrpSpPr>
+      <p:grpSpPr>
+        <a:xfrm>
+          <a:off x="0" y="0"/>
+          <a:ext cx="0" cy="0"/>
+          <a:chOff x="0" y="0"/>
+          <a:chExt cx="0" cy="0"/>
+        </a:xfrm>
+      </p:grpSpPr>
+      <p:sp>
+        <p:nvSpPr>
+          <p:cNvPr id="16" name="Content Placeholder 15">
+            <a:extLst>
+              <a:ext uri="{FF2B5EF4-FFF2-40B4-BE49-F238E27FC236}">
+                <a16:creationId xmlns:a16="http://schemas.microsoft.com/office/drawing/2014/main" id="{EB9178E6-BC05-4951-8F77-2F100E4F1FD9}"/>
+              </a:ext>
+            </a:extLst>
+          </p:cNvPr>
+          <p:cNvSpPr>
+            <a:spLocks noGrp="1"/>
+          </p:cNvSpPr>
+          <p:nvPr>
+            <p:ph idx="1"/>
+          </p:nvPr>
+        </p:nvSpPr>
+        <p:spPr/>
+        <p:txBody>
+          <a:bodyPr>
+            <a:normAutofit/>
+          </a:bodyPr>
+          <a:lstStyle/>
+          <a:p>
+            <a:pPr marL="0" indent="0" algn="ctr">
+              <a:buNone/>
+            </a:pPr>
+            <a:r>
+              <a:rPr lang="en-US" sz="4800" dirty="0"/>
+              <a:t>How can analytics help with retention and recruitment of students through social media? </a:t>
+            </a:r>
+          </a:p>
+        </p:txBody>
+      </p:sp>
+      <p:sp>
+        <p:nvSpPr>
+          <p:cNvPr id="4" name="Title 3">
+            <a:extLst>
+              <a:ext uri="{FF2B5EF4-FFF2-40B4-BE49-F238E27FC236}">
+                <a16:creationId xmlns:a16="http://schemas.microsoft.com/office/drawing/2014/main" id="{C1453ACE-CAD5-8D98-B66A-87A79E52ABED}"/>
+              </a:ext>
+            </a:extLst>
+          </p:cNvPr>
+          <p:cNvSpPr>
+            <a:spLocks noGrp="1"/>
+          </p:cNvSpPr>
+          <p:nvPr>
+            <p:ph type="title"/>
+          </p:nvPr>
+        </p:nvSpPr>
+        <p:spPr/>
+        <p:txBody>
+          <a:bodyPr/>
+          <a:lstStyle/>
+          <a:p>
+            <a:endParaRPr lang="en-US"/>
+          </a:p>
+        </p:txBody>
+      </p:sp>
+    </p:spTree>
+    <p:extLst>
+      <p:ext uri="{BB962C8B-B14F-4D97-AF65-F5344CB8AC3E}">
+        <p14:creationId xmlns:p14="http://schemas.microsoft.com/office/powerpoint/2010/main" val="1064868949"/>
+      </p:ext>
+    </p:extLst>
+  </p:cSld>
+  <p:clrMapOvr>
+    <a:masterClrMapping/>
+  </p:clrMapOvr>
+</p:sld>
+</file>
+
+<file path=ppt/slides/slide3.xml><?xml version="1.0" encoding="utf-8"?>
+<p:sld xmlns:a="http://schemas.openxmlformats.org/drawingml/2006/main" xmlns:r="http://schemas.openxmlformats.org/officeDocument/2006/relationships" xmlns:p="http://schemas.openxmlformats.org/presentationml/2006/main">
+  <p:cSld>
+    <p:spTree>
+      <p:nvGrpSpPr>
+        <p:cNvPr id="1" name=""/>
+        <p:cNvGrpSpPr/>
+        <p:nvPr/>
+      </p:nvGrpSpPr>
+      <p:grpSpPr>
+        <a:xfrm>
+          <a:off x="0" y="0"/>
+          <a:ext cx="0" cy="0"/>
+          <a:chOff x="0" y="0"/>
+          <a:chExt cx="0" cy="0"/>
+        </a:xfrm>
+      </p:grpSpPr>
+      <p:sp>
+        <p:nvSpPr>
+          <p:cNvPr id="3" name="Content Placeholder 2">
+            <a:extLst>
+              <a:ext uri="{FF2B5EF4-FFF2-40B4-BE49-F238E27FC236}">
+                <a16:creationId xmlns:a16="http://schemas.microsoft.com/office/drawing/2014/main" id="{A15B6076-927C-41CC-ADF0-F28A097E9774}"/>
+              </a:ext>
+            </a:extLst>
+          </p:cNvPr>
+          <p:cNvSpPr>
+            <a:spLocks noGrp="1"/>
+          </p:cNvSpPr>
+          <p:nvPr>
+            <p:ph idx="1"/>
+          </p:nvPr>
+        </p:nvSpPr>
+        <p:spPr>
+          <a:xfrm>
+            <a:off x="1097464" y="776632"/>
+            <a:ext cx="8596668" cy="3880773"/>
+          </a:xfrm>
+        </p:spPr>
+        <p:txBody>
+          <a:bodyPr>
+            <a:normAutofit/>
+          </a:bodyPr>
+          <a:lstStyle/>
+          <a:p>
+            <a:pPr marL="0" indent="0" algn="ctr">
+              <a:buNone/>
+            </a:pPr>
+            <a:endParaRPr lang="en-US" sz="9600" dirty="0"/>
+          </a:p>
+          <a:p>
+            <a:pPr marL="0" indent="0" algn="ctr">
+              <a:buNone/>
+            </a:pPr>
+            <a:r>
+              <a:rPr lang="en-US" sz="9600" dirty="0"/>
+              <a:t>GRM</a:t>
+            </a:r>
+          </a:p>
+        </p:txBody>
+      </p:sp>
+    </p:spTree>
+    <p:extLst>
+      <p:ext uri="{BB962C8B-B14F-4D97-AF65-F5344CB8AC3E}">
+        <p14:creationId xmlns:p14="http://schemas.microsoft.com/office/powerpoint/2010/main" val="2704763682"/>
+      </p:ext>
+    </p:extLst>
+  </p:cSld>
+  <p:clrMapOvr>
+    <a:masterClrMapping/>
+  </p:clrMapOvr>
+</p:sld>
+</file>
+
+<file path=ppt/slides/slide4.xml><?xml version="1.0" encoding="utf-8"?>
+<p:sld xmlns:a="http://schemas.openxmlformats.org/drawingml/2006/main" xmlns:r="http://schemas.openxmlformats.org/officeDocument/2006/relationships" xmlns:p="http://schemas.openxmlformats.org/presentationml/2006/main">
+  <p:cSld>
+    <p:spTree>
+      <p:nvGrpSpPr>
+        <p:cNvPr id="1" name=""/>
+        <p:cNvGrpSpPr/>
+        <p:nvPr/>
+      </p:nvGrpSpPr>
+      <p:grpSpPr>
+        <a:xfrm>
+          <a:off x="0" y="0"/>
+          <a:ext cx="0" cy="0"/>
+          <a:chOff x="0" y="0"/>
+          <a:chExt cx="0" cy="0"/>
+        </a:xfrm>
+      </p:grpSpPr>
+      <p:sp>
+        <p:nvSpPr>
+          <p:cNvPr id="2" name="Title 1">
+            <a:extLst>
+              <a:ext uri="{FF2B5EF4-FFF2-40B4-BE49-F238E27FC236}">
+                <a16:creationId xmlns:a16="http://schemas.microsoft.com/office/drawing/2014/main" id="{9B8BC594-06BB-457E-8F1A-DE099DEC496A}"/>
+              </a:ext>
+            </a:extLst>
+          </p:cNvPr>
+          <p:cNvSpPr>
+            <a:spLocks noGrp="1"/>
+          </p:cNvSpPr>
+          <p:nvPr>
+            <p:ph type="title"/>
+          </p:nvPr>
+        </p:nvSpPr>
+        <p:spPr/>
+        <p:txBody>
+          <a:bodyPr/>
+          <a:lstStyle/>
+          <a:p>
+            <a:endParaRPr lang="en-US"/>
+          </a:p>
+        </p:txBody>
+      </p:sp>
+      <p:pic>
+        <p:nvPicPr>
+          <p:cNvPr id="5" name="Content Placeholder 4">
+            <a:extLst>
+              <a:ext uri="{FF2B5EF4-FFF2-40B4-BE49-F238E27FC236}">
+                <a16:creationId xmlns:a16="http://schemas.microsoft.com/office/drawing/2014/main" id="{2DBF1E62-0D49-4D8A-9D28-091A3B800AC7}"/>
+              </a:ext>
+            </a:extLst>
+          </p:cNvPr>
+          <p:cNvPicPr>
+            <a:picLocks noGrp="1" noChangeAspect="1"/>
+          </p:cNvPicPr>
+          <p:nvPr>
+            <p:ph idx="1"/>
+          </p:nvPr>
+        </p:nvPicPr>
+        <p:blipFill>
+          <a:blip r:embed="rId2">
+            <a:extLst>
+              <a:ext uri="{28A0092B-C50C-407E-A947-70E740481C1C}">
+                <a14:useLocalDpi xmlns:a14="http://schemas.microsoft.com/office/drawing/2010/main" val="0"/>
+              </a:ext>
+            </a:extLst>
+          </a:blip>
+          <a:stretch>
+            <a:fillRect/>
+          </a:stretch>
+        </p:blipFill>
+        <p:spPr>
+          <a:xfrm>
+            <a:off x="0" y="0"/>
+            <a:ext cx="12192000" cy="6858000"/>
+          </a:xfrm>
+        </p:spPr>
+      </p:pic>
+    </p:spTree>
+    <p:extLst>
+      <p:ext uri="{BB962C8B-B14F-4D97-AF65-F5344CB8AC3E}">
+        <p14:creationId xmlns:p14="http://schemas.microsoft.com/office/powerpoint/2010/main" val="3664010760"/>
+      </p:ext>
+    </p:extLst>
+  </p:cSld>
+  <p:clrMapOvr>
+    <a:masterClrMapping/>
+  </p:clrMapOvr>
+</p:sld>
+</file>
+
+<file path=ppt/slides/slide5.xml><?xml version="1.0" encoding="utf-8"?>
+<p:sld xmlns:a="http://schemas.openxmlformats.org/drawingml/2006/main" xmlns:r="http://schemas.openxmlformats.org/officeDocument/2006/relationships" xmlns:p="http://schemas.openxmlformats.org/presentationml/2006/main">
+  <p:cSld>
+    <p:spTree>
+      <p:nvGrpSpPr>
+        <p:cNvPr id="1" name=""/>
+        <p:cNvGrpSpPr/>
+        <p:nvPr/>
+      </p:nvGrpSpPr>
+      <p:grpSpPr>
+        <a:xfrm>
+          <a:off x="0" y="0"/>
+          <a:ext cx="0" cy="0"/>
+          <a:chOff x="0" y="0"/>
+          <a:chExt cx="0" cy="0"/>
+        </a:xfrm>
+      </p:grpSpPr>
+      <p:sp>
+        <p:nvSpPr>
+          <p:cNvPr id="2" name="Title 1">
+            <a:extLst>
+              <a:ext uri="{FF2B5EF4-FFF2-40B4-BE49-F238E27FC236}">
+                <a16:creationId xmlns:a16="http://schemas.microsoft.com/office/drawing/2014/main" id="{56C70A08-B945-487F-8E70-E1C63484547C}"/>
+              </a:ext>
+            </a:extLst>
+          </p:cNvPr>
+          <p:cNvSpPr>
+            <a:spLocks noGrp="1"/>
+          </p:cNvSpPr>
+          <p:nvPr>
+            <p:ph type="title"/>
+          </p:nvPr>
+        </p:nvSpPr>
+        <p:spPr/>
+        <p:txBody>
+          <a:bodyPr/>
+          <a:lstStyle/>
+          <a:p>
+            <a:endParaRPr lang="en-US"/>
+          </a:p>
+        </p:txBody>
+      </p:sp>
+      <p:pic>
+        <p:nvPicPr>
+          <p:cNvPr id="5" name="Content Placeholder 4">
+            <a:extLst>
+              <a:ext uri="{FF2B5EF4-FFF2-40B4-BE49-F238E27FC236}">
+                <a16:creationId xmlns:a16="http://schemas.microsoft.com/office/drawing/2014/main" id="{11ECEBEC-04C5-4459-866E-B00088A578C0}"/>
+              </a:ext>
+            </a:extLst>
+          </p:cNvPr>
+          <p:cNvPicPr>
+            <a:picLocks noGrp="1" noChangeAspect="1"/>
+          </p:cNvPicPr>
+          <p:nvPr>
+            <p:ph idx="1"/>
+          </p:nvPr>
+        </p:nvPicPr>
+        <p:blipFill>
+          <a:blip r:embed="rId2">
+            <a:extLst>
+              <a:ext uri="{28A0092B-C50C-407E-A947-70E740481C1C}">
+                <a14:useLocalDpi xmlns:a14="http://schemas.microsoft.com/office/drawing/2010/main" val="0"/>
+              </a:ext>
+            </a:extLst>
+          </a:blip>
+          <a:stretch>
+            <a:fillRect/>
+          </a:stretch>
+        </p:blipFill>
+        <p:spPr>
+          <a:xfrm>
+            <a:off x="1" y="0"/>
+            <a:ext cx="12187344" cy="6857999"/>
+          </a:xfrm>
+        </p:spPr>
+      </p:pic>
+    </p:spTree>
+    <p:extLst>
+      <p:ext uri="{BB962C8B-B14F-4D97-AF65-F5344CB8AC3E}">
+        <p14:creationId xmlns:p14="http://schemas.microsoft.com/office/powerpoint/2010/main" val="1945193266"/>
+      </p:ext>
+    </p:extLst>
+  </p:cSld>
+  <p:clrMapOvr>
+    <a:masterClrMapping/>
+  </p:clrMapOvr>
+</p:sld>
+</file>
+
+<file path=ppt/slides/slide6.xml><?xml version="1.0" encoding="utf-8"?>
 <p:sld xmlns:a="http://schemas.openxmlformats.org/drawingml/2006/main" xmlns:r="http://schemas.openxmlformats.org/officeDocument/2006/relationships" xmlns:p="http://schemas.openxmlformats.org/presentationml/2006/main">
   <p:cSld>
     <p:spTree>
@@ -7634,658 +9091,7 @@
 </p:sld>
 </file>
 
-<file path=ppt/slides/slide13.xml><?xml version="1.0" encoding="utf-8"?>
-<p:sld xmlns:a="http://schemas.openxmlformats.org/drawingml/2006/main" xmlns:r="http://schemas.openxmlformats.org/officeDocument/2006/relationships" xmlns:p="http://schemas.openxmlformats.org/presentationml/2006/main">
-  <p:cSld>
-    <p:spTree>
-      <p:nvGrpSpPr>
-        <p:cNvPr id="1" name=""/>
-        <p:cNvGrpSpPr/>
-        <p:nvPr/>
-      </p:nvGrpSpPr>
-      <p:grpSpPr>
-        <a:xfrm>
-          <a:off x="0" y="0"/>
-          <a:ext cx="0" cy="0"/>
-          <a:chOff x="0" y="0"/>
-          <a:chExt cx="0" cy="0"/>
-        </a:xfrm>
-      </p:grpSpPr>
-      <p:sp>
-        <p:nvSpPr>
-          <p:cNvPr id="2" name="Title 1">
-            <a:extLst>
-              <a:ext uri="{FF2B5EF4-FFF2-40B4-BE49-F238E27FC236}">
-                <a16:creationId xmlns:a16="http://schemas.microsoft.com/office/drawing/2014/main" id="{C0012F4D-A7D8-46C2-82E6-544FB677E3F4}"/>
-              </a:ext>
-            </a:extLst>
-          </p:cNvPr>
-          <p:cNvSpPr>
-            <a:spLocks noGrp="1"/>
-          </p:cNvSpPr>
-          <p:nvPr>
-            <p:ph type="title"/>
-          </p:nvPr>
-        </p:nvSpPr>
-        <p:spPr/>
-        <p:txBody>
-          <a:bodyPr/>
-          <a:lstStyle/>
-          <a:p>
-            <a:r>
-              <a:rPr lang="en-US" dirty="0"/>
-              <a:t>Findings</a:t>
-            </a:r>
-          </a:p>
-        </p:txBody>
-      </p:sp>
-      <p:sp>
-        <p:nvSpPr>
-          <p:cNvPr id="3" name="Content Placeholder 2">
-            <a:extLst>
-              <a:ext uri="{FF2B5EF4-FFF2-40B4-BE49-F238E27FC236}">
-                <a16:creationId xmlns:a16="http://schemas.microsoft.com/office/drawing/2014/main" id="{7EC03E82-2625-4DCD-83F9-16EFE3035E6C}"/>
-              </a:ext>
-            </a:extLst>
-          </p:cNvPr>
-          <p:cNvSpPr>
-            <a:spLocks noGrp="1"/>
-          </p:cNvSpPr>
-          <p:nvPr>
-            <p:ph idx="1"/>
-          </p:nvPr>
-        </p:nvSpPr>
-        <p:spPr/>
-        <p:txBody>
-          <a:bodyPr/>
-          <a:lstStyle/>
-          <a:p>
-            <a:r>
-              <a:rPr lang="en-US" dirty="0"/>
-              <a:t>Keep descriptions short</a:t>
-            </a:r>
-          </a:p>
-          <a:p>
-            <a:r>
-              <a:rPr lang="en-US" dirty="0"/>
-              <a:t>Post on Fridays (8 am / 10 pm)</a:t>
-            </a:r>
-          </a:p>
-          <a:p>
-            <a:r>
-              <a:rPr lang="en-US" dirty="0"/>
-              <a:t>Keep a similar feel to other post that went viral</a:t>
-            </a:r>
-          </a:p>
-          <a:p>
-            <a:r>
-              <a:rPr lang="en-US" dirty="0"/>
-              <a:t>Push more views </a:t>
-            </a:r>
-          </a:p>
-        </p:txBody>
-      </p:sp>
-    </p:spTree>
-    <p:extLst>
-      <p:ext uri="{BB962C8B-B14F-4D97-AF65-F5344CB8AC3E}">
-        <p14:creationId xmlns:p14="http://schemas.microsoft.com/office/powerpoint/2010/main" val="3394391066"/>
-      </p:ext>
-    </p:extLst>
-  </p:cSld>
-  <p:clrMapOvr>
-    <a:masterClrMapping/>
-  </p:clrMapOvr>
-</p:sld>
-</file>
-
-<file path=ppt/slides/slide2.xml><?xml version="1.0" encoding="utf-8"?>
-<p:sld xmlns:a="http://schemas.openxmlformats.org/drawingml/2006/main" xmlns:r="http://schemas.openxmlformats.org/officeDocument/2006/relationships" xmlns:p="http://schemas.openxmlformats.org/presentationml/2006/main">
-  <p:cSld>
-    <p:spTree>
-      <p:nvGrpSpPr>
-        <p:cNvPr id="1" name=""/>
-        <p:cNvGrpSpPr/>
-        <p:nvPr/>
-      </p:nvGrpSpPr>
-      <p:grpSpPr>
-        <a:xfrm>
-          <a:off x="0" y="0"/>
-          <a:ext cx="0" cy="0"/>
-          <a:chOff x="0" y="0"/>
-          <a:chExt cx="0" cy="0"/>
-        </a:xfrm>
-      </p:grpSpPr>
-      <p:sp>
-        <p:nvSpPr>
-          <p:cNvPr id="2" name="Title 1">
-            <a:extLst>
-              <a:ext uri="{FF2B5EF4-FFF2-40B4-BE49-F238E27FC236}">
-                <a16:creationId xmlns:a16="http://schemas.microsoft.com/office/drawing/2014/main" id="{B5B9DB02-59F8-4FB4-A24A-0AAA3E8A7329}"/>
-              </a:ext>
-            </a:extLst>
-          </p:cNvPr>
-          <p:cNvSpPr>
-            <a:spLocks noGrp="1"/>
-          </p:cNvSpPr>
-          <p:nvPr>
-            <p:ph type="title"/>
-          </p:nvPr>
-        </p:nvSpPr>
-        <p:spPr/>
-        <p:txBody>
-          <a:bodyPr/>
-          <a:lstStyle/>
-          <a:p>
-            <a:r>
-              <a:rPr lang="en-US" dirty="0"/>
-              <a:t>Background</a:t>
-            </a:r>
-          </a:p>
-        </p:txBody>
-      </p:sp>
-      <p:sp>
-        <p:nvSpPr>
-          <p:cNvPr id="3" name="Content Placeholder 2">
-            <a:extLst>
-              <a:ext uri="{FF2B5EF4-FFF2-40B4-BE49-F238E27FC236}">
-                <a16:creationId xmlns:a16="http://schemas.microsoft.com/office/drawing/2014/main" id="{09FB5608-75B3-4C45-96B1-E1B9A94CD0F7}"/>
-              </a:ext>
-            </a:extLst>
-          </p:cNvPr>
-          <p:cNvSpPr>
-            <a:spLocks noGrp="1"/>
-          </p:cNvSpPr>
-          <p:nvPr>
-            <p:ph idx="1"/>
-          </p:nvPr>
-        </p:nvSpPr>
-        <p:spPr/>
-        <p:txBody>
-          <a:bodyPr/>
-          <a:lstStyle/>
-          <a:p>
-            <a:r>
-              <a:rPr lang="en-US" dirty="0"/>
-              <a:t>BDA</a:t>
-            </a:r>
-          </a:p>
-          <a:p>
-            <a:r>
-              <a:rPr lang="en-US" dirty="0"/>
-              <a:t>Job</a:t>
-            </a:r>
-          </a:p>
-          <a:p>
-            <a:pPr lvl="1"/>
-            <a:r>
-              <a:rPr lang="en-US" dirty="0"/>
-              <a:t>Recruit and Retention</a:t>
-            </a:r>
-          </a:p>
-        </p:txBody>
-      </p:sp>
-    </p:spTree>
-    <p:extLst>
-      <p:ext uri="{BB962C8B-B14F-4D97-AF65-F5344CB8AC3E}">
-        <p14:creationId xmlns:p14="http://schemas.microsoft.com/office/powerpoint/2010/main" val="2738762824"/>
-      </p:ext>
-    </p:extLst>
-  </p:cSld>
-  <p:clrMapOvr>
-    <a:masterClrMapping/>
-  </p:clrMapOvr>
-</p:sld>
-</file>
-
-<file path=ppt/slides/slide3.xml><?xml version="1.0" encoding="utf-8"?>
-<p:sld xmlns:a="http://schemas.openxmlformats.org/drawingml/2006/main" xmlns:r="http://schemas.openxmlformats.org/officeDocument/2006/relationships" xmlns:p="http://schemas.openxmlformats.org/presentationml/2006/main">
-  <p:cSld>
-    <p:spTree>
-      <p:nvGrpSpPr>
-        <p:cNvPr id="1" name=""/>
-        <p:cNvGrpSpPr/>
-        <p:nvPr/>
-      </p:nvGrpSpPr>
-      <p:grpSpPr>
-        <a:xfrm>
-          <a:off x="0" y="0"/>
-          <a:ext cx="0" cy="0"/>
-          <a:chOff x="0" y="0"/>
-          <a:chExt cx="0" cy="0"/>
-        </a:xfrm>
-      </p:grpSpPr>
-      <p:sp>
-        <p:nvSpPr>
-          <p:cNvPr id="2" name="Title 1">
-            <a:extLst>
-              <a:ext uri="{FF2B5EF4-FFF2-40B4-BE49-F238E27FC236}">
-                <a16:creationId xmlns:a16="http://schemas.microsoft.com/office/drawing/2014/main" id="{6EA22F8D-DCBB-4E43-AB3C-C4BA912D2282}"/>
-              </a:ext>
-            </a:extLst>
-          </p:cNvPr>
-          <p:cNvSpPr>
-            <a:spLocks noGrp="1"/>
-          </p:cNvSpPr>
-          <p:nvPr>
-            <p:ph type="title"/>
-          </p:nvPr>
-        </p:nvSpPr>
-        <p:spPr/>
-        <p:txBody>
-          <a:bodyPr/>
-          <a:lstStyle/>
-          <a:p>
-            <a:r>
-              <a:rPr lang="en-US" dirty="0"/>
-              <a:t>Question?</a:t>
-            </a:r>
-          </a:p>
-        </p:txBody>
-      </p:sp>
-      <p:sp>
-        <p:nvSpPr>
-          <p:cNvPr id="16" name="Content Placeholder 15">
-            <a:extLst>
-              <a:ext uri="{FF2B5EF4-FFF2-40B4-BE49-F238E27FC236}">
-                <a16:creationId xmlns:a16="http://schemas.microsoft.com/office/drawing/2014/main" id="{EB9178E6-BC05-4951-8F77-2F100E4F1FD9}"/>
-              </a:ext>
-            </a:extLst>
-          </p:cNvPr>
-          <p:cNvSpPr>
-            <a:spLocks noGrp="1"/>
-          </p:cNvSpPr>
-          <p:nvPr>
-            <p:ph idx="1"/>
-          </p:nvPr>
-        </p:nvSpPr>
-        <p:spPr/>
-        <p:txBody>
-          <a:bodyPr/>
-          <a:lstStyle/>
-          <a:p>
-            <a:r>
-              <a:rPr lang="en-US" dirty="0"/>
-              <a:t>How can we increase social media growth through post analytics? </a:t>
-            </a:r>
-          </a:p>
-          <a:p>
-            <a:endParaRPr lang="en-US" dirty="0"/>
-          </a:p>
-          <a:p>
-            <a:r>
-              <a:rPr lang="en-US" dirty="0"/>
-              <a:t>Algorithm </a:t>
-            </a:r>
-          </a:p>
-          <a:p>
-            <a:r>
-              <a:rPr lang="en-US" dirty="0"/>
-              <a:t>Psychology</a:t>
-            </a:r>
-          </a:p>
-        </p:txBody>
-      </p:sp>
-    </p:spTree>
-    <p:extLst>
-      <p:ext uri="{BB962C8B-B14F-4D97-AF65-F5344CB8AC3E}">
-        <p14:creationId xmlns:p14="http://schemas.microsoft.com/office/powerpoint/2010/main" val="1064868949"/>
-      </p:ext>
-    </p:extLst>
-  </p:cSld>
-  <p:clrMapOvr>
-    <a:masterClrMapping/>
-  </p:clrMapOvr>
-</p:sld>
-</file>
-
-<file path=ppt/slides/slide4.xml><?xml version="1.0" encoding="utf-8"?>
-<p:sld xmlns:a="http://schemas.openxmlformats.org/drawingml/2006/main" xmlns:r="http://schemas.openxmlformats.org/officeDocument/2006/relationships" xmlns:p="http://schemas.openxmlformats.org/presentationml/2006/main">
-  <p:cSld>
-    <p:spTree>
-      <p:nvGrpSpPr>
-        <p:cNvPr id="1" name=""/>
-        <p:cNvGrpSpPr/>
-        <p:nvPr/>
-      </p:nvGrpSpPr>
-      <p:grpSpPr>
-        <a:xfrm>
-          <a:off x="0" y="0"/>
-          <a:ext cx="0" cy="0"/>
-          <a:chOff x="0" y="0"/>
-          <a:chExt cx="0" cy="0"/>
-        </a:xfrm>
-      </p:grpSpPr>
-      <p:sp>
-        <p:nvSpPr>
-          <p:cNvPr id="3" name="Content Placeholder 2">
-            <a:extLst>
-              <a:ext uri="{FF2B5EF4-FFF2-40B4-BE49-F238E27FC236}">
-                <a16:creationId xmlns:a16="http://schemas.microsoft.com/office/drawing/2014/main" id="{A15B6076-927C-41CC-ADF0-F28A097E9774}"/>
-              </a:ext>
-            </a:extLst>
-          </p:cNvPr>
-          <p:cNvSpPr>
-            <a:spLocks noGrp="1"/>
-          </p:cNvSpPr>
-          <p:nvPr>
-            <p:ph idx="1"/>
-          </p:nvPr>
-        </p:nvSpPr>
-        <p:spPr>
-          <a:xfrm>
-            <a:off x="1097464" y="776632"/>
-            <a:ext cx="8596668" cy="3880773"/>
-          </a:xfrm>
-        </p:spPr>
-        <p:txBody>
-          <a:bodyPr>
-            <a:normAutofit/>
-          </a:bodyPr>
-          <a:lstStyle/>
-          <a:p>
-            <a:pPr marL="0" indent="0" algn="ctr">
-              <a:buNone/>
-            </a:pPr>
-            <a:endParaRPr lang="en-US" sz="9600" dirty="0"/>
-          </a:p>
-          <a:p>
-            <a:pPr marL="0" indent="0" algn="ctr">
-              <a:buNone/>
-            </a:pPr>
-            <a:r>
-              <a:rPr lang="en-US" sz="9600" dirty="0"/>
-              <a:t>GRM</a:t>
-            </a:r>
-          </a:p>
-        </p:txBody>
-      </p:sp>
-    </p:spTree>
-    <p:extLst>
-      <p:ext uri="{BB962C8B-B14F-4D97-AF65-F5344CB8AC3E}">
-        <p14:creationId xmlns:p14="http://schemas.microsoft.com/office/powerpoint/2010/main" val="2704763682"/>
-      </p:ext>
-    </p:extLst>
-  </p:cSld>
-  <p:clrMapOvr>
-    <a:masterClrMapping/>
-  </p:clrMapOvr>
-</p:sld>
-</file>
-
-<file path=ppt/slides/slide5.xml><?xml version="1.0" encoding="utf-8"?>
-<p:sld xmlns:a="http://schemas.openxmlformats.org/drawingml/2006/main" xmlns:r="http://schemas.openxmlformats.org/officeDocument/2006/relationships" xmlns:p="http://schemas.openxmlformats.org/presentationml/2006/main">
-  <p:cSld>
-    <p:spTree>
-      <p:nvGrpSpPr>
-        <p:cNvPr id="1" name=""/>
-        <p:cNvGrpSpPr/>
-        <p:nvPr/>
-      </p:nvGrpSpPr>
-      <p:grpSpPr>
-        <a:xfrm>
-          <a:off x="0" y="0"/>
-          <a:ext cx="0" cy="0"/>
-          <a:chOff x="0" y="0"/>
-          <a:chExt cx="0" cy="0"/>
-        </a:xfrm>
-      </p:grpSpPr>
-      <p:sp>
-        <p:nvSpPr>
-          <p:cNvPr id="2" name="Title 1">
-            <a:extLst>
-              <a:ext uri="{FF2B5EF4-FFF2-40B4-BE49-F238E27FC236}">
-                <a16:creationId xmlns:a16="http://schemas.microsoft.com/office/drawing/2014/main" id="{9B8BC594-06BB-457E-8F1A-DE099DEC496A}"/>
-              </a:ext>
-            </a:extLst>
-          </p:cNvPr>
-          <p:cNvSpPr>
-            <a:spLocks noGrp="1"/>
-          </p:cNvSpPr>
-          <p:nvPr>
-            <p:ph type="title"/>
-          </p:nvPr>
-        </p:nvSpPr>
-        <p:spPr/>
-        <p:txBody>
-          <a:bodyPr/>
-          <a:lstStyle/>
-          <a:p>
-            <a:endParaRPr lang="en-US"/>
-          </a:p>
-        </p:txBody>
-      </p:sp>
-      <p:pic>
-        <p:nvPicPr>
-          <p:cNvPr id="5" name="Content Placeholder 4">
-            <a:extLst>
-              <a:ext uri="{FF2B5EF4-FFF2-40B4-BE49-F238E27FC236}">
-                <a16:creationId xmlns:a16="http://schemas.microsoft.com/office/drawing/2014/main" id="{2DBF1E62-0D49-4D8A-9D28-091A3B800AC7}"/>
-              </a:ext>
-            </a:extLst>
-          </p:cNvPr>
-          <p:cNvPicPr>
-            <a:picLocks noGrp="1" noChangeAspect="1"/>
-          </p:cNvPicPr>
-          <p:nvPr>
-            <p:ph idx="1"/>
-          </p:nvPr>
-        </p:nvPicPr>
-        <p:blipFill>
-          <a:blip r:embed="rId2">
-            <a:extLst>
-              <a:ext uri="{28A0092B-C50C-407E-A947-70E740481C1C}">
-                <a14:useLocalDpi xmlns:a14="http://schemas.microsoft.com/office/drawing/2010/main" val="0"/>
-              </a:ext>
-            </a:extLst>
-          </a:blip>
-          <a:stretch>
-            <a:fillRect/>
-          </a:stretch>
-        </p:blipFill>
-        <p:spPr>
-          <a:xfrm>
-            <a:off x="0" y="0"/>
-            <a:ext cx="12192000" cy="6858000"/>
-          </a:xfrm>
-        </p:spPr>
-      </p:pic>
-    </p:spTree>
-    <p:extLst>
-      <p:ext uri="{BB962C8B-B14F-4D97-AF65-F5344CB8AC3E}">
-        <p14:creationId xmlns:p14="http://schemas.microsoft.com/office/powerpoint/2010/main" val="3664010760"/>
-      </p:ext>
-    </p:extLst>
-  </p:cSld>
-  <p:clrMapOvr>
-    <a:masterClrMapping/>
-  </p:clrMapOvr>
-</p:sld>
-</file>
-
-<file path=ppt/slides/slide6.xml><?xml version="1.0" encoding="utf-8"?>
-<p:sld xmlns:a="http://schemas.openxmlformats.org/drawingml/2006/main" xmlns:r="http://schemas.openxmlformats.org/officeDocument/2006/relationships" xmlns:p="http://schemas.openxmlformats.org/presentationml/2006/main">
-  <p:cSld>
-    <p:spTree>
-      <p:nvGrpSpPr>
-        <p:cNvPr id="1" name=""/>
-        <p:cNvGrpSpPr/>
-        <p:nvPr/>
-      </p:nvGrpSpPr>
-      <p:grpSpPr>
-        <a:xfrm>
-          <a:off x="0" y="0"/>
-          <a:ext cx="0" cy="0"/>
-          <a:chOff x="0" y="0"/>
-          <a:chExt cx="0" cy="0"/>
-        </a:xfrm>
-      </p:grpSpPr>
-      <p:sp>
-        <p:nvSpPr>
-          <p:cNvPr id="2" name="Title 1">
-            <a:extLst>
-              <a:ext uri="{FF2B5EF4-FFF2-40B4-BE49-F238E27FC236}">
-                <a16:creationId xmlns:a16="http://schemas.microsoft.com/office/drawing/2014/main" id="{56C70A08-B945-487F-8E70-E1C63484547C}"/>
-              </a:ext>
-            </a:extLst>
-          </p:cNvPr>
-          <p:cNvSpPr>
-            <a:spLocks noGrp="1"/>
-          </p:cNvSpPr>
-          <p:nvPr>
-            <p:ph type="title"/>
-          </p:nvPr>
-        </p:nvSpPr>
-        <p:spPr/>
-        <p:txBody>
-          <a:bodyPr/>
-          <a:lstStyle/>
-          <a:p>
-            <a:endParaRPr lang="en-US"/>
-          </a:p>
-        </p:txBody>
-      </p:sp>
-      <p:pic>
-        <p:nvPicPr>
-          <p:cNvPr id="5" name="Content Placeholder 4">
-            <a:extLst>
-              <a:ext uri="{FF2B5EF4-FFF2-40B4-BE49-F238E27FC236}">
-                <a16:creationId xmlns:a16="http://schemas.microsoft.com/office/drawing/2014/main" id="{11ECEBEC-04C5-4459-866E-B00088A578C0}"/>
-              </a:ext>
-            </a:extLst>
-          </p:cNvPr>
-          <p:cNvPicPr>
-            <a:picLocks noGrp="1" noChangeAspect="1"/>
-          </p:cNvPicPr>
-          <p:nvPr>
-            <p:ph idx="1"/>
-          </p:nvPr>
-        </p:nvPicPr>
-        <p:blipFill>
-          <a:blip r:embed="rId2">
-            <a:extLst>
-              <a:ext uri="{28A0092B-C50C-407E-A947-70E740481C1C}">
-                <a14:useLocalDpi xmlns:a14="http://schemas.microsoft.com/office/drawing/2010/main" val="0"/>
-              </a:ext>
-            </a:extLst>
-          </a:blip>
-          <a:stretch>
-            <a:fillRect/>
-          </a:stretch>
-        </p:blipFill>
-        <p:spPr>
-          <a:xfrm>
-            <a:off x="1" y="0"/>
-            <a:ext cx="12187344" cy="6857999"/>
-          </a:xfrm>
-        </p:spPr>
-      </p:pic>
-    </p:spTree>
-    <p:extLst>
-      <p:ext uri="{BB962C8B-B14F-4D97-AF65-F5344CB8AC3E}">
-        <p14:creationId xmlns:p14="http://schemas.microsoft.com/office/powerpoint/2010/main" val="1945193266"/>
-      </p:ext>
-    </p:extLst>
-  </p:cSld>
-  <p:clrMapOvr>
-    <a:masterClrMapping/>
-  </p:clrMapOvr>
-</p:sld>
-</file>
-
 <file path=ppt/slides/slide7.xml><?xml version="1.0" encoding="utf-8"?>
-<p:sld xmlns:a="http://schemas.openxmlformats.org/drawingml/2006/main" xmlns:r="http://schemas.openxmlformats.org/officeDocument/2006/relationships" xmlns:p="http://schemas.openxmlformats.org/presentationml/2006/main">
-  <p:cSld>
-    <p:spTree>
-      <p:nvGrpSpPr>
-        <p:cNvPr id="1" name=""/>
-        <p:cNvGrpSpPr/>
-        <p:nvPr/>
-      </p:nvGrpSpPr>
-      <p:grpSpPr>
-        <a:xfrm>
-          <a:off x="0" y="0"/>
-          <a:ext cx="0" cy="0"/>
-          <a:chOff x="0" y="0"/>
-          <a:chExt cx="0" cy="0"/>
-        </a:xfrm>
-      </p:grpSpPr>
-      <p:sp>
-        <p:nvSpPr>
-          <p:cNvPr id="2" name="Title 1">
-            <a:extLst>
-              <a:ext uri="{FF2B5EF4-FFF2-40B4-BE49-F238E27FC236}">
-                <a16:creationId xmlns:a16="http://schemas.microsoft.com/office/drawing/2014/main" id="{9A74597D-1EBE-488C-A05D-D0CA02F7B4EE}"/>
-              </a:ext>
-            </a:extLst>
-          </p:cNvPr>
-          <p:cNvSpPr>
-            <a:spLocks noGrp="1"/>
-          </p:cNvSpPr>
-          <p:nvPr>
-            <p:ph type="title"/>
-          </p:nvPr>
-        </p:nvSpPr>
-        <p:spPr/>
-        <p:txBody>
-          <a:bodyPr/>
-          <a:lstStyle/>
-          <a:p>
-            <a:r>
-              <a:rPr lang="en-US" dirty="0"/>
-              <a:t>Regression</a:t>
-            </a:r>
-          </a:p>
-        </p:txBody>
-      </p:sp>
-      <p:pic>
-        <p:nvPicPr>
-          <p:cNvPr id="5" name="Content Placeholder 4">
-            <a:extLst>
-              <a:ext uri="{FF2B5EF4-FFF2-40B4-BE49-F238E27FC236}">
-                <a16:creationId xmlns:a16="http://schemas.microsoft.com/office/drawing/2014/main" id="{FBD400AA-B24F-4F1E-BB69-742A6DB3CD7E}"/>
-              </a:ext>
-            </a:extLst>
-          </p:cNvPr>
-          <p:cNvPicPr>
-            <a:picLocks noGrp="1" noChangeAspect="1"/>
-          </p:cNvPicPr>
-          <p:nvPr>
-            <p:ph idx="1"/>
-          </p:nvPr>
-        </p:nvPicPr>
-        <p:blipFill>
-          <a:blip r:embed="rId2">
-            <a:extLst>
-              <a:ext uri="{28A0092B-C50C-407E-A947-70E740481C1C}">
-                <a14:useLocalDpi xmlns:a14="http://schemas.microsoft.com/office/drawing/2010/main" val="0"/>
-              </a:ext>
-            </a:extLst>
-          </a:blip>
-          <a:stretch>
-            <a:fillRect/>
-          </a:stretch>
-        </p:blipFill>
-        <p:spPr>
-          <a:xfrm>
-            <a:off x="707517" y="2111880"/>
-            <a:ext cx="10776965" cy="4555620"/>
-          </a:xfrm>
-        </p:spPr>
-      </p:pic>
-    </p:spTree>
-    <p:extLst>
-      <p:ext uri="{BB962C8B-B14F-4D97-AF65-F5344CB8AC3E}">
-        <p14:creationId xmlns:p14="http://schemas.microsoft.com/office/powerpoint/2010/main" val="129825343"/>
-      </p:ext>
-    </p:extLst>
-  </p:cSld>
-  <p:clrMapOvr>
-    <a:masterClrMapping/>
-  </p:clrMapOvr>
-</p:sld>
-</file>
-
-<file path=ppt/slides/slide8.xml><?xml version="1.0" encoding="utf-8"?>
 <p:sld xmlns:a="http://schemas.openxmlformats.org/drawingml/2006/main" xmlns:r="http://schemas.openxmlformats.org/officeDocument/2006/relationships" xmlns:p="http://schemas.openxmlformats.org/presentationml/2006/main">
   <p:cSld>
     <p:spTree>
@@ -8378,6 +9184,102 @@
 </p:sld>
 </file>
 
+<file path=ppt/slides/slide8.xml><?xml version="1.0" encoding="utf-8"?>
+<p:sld xmlns:a="http://schemas.openxmlformats.org/drawingml/2006/main" xmlns:r="http://schemas.openxmlformats.org/officeDocument/2006/relationships" xmlns:p="http://schemas.openxmlformats.org/presentationml/2006/main">
+  <p:cSld>
+    <p:spTree>
+      <p:nvGrpSpPr>
+        <p:cNvPr id="1" name=""/>
+        <p:cNvGrpSpPr/>
+        <p:nvPr/>
+      </p:nvGrpSpPr>
+      <p:grpSpPr>
+        <a:xfrm>
+          <a:off x="0" y="0"/>
+          <a:ext cx="0" cy="0"/>
+          <a:chOff x="0" y="0"/>
+          <a:chExt cx="0" cy="0"/>
+        </a:xfrm>
+      </p:grpSpPr>
+      <p:sp>
+        <p:nvSpPr>
+          <p:cNvPr id="2" name="Title 1">
+            <a:extLst>
+              <a:ext uri="{FF2B5EF4-FFF2-40B4-BE49-F238E27FC236}">
+                <a16:creationId xmlns:a16="http://schemas.microsoft.com/office/drawing/2014/main" id="{9A74597D-1EBE-488C-A05D-D0CA02F7B4EE}"/>
+              </a:ext>
+            </a:extLst>
+          </p:cNvPr>
+          <p:cNvSpPr>
+            <a:spLocks noGrp="1"/>
+          </p:cNvSpPr>
+          <p:nvPr>
+            <p:ph type="title"/>
+          </p:nvPr>
+        </p:nvSpPr>
+        <p:spPr/>
+        <p:txBody>
+          <a:bodyPr/>
+          <a:lstStyle/>
+          <a:p>
+            <a:r>
+              <a:rPr lang="en-US" dirty="0"/>
+              <a:t>Regression</a:t>
+            </a:r>
+          </a:p>
+        </p:txBody>
+      </p:sp>
+      <p:pic>
+        <p:nvPicPr>
+          <p:cNvPr id="7" name="Content Placeholder 6" descr="The image displays a scatter plot with a regression line, indicating a positive correlation between the number of views and likes, with confidence intervals suggesting a statistically significant relationship.&#10;&#10;AI-generated content may be incorrect.">
+            <a:extLst>
+              <a:ext uri="{FF2B5EF4-FFF2-40B4-BE49-F238E27FC236}">
+                <a16:creationId xmlns:a16="http://schemas.microsoft.com/office/drawing/2014/main" id="{FF415377-A8B6-AF39-245F-BD4869525BE2}"/>
+              </a:ext>
+            </a:extLst>
+          </p:cNvPr>
+          <p:cNvPicPr>
+            <a:picLocks noGrp="1" noChangeAspect="1"/>
+          </p:cNvPicPr>
+          <p:nvPr>
+            <p:ph idx="1"/>
+          </p:nvPr>
+        </p:nvPicPr>
+        <p:blipFill>
+          <a:blip r:embed="rId2">
+            <a:extLst>
+              <a:ext uri="{28A0092B-C50C-407E-A947-70E740481C1C}">
+                <a14:useLocalDpi xmlns:a14="http://schemas.microsoft.com/office/drawing/2010/main" val="0"/>
+              </a:ext>
+            </a:extLst>
+          </a:blip>
+          <a:stretch>
+            <a:fillRect/>
+          </a:stretch>
+        </p:blipFill>
+        <p:spPr>
+          <a:xfrm>
+            <a:off x="0" y="0"/>
+            <a:ext cx="12191999" cy="6858000"/>
+          </a:xfrm>
+          <a:prstGeom prst="rect">
+            <a:avLst/>
+          </a:prstGeom>
+        </p:spPr>
+      </p:pic>
+    </p:spTree>
+    <p:extLst>
+      <p:ext uri="{BB962C8B-B14F-4D97-AF65-F5344CB8AC3E}">
+        <p14:creationId xmlns:p14="http://schemas.microsoft.com/office/powerpoint/2010/main" val="129825343"/>
+      </p:ext>
+    </p:extLst>
+  </p:cSld>
+  <p:clrMapOvr>
+    <a:masterClrMapping/>
+  </p:clrMapOvr>
+</p:sld>
+</file>
+
 <file path=ppt/slides/slide9.xml><?xml version="1.0" encoding="utf-8"?>
 <p:sld xmlns:a="http://schemas.openxmlformats.org/drawingml/2006/main" xmlns:r="http://schemas.openxmlformats.org/officeDocument/2006/relationships" xmlns:p="http://schemas.openxmlformats.org/presentationml/2006/main">
   <p:cSld>
@@ -8395,325 +9297,102 @@
           <a:chExt cx="0" cy="0"/>
         </a:xfrm>
       </p:grpSpPr>
-      <p:pic>
-        <p:nvPicPr>
-          <p:cNvPr id="5" name="Content Placeholder 4">
+      <p:sp>
+        <p:nvSpPr>
+          <p:cNvPr id="2" name="Title 1">
             <a:extLst>
               <a:ext uri="{FF2B5EF4-FFF2-40B4-BE49-F238E27FC236}">
-                <a16:creationId xmlns:a16="http://schemas.microsoft.com/office/drawing/2014/main" id="{5B6A3E19-4E2E-4263-8708-BD52414703B3}"/>
+                <a16:creationId xmlns:a16="http://schemas.microsoft.com/office/drawing/2014/main" id="{8F3E9E88-96C5-4297-2DF7-60133F8A042C}"/>
               </a:ext>
             </a:extLst>
           </p:cNvPr>
-          <p:cNvPicPr>
-            <a:picLocks noGrp="1" noChangeAspect="1"/>
-          </p:cNvPicPr>
-          <p:nvPr>
-            <p:ph idx="1"/>
-          </p:nvPr>
-        </p:nvPicPr>
-        <p:blipFill>
-          <a:blip r:embed="rId3">
-            <a:extLst>
-              <a:ext uri="{28A0092B-C50C-407E-A947-70E740481C1C}">
-                <a14:useLocalDpi xmlns:a14="http://schemas.microsoft.com/office/drawing/2010/main" val="0"/>
-              </a:ext>
-            </a:extLst>
-          </a:blip>
-          <a:stretch>
-            <a:fillRect/>
-          </a:stretch>
-        </p:blipFill>
-        <p:spPr>
-          <a:xfrm>
-            <a:off x="16609" y="0"/>
-            <a:ext cx="12175391" cy="6858000"/>
-          </a:xfrm>
-        </p:spPr>
-      </p:pic>
-      <p:sp>
-        <p:nvSpPr>
-          <p:cNvPr id="6" name="Oval 5">
+          <p:cNvSpPr>
+            <a:spLocks noGrp="1"/>
+          </p:cNvSpPr>
+          <p:nvPr>
+            <p:ph type="title"/>
+          </p:nvPr>
+        </p:nvSpPr>
+        <p:spPr/>
+        <p:txBody>
+          <a:bodyPr/>
+          <a:lstStyle/>
+          <a:p>
+            <a:endParaRPr lang="en-US"/>
+          </a:p>
+        </p:txBody>
+      </p:sp>
+      <p:sp>
+        <p:nvSpPr>
+          <p:cNvPr id="3" name="Content Placeholder 2">
             <a:extLst>
               <a:ext uri="{FF2B5EF4-FFF2-40B4-BE49-F238E27FC236}">
-                <a16:creationId xmlns:a16="http://schemas.microsoft.com/office/drawing/2014/main" id="{55689BE9-DCCC-469E-8CA1-9AAB2F043E2F}"/>
+                <a16:creationId xmlns:a16="http://schemas.microsoft.com/office/drawing/2014/main" id="{929990AD-1E62-97CF-6034-5966B15E76DB}"/>
               </a:ext>
             </a:extLst>
           </p:cNvPr>
-          <p:cNvSpPr/>
-          <p:nvPr/>
-        </p:nvSpPr>
-        <p:spPr>
-          <a:xfrm>
-            <a:off x="504825" y="2962275"/>
-            <a:ext cx="4210050" cy="1247775"/>
-          </a:xfrm>
-          <a:prstGeom prst="ellipse">
-            <a:avLst/>
-          </a:prstGeom>
-          <a:noFill/>
-          <a:ln>
-            <a:solidFill>
-              <a:schemeClr val="accent5"/>
-            </a:solidFill>
-          </a:ln>
-        </p:spPr>
-        <p:style>
-          <a:lnRef idx="2">
-            <a:schemeClr val="accent1">
-              <a:shade val="50000"/>
-            </a:schemeClr>
-          </a:lnRef>
-          <a:fillRef idx="1">
-            <a:schemeClr val="accent1"/>
-          </a:fillRef>
-          <a:effectRef idx="0">
-            <a:schemeClr val="accent1"/>
-          </a:effectRef>
-          <a:fontRef idx="minor">
-            <a:schemeClr val="lt1"/>
-          </a:fontRef>
-        </p:style>
-        <p:txBody>
-          <a:bodyPr rtlCol="0" anchor="ctr"/>
-          <a:lstStyle/>
-          <a:p>
-            <a:pPr algn="ctr"/>
-            <a:endParaRPr lang="en-US"/>
-          </a:p>
-        </p:txBody>
-      </p:sp>
-      <p:sp>
-        <p:nvSpPr>
-          <p:cNvPr id="7" name="Oval 6">
-            <a:extLst>
-              <a:ext uri="{FF2B5EF4-FFF2-40B4-BE49-F238E27FC236}">
-                <a16:creationId xmlns:a16="http://schemas.microsoft.com/office/drawing/2014/main" id="{6A60CC85-C09F-473C-BFFE-B4E0D11FC50B}"/>
-              </a:ext>
-            </a:extLst>
-          </p:cNvPr>
-          <p:cNvSpPr/>
-          <p:nvPr/>
-        </p:nvSpPr>
-        <p:spPr>
-          <a:xfrm>
-            <a:off x="2419350" y="1409701"/>
-            <a:ext cx="8782050" cy="857249"/>
-          </a:xfrm>
-          <a:prstGeom prst="ellipse">
-            <a:avLst/>
-          </a:prstGeom>
-          <a:noFill/>
-          <a:ln>
-            <a:solidFill>
-              <a:schemeClr val="accent5"/>
-            </a:solidFill>
-          </a:ln>
-        </p:spPr>
-        <p:style>
-          <a:lnRef idx="2">
-            <a:schemeClr val="accent1">
-              <a:shade val="50000"/>
-            </a:schemeClr>
-          </a:lnRef>
-          <a:fillRef idx="1">
-            <a:schemeClr val="accent1"/>
-          </a:fillRef>
-          <a:effectRef idx="0">
-            <a:schemeClr val="accent1"/>
-          </a:effectRef>
-          <a:fontRef idx="minor">
-            <a:schemeClr val="lt1"/>
-          </a:fontRef>
-        </p:style>
-        <p:txBody>
-          <a:bodyPr rtlCol="0" anchor="ctr"/>
-          <a:lstStyle/>
-          <a:p>
-            <a:pPr algn="ctr"/>
-            <a:endParaRPr lang="en-US"/>
+          <p:cNvSpPr>
+            <a:spLocks noGrp="1"/>
+          </p:cNvSpPr>
+          <p:nvPr>
+            <p:ph idx="1"/>
+          </p:nvPr>
+        </p:nvSpPr>
+        <p:spPr/>
+        <p:txBody>
+          <a:bodyPr/>
+          <a:lstStyle/>
+          <a:p>
+            <a:r>
+              <a:rPr lang="en-US" u="sng" dirty="0">
+                <a:hlinkClick r:id="rId2"/>
+              </a:rPr>
+              <a:t>https://www.instagram.com/reel/DDXohBRv5U5/</a:t>
+            </a:r>
+            <a:r>
+              <a:rPr lang="en-US" dirty="0"/>
+              <a:t> </a:t>
+            </a:r>
+          </a:p>
+          <a:p>
+            <a:r>
+              <a:rPr lang="en-US" u="sng" dirty="0">
+                <a:hlinkClick r:id="rId3"/>
+              </a:rPr>
+              <a:t>https://www.instagram.com/reel/DNYX-B6xKx8/</a:t>
+            </a:r>
+            <a:r>
+              <a:rPr lang="en-US" dirty="0"/>
+              <a:t> </a:t>
+            </a:r>
+          </a:p>
+          <a:p>
+            <a:r>
+              <a:rPr lang="en-US" dirty="0">
+                <a:hlinkClick r:id="rId4"/>
+              </a:rPr>
+              <a:t>https://www.instagram.com/reel/DK2Q7I-x5Tq/</a:t>
+            </a:r>
+            <a:endParaRPr lang="en-US" dirty="0"/>
+          </a:p>
+          <a:p>
+            <a:pPr marL="0" indent="0">
+              <a:buNone/>
+            </a:pPr>
+            <a:endParaRPr lang="en-US" dirty="0"/>
           </a:p>
         </p:txBody>
       </p:sp>
     </p:spTree>
     <p:extLst>
       <p:ext uri="{BB962C8B-B14F-4D97-AF65-F5344CB8AC3E}">
-        <p14:creationId xmlns:p14="http://schemas.microsoft.com/office/powerpoint/2010/main" val="2955730375"/>
+        <p14:creationId xmlns:p14="http://schemas.microsoft.com/office/powerpoint/2010/main" val="2218329834"/>
       </p:ext>
     </p:extLst>
   </p:cSld>
   <p:clrMapOvr>
     <a:masterClrMapping/>
   </p:clrMapOvr>
-  <p:timing>
-    <p:tnLst>
-      <p:par>
-        <p:cTn id="1" dur="indefinite" restart="never" nodeType="tmRoot">
-          <p:childTnLst>
-            <p:seq concurrent="1" nextAc="seek">
-              <p:cTn id="2" dur="indefinite" nodeType="mainSeq">
-                <p:childTnLst>
-                  <p:par>
-                    <p:cTn id="3" fill="hold">
-                      <p:stCondLst>
-                        <p:cond delay="indefinite"/>
-                      </p:stCondLst>
-                      <p:childTnLst>
-                        <p:par>
-                          <p:cTn id="4" fill="hold">
-                            <p:stCondLst>
-                              <p:cond delay="0"/>
-                            </p:stCondLst>
-                            <p:childTnLst>
-                              <p:par>
-                                <p:cTn id="5" presetID="1" presetClass="entr" presetSubtype="0" fill="hold" grpId="0" nodeType="clickEffect">
-                                  <p:stCondLst>
-                                    <p:cond delay="0"/>
-                                  </p:stCondLst>
-                                  <p:childTnLst>
-                                    <p:set>
-                                      <p:cBhvr>
-                                        <p:cTn id="6" dur="1" fill="hold">
-                                          <p:stCondLst>
-                                            <p:cond delay="0"/>
-                                          </p:stCondLst>
-                                        </p:cTn>
-                                        <p:tgtEl>
-                                          <p:spTgt spid="6"/>
-                                        </p:tgtEl>
-                                        <p:attrNameLst>
-                                          <p:attrName>style.visibility</p:attrName>
-                                        </p:attrNameLst>
-                                      </p:cBhvr>
-                                      <p:to>
-                                        <p:strVal val="visible"/>
-                                      </p:to>
-                                    </p:set>
-                                  </p:childTnLst>
-                                </p:cTn>
-                              </p:par>
-                            </p:childTnLst>
-                          </p:cTn>
-                        </p:par>
-                      </p:childTnLst>
-                    </p:cTn>
-                  </p:par>
-                  <p:par>
-                    <p:cTn id="7" fill="hold">
-                      <p:stCondLst>
-                        <p:cond delay="indefinite"/>
-                      </p:stCondLst>
-                      <p:childTnLst>
-                        <p:par>
-                          <p:cTn id="8" fill="hold">
-                            <p:stCondLst>
-                              <p:cond delay="0"/>
-                            </p:stCondLst>
-                            <p:childTnLst>
-                              <p:par>
-                                <p:cTn id="9" presetID="2" presetClass="entr" presetSubtype="4" fill="hold" grpId="0" nodeType="clickEffect">
-                                  <p:stCondLst>
-                                    <p:cond delay="0"/>
-                                  </p:stCondLst>
-                                  <p:childTnLst>
-                                    <p:set>
-                                      <p:cBhvr>
-                                        <p:cTn id="10" dur="1" fill="hold">
-                                          <p:stCondLst>
-                                            <p:cond delay="0"/>
-                                          </p:stCondLst>
-                                        </p:cTn>
-                                        <p:tgtEl>
-                                          <p:spTgt spid="7"/>
-                                        </p:tgtEl>
-                                        <p:attrNameLst>
-                                          <p:attrName>style.visibility</p:attrName>
-                                        </p:attrNameLst>
-                                      </p:cBhvr>
-                                      <p:to>
-                                        <p:strVal val="visible"/>
-                                      </p:to>
-                                    </p:set>
-                                    <p:anim calcmode="lin" valueType="num">
-                                      <p:cBhvr additive="base">
-                                        <p:cTn id="11" dur="500" fill="hold"/>
-                                        <p:tgtEl>
-                                          <p:spTgt spid="7"/>
-                                        </p:tgtEl>
-                                        <p:attrNameLst>
-                                          <p:attrName>ppt_x</p:attrName>
-                                        </p:attrNameLst>
-                                      </p:cBhvr>
-                                      <p:tavLst>
-                                        <p:tav tm="0">
-                                          <p:val>
-                                            <p:strVal val="#ppt_x"/>
-                                          </p:val>
-                                        </p:tav>
-                                        <p:tav tm="100000">
-                                          <p:val>
-                                            <p:strVal val="#ppt_x"/>
-                                          </p:val>
-                                        </p:tav>
-                                      </p:tavLst>
-                                    </p:anim>
-                                    <p:anim calcmode="lin" valueType="num">
-                                      <p:cBhvr additive="base">
-                                        <p:cTn id="12" dur="500" fill="hold"/>
-                                        <p:tgtEl>
-                                          <p:spTgt spid="7"/>
-                                        </p:tgtEl>
-                                        <p:attrNameLst>
-                                          <p:attrName>ppt_y</p:attrName>
-                                        </p:attrNameLst>
-                                      </p:cBhvr>
-                                      <p:tavLst>
-                                        <p:tav tm="0">
-                                          <p:val>
-                                            <p:strVal val="1+#ppt_h/2"/>
-                                          </p:val>
-                                        </p:tav>
-                                        <p:tav tm="100000">
-                                          <p:val>
-                                            <p:strVal val="#ppt_y"/>
-                                          </p:val>
-                                        </p:tav>
-                                      </p:tavLst>
-                                    </p:anim>
-                                  </p:childTnLst>
-                                </p:cTn>
-                              </p:par>
-                            </p:childTnLst>
-                          </p:cTn>
-                        </p:par>
-                      </p:childTnLst>
-                    </p:cTn>
-                  </p:par>
-                </p:childTnLst>
-              </p:cTn>
-              <p:prevCondLst>
-                <p:cond evt="onPrev" delay="0">
-                  <p:tgtEl>
-                    <p:sldTgt/>
-                  </p:tgtEl>
-                </p:cond>
-              </p:prevCondLst>
-              <p:nextCondLst>
-                <p:cond evt="onNext" delay="0">
-                  <p:tgtEl>
-                    <p:sldTgt/>
-                  </p:tgtEl>
-                </p:cond>
-              </p:nextCondLst>
-            </p:seq>
-          </p:childTnLst>
-        </p:cTn>
-      </p:par>
-    </p:tnLst>
-    <p:bldLst>
-      <p:bldP spid="6" grpId="0" animBg="1"/>
-      <p:bldP spid="7" grpId="0" animBg="1"/>
-    </p:bldLst>
-  </p:timing>
 </p:sld>
 </file>
 
